--- a/bloom-2sigma.pptx
+++ b/bloom-2sigma.pptx
@@ -21,7 +21,7 @@
     <p:sldId id="269" r:id="rId20"/>
     <p:sldId id="270" r:id="rId21"/>
   </p:sldIdLst>
-  <p:sldSz cx="9144000" cy="6858000" type="screen4x3"/>
+  <p:sldSz cx="12191695" cy="6858000" type="screen4x3"/>
   <p:notesSz cx="6858000" cy="9144000"/>
   <p:defaultTextStyle>
     <a:defPPr>
@@ -3095,6 +3095,14 @@
 <file path=ppt/slides/slide1.xml><?xml version="1.0" encoding="utf-8"?>
 <p:sld xmlns:a="http://schemas.openxmlformats.org/drawingml/2006/main" xmlns:p="http://schemas.openxmlformats.org/presentationml/2006/main" xmlns:r="http://schemas.openxmlformats.org/officeDocument/2006/relationships">
   <p:cSld>
+    <p:bg>
+      <p:bgPr>
+        <a:solidFill>
+          <a:srgbClr val="0F2A44"/>
+        </a:solidFill>
+        <a:effectLst/>
+      </p:bgPr>
+    </p:bg>
     <p:spTree>
       <p:nvGrpSpPr>
         <p:cNvPr id="1" name=""/>
@@ -3104,42 +3112,314 @@
       <p:grpSpPr/>
       <p:sp>
         <p:nvSpPr>
-          <p:cNvPr id="2" name="Title 1"/>
-          <p:cNvSpPr>
-            <a:spLocks noGrp="1"/>
-          </p:cNvSpPr>
-          <p:nvPr>
-            <p:ph type="ctrTitle"/>
-          </p:nvPr>
-        </p:nvSpPr>
-        <p:spPr/>
-        <p:txBody>
-          <a:bodyPr/>
-          <a:lstStyle/>
-          <a:p>
-            <a:r>
-              <a:t>고의숙 교육감의 "초개별화 맞춤형 교육"</a:t>
-            </a:r>
-          </a:p>
-        </p:txBody>
-      </p:sp>
-      <p:sp>
-        <p:nvSpPr>
-          <p:cNvPr id="3" name="Subtitle 2"/>
-          <p:cNvSpPr>
-            <a:spLocks noGrp="1"/>
-          </p:cNvSpPr>
-          <p:nvPr>
-            <p:ph type="subTitle" idx="1"/>
-          </p:nvPr>
-        </p:nvSpPr>
-        <p:spPr/>
-        <p:txBody>
-          <a:bodyPr/>
-          <a:lstStyle/>
-          <a:p>
-            <a:r>
-              <a:t>제주도교육인수위원회 미래학력분과</a:t>
+          <p:cNvPr id="2" name="Rectangle 1"/>
+          <p:cNvSpPr/>
+          <p:nvPr/>
+        </p:nvSpPr>
+        <p:spPr>
+          <a:xfrm>
+            <a:off x="0" y="0"/>
+            <a:ext cx="12191695" cy="201168"/>
+          </a:xfrm>
+          <a:prstGeom prst="rect">
+            <a:avLst/>
+          </a:prstGeom>
+          <a:solidFill>
+            <a:srgbClr val="1CC5B0"/>
+          </a:solidFill>
+          <a:ln>
+            <a:noFill/>
+          </a:ln>
+          <a:effectLst/>
+        </p:spPr>
+        <p:style>
+          <a:lnRef idx="1">
+            <a:schemeClr val="accent1"/>
+          </a:lnRef>
+          <a:fillRef idx="3">
+            <a:schemeClr val="accent1"/>
+          </a:fillRef>
+          <a:effectRef idx="2">
+            <a:schemeClr val="accent1"/>
+          </a:effectRef>
+          <a:fontRef idx="minor">
+            <a:schemeClr val="lt1"/>
+          </a:fontRef>
+        </p:style>
+        <p:txBody>
+          <a:bodyPr rtlCol="0" anchor="ctr"/>
+          <a:lstStyle/>
+          <a:p>
+            <a:pPr algn="ctr"/>
+          </a:p>
+        </p:txBody>
+      </p:sp>
+      <p:sp>
+        <p:nvSpPr>
+          <p:cNvPr id="3" name="TextBox 2"/>
+          <p:cNvSpPr txBox="1"/>
+          <p:nvPr/>
+        </p:nvSpPr>
+        <p:spPr>
+          <a:xfrm>
+            <a:off x="7955279" y="2651760"/>
+            <a:ext cx="4023360" cy="3931920"/>
+          </a:xfrm>
+          <a:prstGeom prst="rect">
+            <a:avLst/>
+          </a:prstGeom>
+          <a:noFill/>
+        </p:spPr>
+        <p:txBody>
+          <a:bodyPr wrap="square" anchor="b" lIns="0" rIns="0" tIns="0" bIns="0">
+            <a:spAutoFit/>
+          </a:bodyPr>
+          <a:lstStyle/>
+          <a:p>
+            <a:pPr algn="r">
+              <a:spcBef>
+                <a:spcPts val="0"/>
+              </a:spcBef>
+              <a:spcAft>
+                <a:spcPts val="0"/>
+              </a:spcAft>
+            </a:pPr>
+            <a:r>
+              <a:rPr sz="22000" b="1" i="0">
+                <a:solidFill>
+                  <a:srgbClr val="173B5C"/>
+                </a:solidFill>
+                <a:latin typeface="맑은 고딕"/>
+                <a:ea typeface="맑은 고딕"/>
+                <a:cs typeface="맑은 고딕"/>
+              </a:rPr>
+              <a:t>2σ</a:t>
+            </a:r>
+          </a:p>
+        </p:txBody>
+      </p:sp>
+      <p:sp>
+        <p:nvSpPr>
+          <p:cNvPr id="4" name="TextBox 3"/>
+          <p:cNvSpPr txBox="1"/>
+          <p:nvPr/>
+        </p:nvSpPr>
+        <p:spPr>
+          <a:xfrm>
+            <a:off x="777240" y="1965960"/>
+            <a:ext cx="10637215" cy="457200"/>
+          </a:xfrm>
+          <a:prstGeom prst="rect">
+            <a:avLst/>
+          </a:prstGeom>
+          <a:noFill/>
+        </p:spPr>
+        <p:txBody>
+          <a:bodyPr wrap="square" anchor="t" lIns="0" rIns="0" tIns="0" bIns="0">
+            <a:spAutoFit/>
+          </a:bodyPr>
+          <a:lstStyle/>
+          <a:p>
+            <a:pPr algn="l">
+              <a:spcBef>
+                <a:spcPts val="0"/>
+              </a:spcBef>
+              <a:spcAft>
+                <a:spcPts val="0"/>
+              </a:spcAft>
+            </a:pPr>
+            <a:r>
+              <a:rPr sz="1500" b="1" i="0">
+                <a:solidFill>
+                  <a:srgbClr val="1CC5B0"/>
+                </a:solidFill>
+                <a:latin typeface="맑은 고딕"/>
+                <a:ea typeface="맑은 고딕"/>
+                <a:cs typeface="맑은 고딕"/>
+              </a:rPr>
+              <a:t>이론적 배경 · 핵심공약</a:t>
+            </a:r>
+          </a:p>
+        </p:txBody>
+      </p:sp>
+      <p:sp>
+        <p:nvSpPr>
+          <p:cNvPr id="5" name="TextBox 4"/>
+          <p:cNvSpPr txBox="1"/>
+          <p:nvPr/>
+        </p:nvSpPr>
+        <p:spPr>
+          <a:xfrm>
+            <a:off x="777240" y="2423160"/>
+            <a:ext cx="9692640" cy="1737360"/>
+          </a:xfrm>
+          <a:prstGeom prst="rect">
+            <a:avLst/>
+          </a:prstGeom>
+          <a:noFill/>
+        </p:spPr>
+        <p:txBody>
+          <a:bodyPr wrap="square" anchor="t" lIns="0" rIns="0" tIns="0" bIns="0">
+            <a:spAutoFit/>
+          </a:bodyPr>
+          <a:lstStyle/>
+          <a:p>
+            <a:pPr algn="l">
+              <a:lnSpc>
+                <a:spcPct val="106000"/>
+              </a:lnSpc>
+              <a:spcBef>
+                <a:spcPts val="0"/>
+              </a:spcBef>
+              <a:spcAft>
+                <a:spcPts val="0"/>
+              </a:spcAft>
+            </a:pPr>
+            <a:r>
+              <a:rPr sz="4600" b="1" i="0">
+                <a:solidFill>
+                  <a:srgbClr val="FFFFFF"/>
+                </a:solidFill>
+                <a:latin typeface="맑은 고딕"/>
+                <a:ea typeface="맑은 고딕"/>
+                <a:cs typeface="맑은 고딕"/>
+              </a:rPr>
+              <a:t>초개별화 맞춤형 교육</a:t>
+            </a:r>
+          </a:p>
+        </p:txBody>
+      </p:sp>
+      <p:sp>
+        <p:nvSpPr>
+          <p:cNvPr id="6" name="TextBox 5"/>
+          <p:cNvSpPr txBox="1"/>
+          <p:nvPr/>
+        </p:nvSpPr>
+        <p:spPr>
+          <a:xfrm>
+            <a:off x="777240" y="4343400"/>
+            <a:ext cx="9692640" cy="1280160"/>
+          </a:xfrm>
+          <a:prstGeom prst="rect">
+            <a:avLst/>
+          </a:prstGeom>
+          <a:noFill/>
+        </p:spPr>
+        <p:txBody>
+          <a:bodyPr wrap="square" anchor="t" lIns="0" rIns="0" tIns="0" bIns="0">
+            <a:spAutoFit/>
+          </a:bodyPr>
+          <a:lstStyle/>
+          <a:p>
+            <a:pPr algn="l">
+              <a:lnSpc>
+                <a:spcPct val="125000"/>
+              </a:lnSpc>
+              <a:spcBef>
+                <a:spcPts val="0"/>
+              </a:spcBef>
+              <a:spcAft>
+                <a:spcPts val="0"/>
+              </a:spcAft>
+            </a:pPr>
+            <a:r>
+              <a:rPr sz="2000" b="0" i="0">
+                <a:solidFill>
+                  <a:srgbClr val="C7D5E2"/>
+                </a:solidFill>
+                <a:latin typeface="맑은 고딕"/>
+                <a:ea typeface="맑은 고딕"/>
+                <a:cs typeface="맑은 고딕"/>
+              </a:rPr>
+              <a:t>블룸의 ‘2 시그마 문제’와 AI — 고의숙 교육감 핵심공약의 이론적 배경</a:t>
+            </a:r>
+          </a:p>
+        </p:txBody>
+      </p:sp>
+      <p:sp>
+        <p:nvSpPr>
+          <p:cNvPr id="7" name="Rectangle 6"/>
+          <p:cNvSpPr/>
+          <p:nvPr/>
+        </p:nvSpPr>
+        <p:spPr>
+          <a:xfrm>
+            <a:off x="777240" y="5897880"/>
+            <a:ext cx="2011680" cy="45720"/>
+          </a:xfrm>
+          <a:prstGeom prst="rect">
+            <a:avLst/>
+          </a:prstGeom>
+          <a:solidFill>
+            <a:srgbClr val="1CC5B0"/>
+          </a:solidFill>
+          <a:ln>
+            <a:noFill/>
+          </a:ln>
+          <a:effectLst/>
+        </p:spPr>
+        <p:style>
+          <a:lnRef idx="1">
+            <a:schemeClr val="accent1"/>
+          </a:lnRef>
+          <a:fillRef idx="3">
+            <a:schemeClr val="accent1"/>
+          </a:fillRef>
+          <a:effectRef idx="2">
+            <a:schemeClr val="accent1"/>
+          </a:effectRef>
+          <a:fontRef idx="minor">
+            <a:schemeClr val="lt1"/>
+          </a:fontRef>
+        </p:style>
+        <p:txBody>
+          <a:bodyPr rtlCol="0" anchor="ctr"/>
+          <a:lstStyle/>
+          <a:p>
+            <a:pPr algn="ctr"/>
+          </a:p>
+        </p:txBody>
+      </p:sp>
+      <p:sp>
+        <p:nvSpPr>
+          <p:cNvPr id="8" name="TextBox 7"/>
+          <p:cNvSpPr txBox="1"/>
+          <p:nvPr/>
+        </p:nvSpPr>
+        <p:spPr>
+          <a:xfrm>
+            <a:off x="777240" y="6053328"/>
+            <a:ext cx="10637215" cy="457200"/>
+          </a:xfrm>
+          <a:prstGeom prst="rect">
+            <a:avLst/>
+          </a:prstGeom>
+          <a:noFill/>
+        </p:spPr>
+        <p:txBody>
+          <a:bodyPr wrap="square" anchor="t" lIns="0" rIns="0" tIns="0" bIns="0">
+            <a:spAutoFit/>
+          </a:bodyPr>
+          <a:lstStyle/>
+          <a:p>
+            <a:pPr algn="l">
+              <a:spcBef>
+                <a:spcPts val="0"/>
+              </a:spcBef>
+              <a:spcAft>
+                <a:spcPts val="0"/>
+              </a:spcAft>
+            </a:pPr>
+            <a:r>
+              <a:rPr sz="1400" b="0" i="0">
+                <a:solidFill>
+                  <a:srgbClr val="C7D5E2"/>
+                </a:solidFill>
+                <a:latin typeface="맑은 고딕"/>
+                <a:ea typeface="맑은 고딕"/>
+                <a:cs typeface="맑은 고딕"/>
+              </a:rPr>
+              <a:t>제주도교육인수위원회 · 미래학력분과</a:t>
             </a:r>
           </a:p>
         </p:txBody>
@@ -3155,6 +3435,14 @@
 <file path=ppt/slides/slide10.xml><?xml version="1.0" encoding="utf-8"?>
 <p:sld xmlns:a="http://schemas.openxmlformats.org/drawingml/2006/main" xmlns:p="http://schemas.openxmlformats.org/presentationml/2006/main" xmlns:r="http://schemas.openxmlformats.org/officeDocument/2006/relationships">
   <p:cSld>
+    <p:bg>
+      <p:bgPr>
+        <a:solidFill>
+          <a:srgbClr val="FFFFFF"/>
+        </a:solidFill>
+        <a:effectLst/>
+      </p:bgPr>
+    </p:bg>
     <p:spTree>
       <p:nvGrpSpPr>
         <p:cNvPr id="1" name=""/>
@@ -3164,69 +3452,392 @@
       <p:grpSpPr/>
       <p:sp>
         <p:nvSpPr>
-          <p:cNvPr id="2" name="Title 1"/>
-          <p:cNvSpPr>
-            <a:spLocks noGrp="1"/>
-          </p:cNvSpPr>
-          <p:nvPr>
-            <p:ph type="title"/>
-          </p:nvPr>
-        </p:nvSpPr>
-        <p:spPr/>
-        <p:txBody>
-          <a:bodyPr/>
-          <a:lstStyle/>
-          <a:p>
-            <a:r>
-              <a:t>4. 핵심 메시지 — '2 시그마 문제'란</a:t>
-            </a:r>
-          </a:p>
-        </p:txBody>
-      </p:sp>
-      <p:sp>
-        <p:nvSpPr>
-          <p:cNvPr id="3" name="Content Placeholder 2"/>
-          <p:cNvSpPr>
-            <a:spLocks noGrp="1"/>
-          </p:cNvSpPr>
-          <p:nvPr>
-            <p:ph idx="1"/>
-          </p:nvPr>
-        </p:nvSpPr>
-        <p:spPr/>
-        <p:txBody>
-          <a:bodyPr/>
-          <a:lstStyle/>
-          <a:p>
-            <a:pPr>
-              <a:defRPr sz="1600"/>
+          <p:cNvPr id="2" name="Rectangle 1"/>
+          <p:cNvSpPr/>
+          <p:nvPr/>
+        </p:nvSpPr>
+        <p:spPr>
+          <a:xfrm>
+            <a:off x="0" y="0"/>
+            <a:ext cx="12191695" cy="146304"/>
+          </a:xfrm>
+          <a:prstGeom prst="rect">
+            <a:avLst/>
+          </a:prstGeom>
+          <a:solidFill>
+            <a:srgbClr val="1CC5B0"/>
+          </a:solidFill>
+          <a:ln>
+            <a:noFill/>
+          </a:ln>
+          <a:effectLst/>
+        </p:spPr>
+        <p:style>
+          <a:lnRef idx="1">
+            <a:schemeClr val="accent1"/>
+          </a:lnRef>
+          <a:fillRef idx="3">
+            <a:schemeClr val="accent1"/>
+          </a:fillRef>
+          <a:effectRef idx="2">
+            <a:schemeClr val="accent1"/>
+          </a:effectRef>
+          <a:fontRef idx="minor">
+            <a:schemeClr val="lt1"/>
+          </a:fontRef>
+        </p:style>
+        <p:txBody>
+          <a:bodyPr rtlCol="0" anchor="ctr"/>
+          <a:lstStyle/>
+          <a:p>
+            <a:pPr algn="ctr"/>
+          </a:p>
+        </p:txBody>
+      </p:sp>
+      <p:sp>
+        <p:nvSpPr>
+          <p:cNvPr id="3" name="TextBox 2"/>
+          <p:cNvSpPr txBox="1"/>
+          <p:nvPr/>
+        </p:nvSpPr>
+        <p:spPr>
+          <a:xfrm>
+            <a:off x="777240" y="384048"/>
+            <a:ext cx="10637215" cy="365760"/>
+          </a:xfrm>
+          <a:prstGeom prst="rect">
+            <a:avLst/>
+          </a:prstGeom>
+          <a:noFill/>
+        </p:spPr>
+        <p:txBody>
+          <a:bodyPr wrap="square" anchor="t" lIns="0" rIns="0" tIns="0" bIns="0">
+            <a:spAutoFit/>
+          </a:bodyPr>
+          <a:lstStyle/>
+          <a:p>
+            <a:pPr algn="l">
+              <a:spcBef>
+                <a:spcPts val="0"/>
+              </a:spcBef>
+              <a:spcAft>
+                <a:spcPts val="0"/>
+              </a:spcAft>
             </a:pPr>
             <a:r>
-              <a:t>가장 좋은 조건(1:1 개인교습)에서 학생은 2σ 향상된다. 그러나 개인교습을 사회 전체에 제공하기엔 비용이 너무 크다.</a:t>
-            </a:r>
-          </a:p>
-          <a:p>
-            <a:pPr>
-              <a:defRPr sz="1600"/>
+              <a:rPr sz="1300" b="1" i="0">
+                <a:solidFill>
+                  <a:srgbClr val="1CC5B0"/>
+                </a:solidFill>
+                <a:latin typeface="맑은 고딕"/>
+                <a:ea typeface="맑은 고딕"/>
+                <a:cs typeface="맑은 고딕"/>
+              </a:rPr>
+              <a:t>현대적 실증</a:t>
+            </a:r>
+          </a:p>
+        </p:txBody>
+      </p:sp>
+      <p:sp>
+        <p:nvSpPr>
+          <p:cNvPr id="4" name="TextBox 3"/>
+          <p:cNvSpPr txBox="1"/>
+          <p:nvPr/>
+        </p:nvSpPr>
+        <p:spPr>
+          <a:xfrm>
+            <a:off x="777240" y="713232"/>
+            <a:ext cx="10637215" cy="914400"/>
+          </a:xfrm>
+          <a:prstGeom prst="rect">
+            <a:avLst/>
+          </a:prstGeom>
+          <a:noFill/>
+        </p:spPr>
+        <p:txBody>
+          <a:bodyPr wrap="square" anchor="t" lIns="0" rIns="0" tIns="0" bIns="0">
+            <a:spAutoFit/>
+          </a:bodyPr>
+          <a:lstStyle/>
+          <a:p>
+            <a:pPr algn="l">
+              <a:spcBef>
+                <a:spcPts val="0"/>
+              </a:spcBef>
+              <a:spcAft>
+                <a:spcPts val="0"/>
+              </a:spcAft>
             </a:pPr>
             <a:r>
-              <a:t>블룸은 "대부분의 학생이 이 높은 수준에 도달할 잠재력을 가지고 있다"고 강조하며, 연구·교육의 핵심 과제를 다음과 같이 제시한다.</a:t>
-            </a:r>
-          </a:p>
-          <a:p>
-            <a:pPr>
-              <a:defRPr sz="1600"/>
+              <a:rPr sz="2900" b="1" i="0">
+                <a:solidFill>
+                  <a:srgbClr val="0F2A44"/>
+                </a:solidFill>
+                <a:latin typeface="맑은 고딕"/>
+                <a:ea typeface="맑은 고딕"/>
+                <a:cs typeface="맑은 고딕"/>
+              </a:rPr>
+              <a:t>② 생성형 AI 시대(2023~) — 무작위통제연구(RCT)</a:t>
+            </a:r>
+          </a:p>
+        </p:txBody>
+      </p:sp>
+      <p:sp>
+        <p:nvSpPr>
+          <p:cNvPr id="5" name="Rectangle 4"/>
+          <p:cNvSpPr/>
+          <p:nvPr/>
+        </p:nvSpPr>
+        <p:spPr>
+          <a:xfrm>
+            <a:off x="777240" y="1481328"/>
+            <a:ext cx="1920240" cy="50292"/>
+          </a:xfrm>
+          <a:prstGeom prst="rect">
+            <a:avLst/>
+          </a:prstGeom>
+          <a:solidFill>
+            <a:srgbClr val="1CC5B0"/>
+          </a:solidFill>
+          <a:ln>
+            <a:noFill/>
+          </a:ln>
+          <a:effectLst/>
+        </p:spPr>
+        <p:style>
+          <a:lnRef idx="1">
+            <a:schemeClr val="accent1"/>
+          </a:lnRef>
+          <a:fillRef idx="3">
+            <a:schemeClr val="accent1"/>
+          </a:fillRef>
+          <a:effectRef idx="2">
+            <a:schemeClr val="accent1"/>
+          </a:effectRef>
+          <a:fontRef idx="minor">
+            <a:schemeClr val="lt1"/>
+          </a:fontRef>
+        </p:style>
+        <p:txBody>
+          <a:bodyPr rtlCol="0" anchor="ctr"/>
+          <a:lstStyle/>
+          <a:p>
+            <a:pPr algn="ctr"/>
+          </a:p>
+        </p:txBody>
+      </p:sp>
+      <p:sp>
+        <p:nvSpPr>
+          <p:cNvPr id="6" name="TextBox 5"/>
+          <p:cNvSpPr txBox="1"/>
+          <p:nvPr/>
+        </p:nvSpPr>
+        <p:spPr>
+          <a:xfrm>
+            <a:off x="777240" y="1828800"/>
+            <a:ext cx="10637215" cy="4297680"/>
+          </a:xfrm>
+          <a:prstGeom prst="rect">
+            <a:avLst/>
+          </a:prstGeom>
+          <a:noFill/>
+        </p:spPr>
+        <p:txBody>
+          <a:bodyPr wrap="square" anchor="t" lIns="0" rIns="0" tIns="0" bIns="0">
+            <a:spAutoFit/>
+          </a:bodyPr>
+          <a:lstStyle/>
+          <a:p>
+            <a:pPr algn="l">
+              <a:lnSpc>
+                <a:spcPct val="116000"/>
+              </a:lnSpc>
+              <a:spcBef>
+                <a:spcPts val="0"/>
+              </a:spcBef>
+              <a:spcAft>
+                <a:spcPts val="1100"/>
+              </a:spcAft>
             </a:pPr>
             <a:r>
-              <a:t>"일대일 개인교습에 근접한 효과를 내면서도, 대규모로 실현 가능한 집단 교수·학습 조건을 찾을 수 있는가?"</a:t>
-            </a:r>
-          </a:p>
-          <a:p>
-            <a:pPr>
-              <a:defRPr sz="1600"/>
+              <a:rPr sz="1300" b="1" i="0">
+                <a:solidFill>
+                  <a:srgbClr val="1CC5B0"/>
+                </a:solidFill>
+                <a:latin typeface="맑은 고딕"/>
+                <a:ea typeface="맑은 고딕"/>
+                <a:cs typeface="맑은 고딕"/>
+              </a:rPr>
+              <a:t>●  </a:t>
+            </a:r>
+            <a:r>
+              <a:rPr sz="1850" b="0" i="0">
+                <a:solidFill>
+                  <a:srgbClr val="1B2A38"/>
+                </a:solidFill>
+                <a:latin typeface="맑은 고딕"/>
+                <a:ea typeface="맑은 고딕"/>
+                <a:cs typeface="맑은 고딕"/>
+              </a:rPr>
+              <a:t>Kestin 외(2025, 하버드): 잘 설계된 AI 튜터가 활동중심 수업보다 2배 이상 학습 이득 — 더 짧은 시간에</a:t>
+            </a:r>
+          </a:p>
+          <a:p>
+            <a:pPr algn="l">
+              <a:lnSpc>
+                <a:spcPct val="116000"/>
+              </a:lnSpc>
+              <a:spcBef>
+                <a:spcPts val="0"/>
+              </a:spcBef>
+              <a:spcAft>
+                <a:spcPts val="1100"/>
+              </a:spcAft>
             </a:pPr>
             <a:r>
-              <a:t>이것이 '2 시그마 문제'이며, 이후 완전학습·교정 피드백·적응형 학습 연구의 출발점이 됐다.</a:t>
+              <a:rPr sz="1300" b="1" i="0">
+                <a:solidFill>
+                  <a:srgbClr val="1CC5B0"/>
+                </a:solidFill>
+                <a:latin typeface="맑은 고딕"/>
+                <a:ea typeface="맑은 고딕"/>
+                <a:cs typeface="맑은 고딕"/>
+              </a:rPr>
+              <a:t>●  </a:t>
+            </a:r>
+            <a:r>
+              <a:rPr sz="1850" b="0" i="0">
+                <a:solidFill>
+                  <a:srgbClr val="1B2A38"/>
+                </a:solidFill>
+                <a:latin typeface="맑은 고딕"/>
+                <a:ea typeface="맑은 고딕"/>
+                <a:cs typeface="맑은 고딕"/>
+              </a:rPr>
+              <a:t>나이지리아 대규모 RCT(World Bank, 2024): 생성형 AI 튜터 영어수업, 유의한 성취 향상</a:t>
+            </a:r>
+          </a:p>
+          <a:p>
+            <a:pPr algn="l" lvl="1">
+              <a:lnSpc>
+                <a:spcPct val="116000"/>
+              </a:lnSpc>
+              <a:spcBef>
+                <a:spcPts val="0"/>
+              </a:spcBef>
+              <a:spcAft>
+                <a:spcPts val="600"/>
+              </a:spcAft>
+            </a:pPr>
+            <a:r>
+              <a:rPr sz="1300" b="1" i="0">
+                <a:solidFill>
+                  <a:srgbClr val="6E7B8A"/>
+                </a:solidFill>
+                <a:latin typeface="맑은 고딕"/>
+                <a:ea typeface="맑은 고딕"/>
+                <a:cs typeface="맑은 고딕"/>
+              </a:rPr>
+              <a:t>–  </a:t>
+            </a:r>
+            <a:r>
+              <a:rPr sz="1550" b="0" i="0">
+                <a:solidFill>
+                  <a:srgbClr val="6E7B8A"/>
+                </a:solidFill>
+                <a:latin typeface="맑은 고딕"/>
+                <a:ea typeface="맑은 고딕"/>
+                <a:cs typeface="맑은 고딕"/>
+              </a:rPr>
+              <a:t>공통점 — “AI를 쓰면”이 아니라 “잘 설계된 AI가” 오른다</a:t>
+            </a:r>
+          </a:p>
+        </p:txBody>
+      </p:sp>
+      <p:sp>
+        <p:nvSpPr>
+          <p:cNvPr id="7" name="TextBox 6"/>
+          <p:cNvSpPr txBox="1"/>
+          <p:nvPr/>
+        </p:nvSpPr>
+        <p:spPr>
+          <a:xfrm>
+            <a:off x="777240" y="6419088"/>
+            <a:ext cx="8229600" cy="320040"/>
+          </a:xfrm>
+          <a:prstGeom prst="rect">
+            <a:avLst/>
+          </a:prstGeom>
+          <a:noFill/>
+        </p:spPr>
+        <p:txBody>
+          <a:bodyPr wrap="square" anchor="t" lIns="0" rIns="0" tIns="0" bIns="0">
+            <a:spAutoFit/>
+          </a:bodyPr>
+          <a:lstStyle/>
+          <a:p>
+            <a:pPr algn="l">
+              <a:spcBef>
+                <a:spcPts val="0"/>
+              </a:spcBef>
+              <a:spcAft>
+                <a:spcPts val="0"/>
+              </a:spcAft>
+            </a:pPr>
+            <a:r>
+              <a:rPr sz="1050" b="0" i="0">
+                <a:solidFill>
+                  <a:srgbClr val="6E7B8A"/>
+                </a:solidFill>
+                <a:latin typeface="맑은 고딕"/>
+                <a:ea typeface="맑은 고딕"/>
+                <a:cs typeface="맑은 고딕"/>
+              </a:rPr>
+              <a:t>블룸 2σ · 초개별화 맞춤형 교육</a:t>
+            </a:r>
+          </a:p>
+        </p:txBody>
+      </p:sp>
+      <p:sp>
+        <p:nvSpPr>
+          <p:cNvPr id="8" name="TextBox 7"/>
+          <p:cNvSpPr txBox="1"/>
+          <p:nvPr/>
+        </p:nvSpPr>
+        <p:spPr>
+          <a:xfrm>
+            <a:off x="10607040" y="6419088"/>
+            <a:ext cx="822960" cy="320040"/>
+          </a:xfrm>
+          <a:prstGeom prst="rect">
+            <a:avLst/>
+          </a:prstGeom>
+          <a:noFill/>
+        </p:spPr>
+        <p:txBody>
+          <a:bodyPr wrap="square" anchor="t" lIns="0" rIns="0" tIns="0" bIns="0">
+            <a:spAutoFit/>
+          </a:bodyPr>
+          <a:lstStyle/>
+          <a:p>
+            <a:pPr algn="r">
+              <a:spcBef>
+                <a:spcPts val="0"/>
+              </a:spcBef>
+              <a:spcAft>
+                <a:spcPts val="0"/>
+              </a:spcAft>
+            </a:pPr>
+            <a:r>
+              <a:rPr sz="1050" b="0" i="0">
+                <a:solidFill>
+                  <a:srgbClr val="6E7B8A"/>
+                </a:solidFill>
+                <a:latin typeface="맑은 고딕"/>
+                <a:ea typeface="맑은 고딕"/>
+                <a:cs typeface="맑은 고딕"/>
+              </a:rPr>
+              <a:t>5</a:t>
             </a:r>
           </a:p>
         </p:txBody>
@@ -3242,6 +3853,14 @@
 <file path=ppt/slides/slide11.xml><?xml version="1.0" encoding="utf-8"?>
 <p:sld xmlns:a="http://schemas.openxmlformats.org/drawingml/2006/main" xmlns:p="http://schemas.openxmlformats.org/presentationml/2006/main" xmlns:r="http://schemas.openxmlformats.org/officeDocument/2006/relationships">
   <p:cSld>
+    <p:bg>
+      <p:bgPr>
+        <a:solidFill>
+          <a:srgbClr val="FFFFFF"/>
+        </a:solidFill>
+        <a:effectLst/>
+      </p:bgPr>
+    </p:bg>
     <p:spTree>
       <p:nvGrpSpPr>
         <p:cNvPr id="1" name=""/>
@@ -3251,93 +3870,383 @@
       <p:grpSpPr/>
       <p:sp>
         <p:nvSpPr>
-          <p:cNvPr id="2" name="Title 1"/>
-          <p:cNvSpPr>
-            <a:spLocks noGrp="1"/>
-          </p:cNvSpPr>
-          <p:nvPr>
-            <p:ph type="title"/>
-          </p:nvPr>
-        </p:nvSpPr>
-        <p:spPr/>
-        <p:txBody>
-          <a:bodyPr/>
-          <a:lstStyle/>
-          <a:p>
-            <a:r>
-              <a:t>5. 블룸에서 AI 초개별화로 — 고전에서 실증으로</a:t>
-            </a:r>
-          </a:p>
-        </p:txBody>
-      </p:sp>
-      <p:sp>
-        <p:nvSpPr>
-          <p:cNvPr id="3" name="Content Placeholder 2"/>
-          <p:cNvSpPr>
-            <a:spLocks noGrp="1"/>
-          </p:cNvSpPr>
-          <p:nvPr>
-            <p:ph idx="1"/>
-          </p:nvPr>
-        </p:nvSpPr>
-        <p:spPr/>
-        <p:txBody>
-          <a:bodyPr/>
-          <a:lstStyle/>
-          <a:p>
-            <a:pPr>
-              <a:defRPr sz="1600"/>
+          <p:cNvPr id="2" name="Rectangle 1"/>
+          <p:cNvSpPr/>
+          <p:nvPr/>
+        </p:nvSpPr>
+        <p:spPr>
+          <a:xfrm>
+            <a:off x="0" y="0"/>
+            <a:ext cx="12191695" cy="146304"/>
+          </a:xfrm>
+          <a:prstGeom prst="rect">
+            <a:avLst/>
+          </a:prstGeom>
+          <a:solidFill>
+            <a:srgbClr val="1CC5B0"/>
+          </a:solidFill>
+          <a:ln>
+            <a:noFill/>
+          </a:ln>
+          <a:effectLst/>
+        </p:spPr>
+        <p:style>
+          <a:lnRef idx="1">
+            <a:schemeClr val="accent1"/>
+          </a:lnRef>
+          <a:fillRef idx="3">
+            <a:schemeClr val="accent1"/>
+          </a:fillRef>
+          <a:effectRef idx="2">
+            <a:schemeClr val="accent1"/>
+          </a:effectRef>
+          <a:fontRef idx="minor">
+            <a:schemeClr val="lt1"/>
+          </a:fontRef>
+        </p:style>
+        <p:txBody>
+          <a:bodyPr rtlCol="0" anchor="ctr"/>
+          <a:lstStyle/>
+          <a:p>
+            <a:pPr algn="ctr"/>
+          </a:p>
+        </p:txBody>
+      </p:sp>
+      <p:sp>
+        <p:nvSpPr>
+          <p:cNvPr id="3" name="TextBox 2"/>
+          <p:cNvSpPr txBox="1"/>
+          <p:nvPr/>
+        </p:nvSpPr>
+        <p:spPr>
+          <a:xfrm>
+            <a:off x="777240" y="713232"/>
+            <a:ext cx="10637215" cy="914400"/>
+          </a:xfrm>
+          <a:prstGeom prst="rect">
+            <a:avLst/>
+          </a:prstGeom>
+          <a:noFill/>
+        </p:spPr>
+        <p:txBody>
+          <a:bodyPr wrap="square" anchor="t" lIns="0" rIns="0" tIns="0" bIns="0">
+            <a:spAutoFit/>
+          </a:bodyPr>
+          <a:lstStyle/>
+          <a:p>
+            <a:pPr algn="l">
+              <a:spcBef>
+                <a:spcPts val="0"/>
+              </a:spcBef>
+              <a:spcAft>
+                <a:spcPts val="0"/>
+              </a:spcAft>
             </a:pPr>
             <a:r>
-              <a:t>블룸의 완전학습은 1960~80년대의 고전이며, 오늘날 적응형 학습·AI 디지털교과서(AIDT)의 개념적 뿌리로 계속 인용된다. 그러나 '개별화·완전학습'에서 한 걸음 더 나아간 '초개별화'를 정당화하려면, AI가 실제로 그 조건을 구현하는가에 대한 현대적 실증이 필요하다. 이 물음에 답하는 연구는 두 갈래로 축적돼 왔다.</a:t>
-            </a:r>
-          </a:p>
-          <a:p>
-            <a:pPr>
-              <a:defRPr sz="1600"/>
+              <a:rPr sz="2900" b="1" i="0">
+                <a:solidFill>
+                  <a:srgbClr val="0F2A44"/>
+                </a:solidFill>
+                <a:latin typeface="맑은 고딕"/>
+                <a:ea typeface="맑은 고딕"/>
+                <a:cs typeface="맑은 고딕"/>
+              </a:rPr>
+              <a:t>어떻게 2σ를 푸는가 — 작동 원리</a:t>
+            </a:r>
+          </a:p>
+        </p:txBody>
+      </p:sp>
+      <p:sp>
+        <p:nvSpPr>
+          <p:cNvPr id="4" name="Rectangle 3"/>
+          <p:cNvSpPr/>
+          <p:nvPr/>
+        </p:nvSpPr>
+        <p:spPr>
+          <a:xfrm>
+            <a:off x="777240" y="1481328"/>
+            <a:ext cx="1920240" cy="50292"/>
+          </a:xfrm>
+          <a:prstGeom prst="rect">
+            <a:avLst/>
+          </a:prstGeom>
+          <a:solidFill>
+            <a:srgbClr val="1CC5B0"/>
+          </a:solidFill>
+          <a:ln>
+            <a:noFill/>
+          </a:ln>
+          <a:effectLst/>
+        </p:spPr>
+        <p:style>
+          <a:lnRef idx="1">
+            <a:schemeClr val="accent1"/>
+          </a:lnRef>
+          <a:fillRef idx="3">
+            <a:schemeClr val="accent1"/>
+          </a:fillRef>
+          <a:effectRef idx="2">
+            <a:schemeClr val="accent1"/>
+          </a:effectRef>
+          <a:fontRef idx="minor">
+            <a:schemeClr val="lt1"/>
+          </a:fontRef>
+        </p:style>
+        <p:txBody>
+          <a:bodyPr rtlCol="0" anchor="ctr"/>
+          <a:lstStyle/>
+          <a:p>
+            <a:pPr algn="ctr"/>
+          </a:p>
+        </p:txBody>
+      </p:sp>
+      <p:sp>
+        <p:nvSpPr>
+          <p:cNvPr id="5" name="TextBox 4"/>
+          <p:cNvSpPr txBox="1"/>
+          <p:nvPr/>
+        </p:nvSpPr>
+        <p:spPr>
+          <a:xfrm>
+            <a:off x="777240" y="1828800"/>
+            <a:ext cx="10637215" cy="4297680"/>
+          </a:xfrm>
+          <a:prstGeom prst="rect">
+            <a:avLst/>
+          </a:prstGeom>
+          <a:noFill/>
+        </p:spPr>
+        <p:txBody>
+          <a:bodyPr wrap="square" anchor="t" lIns="0" rIns="0" tIns="0" bIns="0">
+            <a:spAutoFit/>
+          </a:bodyPr>
+          <a:lstStyle/>
+          <a:p>
+            <a:pPr algn="l">
+              <a:lnSpc>
+                <a:spcPct val="116000"/>
+              </a:lnSpc>
+              <a:spcBef>
+                <a:spcPts val="0"/>
+              </a:spcBef>
+              <a:spcAft>
+                <a:spcPts val="1100"/>
+              </a:spcAft>
             </a:pPr>
             <a:r>
-              <a:t>① 생성형 AI 이전 — 지능형 튜터링 시스템(ITS)이 개인교습에 근접</a:t>
-            </a:r>
-          </a:p>
-          <a:p>
-            <a:pPr>
-              <a:defRPr sz="1600"/>
+              <a:rPr sz="1300" b="1" i="0">
+                <a:solidFill>
+                  <a:srgbClr val="1CC5B0"/>
+                </a:solidFill>
+                <a:latin typeface="맑은 고딕"/>
+                <a:ea typeface="맑은 고딕"/>
+                <a:cs typeface="맑은 고딕"/>
+              </a:rPr>
+              <a:t>●  </a:t>
+            </a:r>
+            <a:r>
+              <a:rPr sz="1850" b="0" i="0">
+                <a:solidFill>
+                  <a:srgbClr val="1B2A38"/>
+                </a:solidFill>
+                <a:latin typeface="맑은 고딕"/>
+                <a:ea typeface="맑은 고딕"/>
+                <a:cs typeface="맑은 고딕"/>
+              </a:rPr>
+              <a:t>생성형 AI = 자연어 대화 + 실시간 적응 + 낮은 한계비용 → 블룸의 ‘비용 장벽’을 낮춘다</a:t>
+            </a:r>
+          </a:p>
+          <a:p>
+            <a:pPr algn="l">
+              <a:lnSpc>
+                <a:spcPct val="116000"/>
+              </a:lnSpc>
+              <a:spcBef>
+                <a:spcPts val="0"/>
+              </a:spcBef>
+              <a:spcAft>
+                <a:spcPts val="1100"/>
+              </a:spcAft>
             </a:pPr>
             <a:r>
-              <a:t>VanLehn(2011)은 여러 실험을 종합해, 인간 개인교습의 효과가 2σ라는 통념보다 작으며, 단계형(step-based) ITS는 인간 교사에 근접한 효과를 낸다는 것을 보였다. 즉 '2 시그마'는 인간에게만 가능한 값이 아니라 잘 설계된 기술로도 상당 부분 좁힐 수 있는 격차다.</a:t>
-            </a:r>
-          </a:p>
-          <a:p>
-            <a:pPr>
-              <a:defRPr sz="1600"/>
+              <a:rPr sz="1300" b="1" i="0">
+                <a:solidFill>
+                  <a:srgbClr val="1CC5B0"/>
+                </a:solidFill>
+                <a:latin typeface="맑은 고딕"/>
+                <a:ea typeface="맑은 고딕"/>
+                <a:cs typeface="맑은 고딕"/>
+              </a:rPr>
+              <a:t>●  </a:t>
+            </a:r>
+            <a:r>
+              <a:rPr sz="1850" b="0" i="0">
+                <a:solidFill>
+                  <a:srgbClr val="1B2A38"/>
+                </a:solidFill>
+                <a:latin typeface="맑은 고딕"/>
+                <a:ea typeface="맑은 고딕"/>
+                <a:cs typeface="맑은 고딕"/>
+              </a:rPr>
+              <a:t>AI는 학생마다 숙달을 향해 「형성평가 → 교정」 루프를 도는 개인 튜터</a:t>
+            </a:r>
+          </a:p>
+          <a:p>
+            <a:pPr algn="l">
+              <a:lnSpc>
+                <a:spcPct val="116000"/>
+              </a:lnSpc>
+              <a:spcBef>
+                <a:spcPts val="0"/>
+              </a:spcBef>
+              <a:spcAft>
+                <a:spcPts val="1100"/>
+              </a:spcAft>
             </a:pPr>
             <a:r>
-              <a:t>Kulik &amp; Fletcher(2016)는 통제된 50개 평가의 메타분석에서 ITS의 중앙값 효과가 +0.66σ(50→75 백분위)이며 92%의 연구에서 전통 수업을 능가했다고 보고했다. 다만 효과 크기는 평가도구·구현 충실도에 크게 좌우된다고 단서를 달았다.</a:t>
-            </a:r>
-          </a:p>
-          <a:p>
-            <a:pPr>
-              <a:defRPr sz="1600"/>
+              <a:rPr sz="1300" b="1" i="0">
+                <a:solidFill>
+                  <a:srgbClr val="1CC5B0"/>
+                </a:solidFill>
+                <a:latin typeface="맑은 고딕"/>
+                <a:ea typeface="맑은 고딕"/>
+                <a:cs typeface="맑은 고딕"/>
+              </a:rPr>
+              <a:t>●  </a:t>
+            </a:r>
+            <a:r>
+              <a:rPr sz="1850" b="0" i="0">
+                <a:solidFill>
+                  <a:srgbClr val="1B2A38"/>
+                </a:solidFill>
+                <a:latin typeface="맑은 고딕"/>
+                <a:ea typeface="맑은 고딕"/>
+                <a:cs typeface="맑은 고딕"/>
+              </a:rPr>
+              <a:t>교사는 서로 다른 속도의 여러 학생을 조율하는 지휘자</a:t>
+            </a:r>
+          </a:p>
+          <a:p>
+            <a:pPr algn="l">
+              <a:lnSpc>
+                <a:spcPct val="116000"/>
+              </a:lnSpc>
+              <a:spcBef>
+                <a:spcPts val="0"/>
+              </a:spcBef>
+              <a:spcAft>
+                <a:spcPts val="1100"/>
+              </a:spcAft>
             </a:pPr>
             <a:r>
-              <a:t>② 생성형 AI 시대(2023~) — 최신 무작위통제연구(RCT)의 큰 효과</a:t>
-            </a:r>
-          </a:p>
-          <a:p>
-            <a:pPr>
-              <a:defRPr sz="1600"/>
+              <a:rPr sz="1300" b="1" i="0">
+                <a:solidFill>
+                  <a:srgbClr val="1CC5B0"/>
+                </a:solidFill>
+                <a:latin typeface="맑은 고딕"/>
+                <a:ea typeface="맑은 고딕"/>
+                <a:cs typeface="맑은 고딕"/>
+              </a:rPr>
+              <a:t>●  </a:t>
+            </a:r>
+            <a:r>
+              <a:rPr sz="1850" b="0" i="0">
+                <a:solidFill>
+                  <a:srgbClr val="1B2A38"/>
+                </a:solidFill>
+                <a:latin typeface="맑은 고딕"/>
+                <a:ea typeface="맑은 고딕"/>
+                <a:cs typeface="맑은 고딕"/>
+              </a:rPr>
+              <a:t>초개별화 = 완전학습의 개별화 + AI 적응형 대화를, 대규모로</a:t>
+            </a:r>
+          </a:p>
+        </p:txBody>
+      </p:sp>
+      <p:sp>
+        <p:nvSpPr>
+          <p:cNvPr id="6" name="TextBox 5"/>
+          <p:cNvSpPr txBox="1"/>
+          <p:nvPr/>
+        </p:nvSpPr>
+        <p:spPr>
+          <a:xfrm>
+            <a:off x="777240" y="6419088"/>
+            <a:ext cx="8229600" cy="320040"/>
+          </a:xfrm>
+          <a:prstGeom prst="rect">
+            <a:avLst/>
+          </a:prstGeom>
+          <a:noFill/>
+        </p:spPr>
+        <p:txBody>
+          <a:bodyPr wrap="square" anchor="t" lIns="0" rIns="0" tIns="0" bIns="0">
+            <a:spAutoFit/>
+          </a:bodyPr>
+          <a:lstStyle/>
+          <a:p>
+            <a:pPr algn="l">
+              <a:spcBef>
+                <a:spcPts val="0"/>
+              </a:spcBef>
+              <a:spcAft>
+                <a:spcPts val="0"/>
+              </a:spcAft>
             </a:pPr>
             <a:r>
-              <a:t>Kestin 외(2025, 하버드, Scientific Reports)의 RCT에서, 잘 설계된 AI 튜터로 학습한 집단이 활동 중심 수업 집단보다 2배 이상의 학습 이득을 더 짧은 시간에 얻었다.</a:t>
-            </a:r>
-          </a:p>
-          <a:p>
-            <a:pPr>
-              <a:defRPr sz="1600"/>
+              <a:rPr sz="1050" b="0" i="0">
+                <a:solidFill>
+                  <a:srgbClr val="6E7B8A"/>
+                </a:solidFill>
+                <a:latin typeface="맑은 고딕"/>
+                <a:ea typeface="맑은 고딕"/>
+                <a:cs typeface="맑은 고딕"/>
+              </a:rPr>
+              <a:t>블룸 2σ · 초개별화 맞춤형 교육</a:t>
+            </a:r>
+          </a:p>
+        </p:txBody>
+      </p:sp>
+      <p:sp>
+        <p:nvSpPr>
+          <p:cNvPr id="7" name="TextBox 6"/>
+          <p:cNvSpPr txBox="1"/>
+          <p:nvPr/>
+        </p:nvSpPr>
+        <p:spPr>
+          <a:xfrm>
+            <a:off x="10607040" y="6419088"/>
+            <a:ext cx="822960" cy="320040"/>
+          </a:xfrm>
+          <a:prstGeom prst="rect">
+            <a:avLst/>
+          </a:prstGeom>
+          <a:noFill/>
+        </p:spPr>
+        <p:txBody>
+          <a:bodyPr wrap="square" anchor="t" lIns="0" rIns="0" tIns="0" bIns="0">
+            <a:spAutoFit/>
+          </a:bodyPr>
+          <a:lstStyle/>
+          <a:p>
+            <a:pPr algn="r">
+              <a:spcBef>
+                <a:spcPts val="0"/>
+              </a:spcBef>
+              <a:spcAft>
+                <a:spcPts val="0"/>
+              </a:spcAft>
             </a:pPr>
             <a:r>
-              <a:t>나이지리아의 대규모 RCT(World Bank, 2024)에서도 생성형 AI(코파일럿·ChatGPT 기반) 튜터를 활용한 중등 영어 수업이 유의한 성취 향상을 보였다(Brookings, 2024 정리).</a:t>
+              <a:rPr sz="1050" b="0" i="0">
+                <a:solidFill>
+                  <a:srgbClr val="6E7B8A"/>
+                </a:solidFill>
+                <a:latin typeface="맑은 고딕"/>
+                <a:ea typeface="맑은 고딕"/>
+                <a:cs typeface="맑은 고딕"/>
+              </a:rPr>
+              <a:t>6</a:t>
             </a:r>
           </a:p>
         </p:txBody>
@@ -3353,6 +4262,14 @@
 <file path=ppt/slides/slide12.xml><?xml version="1.0" encoding="utf-8"?>
 <p:sld xmlns:a="http://schemas.openxmlformats.org/drawingml/2006/main" xmlns:p="http://schemas.openxmlformats.org/presentationml/2006/main" xmlns:r="http://schemas.openxmlformats.org/officeDocument/2006/relationships">
   <p:cSld>
+    <p:bg>
+      <p:bgPr>
+        <a:solidFill>
+          <a:srgbClr val="FFFFFF"/>
+        </a:solidFill>
+        <a:effectLst/>
+      </p:bgPr>
+    </p:bg>
     <p:spTree>
       <p:nvGrpSpPr>
         <p:cNvPr id="1" name=""/>
@@ -3362,53 +4279,652 @@
       <p:grpSpPr/>
       <p:sp>
         <p:nvSpPr>
-          <p:cNvPr id="2" name="Title 1"/>
-          <p:cNvSpPr>
-            <a:spLocks noGrp="1"/>
-          </p:cNvSpPr>
-          <p:nvPr>
-            <p:ph type="title"/>
-          </p:nvPr>
-        </p:nvSpPr>
-        <p:spPr/>
-        <p:txBody>
-          <a:bodyPr/>
-          <a:lstStyle/>
-          <a:p>
-            <a:r>
-              <a:t>5. 블룸에서 AI 초개별화로 — 고전에서 실증으로 (계속)</a:t>
-            </a:r>
-          </a:p>
-        </p:txBody>
-      </p:sp>
-      <p:sp>
-        <p:nvSpPr>
-          <p:cNvPr id="3" name="Content Placeholder 2"/>
-          <p:cNvSpPr>
-            <a:spLocks noGrp="1"/>
-          </p:cNvSpPr>
-          <p:nvPr>
-            <p:ph idx="1"/>
-          </p:nvPr>
-        </p:nvSpPr>
-        <p:spPr/>
-        <p:txBody>
-          <a:bodyPr/>
-          <a:lstStyle/>
-          <a:p>
-            <a:pPr>
-              <a:defRPr sz="1600"/>
+          <p:cNvPr id="2" name="Rectangle 1"/>
+          <p:cNvSpPr/>
+          <p:nvPr/>
+        </p:nvSpPr>
+        <p:spPr>
+          <a:xfrm>
+            <a:off x="0" y="0"/>
+            <a:ext cx="12191695" cy="146304"/>
+          </a:xfrm>
+          <a:prstGeom prst="rect">
+            <a:avLst/>
+          </a:prstGeom>
+          <a:solidFill>
+            <a:srgbClr val="1CC5B0"/>
+          </a:solidFill>
+          <a:ln>
+            <a:noFill/>
+          </a:ln>
+          <a:effectLst/>
+        </p:spPr>
+        <p:style>
+          <a:lnRef idx="1">
+            <a:schemeClr val="accent1"/>
+          </a:lnRef>
+          <a:fillRef idx="3">
+            <a:schemeClr val="accent1"/>
+          </a:fillRef>
+          <a:effectRef idx="2">
+            <a:schemeClr val="accent1"/>
+          </a:effectRef>
+          <a:fontRef idx="minor">
+            <a:schemeClr val="lt1"/>
+          </a:fontRef>
+        </p:style>
+        <p:txBody>
+          <a:bodyPr rtlCol="0" anchor="ctr"/>
+          <a:lstStyle/>
+          <a:p>
+            <a:pPr algn="ctr"/>
+          </a:p>
+        </p:txBody>
+      </p:sp>
+      <p:sp>
+        <p:nvSpPr>
+          <p:cNvPr id="3" name="TextBox 2"/>
+          <p:cNvSpPr txBox="1"/>
+          <p:nvPr/>
+        </p:nvSpPr>
+        <p:spPr>
+          <a:xfrm>
+            <a:off x="777240" y="548640"/>
+            <a:ext cx="10637215" cy="914400"/>
+          </a:xfrm>
+          <a:prstGeom prst="rect">
+            <a:avLst/>
+          </a:prstGeom>
+          <a:noFill/>
+        </p:spPr>
+        <p:txBody>
+          <a:bodyPr wrap="square" anchor="t" lIns="0" rIns="0" tIns="0" bIns="0">
+            <a:spAutoFit/>
+          </a:bodyPr>
+          <a:lstStyle/>
+          <a:p>
+            <a:pPr algn="l">
+              <a:spcBef>
+                <a:spcPts val="0"/>
+              </a:spcBef>
+              <a:spcAft>
+                <a:spcPts val="0"/>
+              </a:spcAft>
             </a:pPr>
             <a:r>
-              <a:t>무엇이 새로운가. 블룸의 완전학습이 '무엇을 해야 하는가'(형성평가+교정으로 개별 숙달)를 규정했다면, 생성형 AI는 자연어 대화·실시간 적응·낮은 한계비용의 확장성을 더해 블룸이 넘지 못한 비용 장벽을 낮춘다. 곧 초개별화 = 완전학습의 개별화 + AI의 적응형 대화를, 대규모로. 이때 AI는 학생마다 숙달을 향해 이 「형성평가→교정」 루프를 실시간으로 돌리는 개인 튜터가 되고, 교사는 서로 다른 속도로 나아가는 여러 학생을 조율하는 지휘자가 된다 — 블룸이 비용 때문에 대규모로 하지 못한 1:1 교습을, 그 구조 그대로 실현하는 셈이다.</a:t>
-            </a:r>
-          </a:p>
-          <a:p>
-            <a:pPr>
-              <a:defRPr sz="1600"/>
+              <a:rPr sz="2900" b="1" i="0">
+                <a:solidFill>
+                  <a:srgbClr val="0F2A44"/>
+                </a:solidFill>
+                <a:latin typeface="맑은 고딕"/>
+                <a:ea typeface="맑은 고딕"/>
+                <a:cs typeface="맑은 고딕"/>
+              </a:rPr>
+              <a:t>그러나 신중하게 — ‘콘텐츠’가 아니라 ‘조건’</a:t>
+            </a:r>
+          </a:p>
+        </p:txBody>
+      </p:sp>
+      <p:sp>
+        <p:nvSpPr>
+          <p:cNvPr id="4" name="Rectangle 3"/>
+          <p:cNvSpPr/>
+          <p:nvPr/>
+        </p:nvSpPr>
+        <p:spPr>
+          <a:xfrm>
+            <a:off x="777240" y="1316736"/>
+            <a:ext cx="1920240" cy="50292"/>
+          </a:xfrm>
+          <a:prstGeom prst="rect">
+            <a:avLst/>
+          </a:prstGeom>
+          <a:solidFill>
+            <a:srgbClr val="1CC5B0"/>
+          </a:solidFill>
+          <a:ln>
+            <a:noFill/>
+          </a:ln>
+          <a:effectLst/>
+        </p:spPr>
+        <p:style>
+          <a:lnRef idx="1">
+            <a:schemeClr val="accent1"/>
+          </a:lnRef>
+          <a:fillRef idx="3">
+            <a:schemeClr val="accent1"/>
+          </a:fillRef>
+          <a:effectRef idx="2">
+            <a:schemeClr val="accent1"/>
+          </a:effectRef>
+          <a:fontRef idx="minor">
+            <a:schemeClr val="lt1"/>
+          </a:fontRef>
+        </p:style>
+        <p:txBody>
+          <a:bodyPr rtlCol="0" anchor="ctr"/>
+          <a:lstStyle/>
+          <a:p>
+            <a:pPr algn="ctr"/>
+          </a:p>
+        </p:txBody>
+      </p:sp>
+      <p:sp>
+        <p:nvSpPr>
+          <p:cNvPr id="5" name="Rectangle 4"/>
+          <p:cNvSpPr/>
+          <p:nvPr/>
+        </p:nvSpPr>
+        <p:spPr>
+          <a:xfrm>
+            <a:off x="777240" y="1783080"/>
+            <a:ext cx="5029200" cy="3977639"/>
+          </a:xfrm>
+          <a:prstGeom prst="rect">
+            <a:avLst/>
+          </a:prstGeom>
+          <a:solidFill>
+            <a:srgbClr val="F3F6FA"/>
+          </a:solidFill>
+          <a:ln>
+            <a:noFill/>
+          </a:ln>
+          <a:effectLst/>
+        </p:spPr>
+        <p:style>
+          <a:lnRef idx="1">
+            <a:schemeClr val="accent1"/>
+          </a:lnRef>
+          <a:fillRef idx="3">
+            <a:schemeClr val="accent1"/>
+          </a:fillRef>
+          <a:effectRef idx="2">
+            <a:schemeClr val="accent1"/>
+          </a:effectRef>
+          <a:fontRef idx="minor">
+            <a:schemeClr val="lt1"/>
+          </a:fontRef>
+        </p:style>
+        <p:txBody>
+          <a:bodyPr rtlCol="0" anchor="ctr"/>
+          <a:lstStyle/>
+          <a:p>
+            <a:pPr algn="ctr"/>
+          </a:p>
+        </p:txBody>
+      </p:sp>
+      <p:sp>
+        <p:nvSpPr>
+          <p:cNvPr id="6" name="TextBox 5"/>
+          <p:cNvSpPr txBox="1"/>
+          <p:nvPr/>
+        </p:nvSpPr>
+        <p:spPr>
+          <a:xfrm>
+            <a:off x="1097280" y="2057400"/>
+            <a:ext cx="4389120" cy="640080"/>
+          </a:xfrm>
+          <a:prstGeom prst="rect">
+            <a:avLst/>
+          </a:prstGeom>
+          <a:noFill/>
+        </p:spPr>
+        <p:txBody>
+          <a:bodyPr wrap="square" anchor="t" lIns="0" rIns="0" tIns="0" bIns="0">
+            <a:spAutoFit/>
+          </a:bodyPr>
+          <a:lstStyle/>
+          <a:p>
+            <a:pPr algn="l">
+              <a:spcBef>
+                <a:spcPts val="0"/>
+              </a:spcBef>
+              <a:spcAft>
+                <a:spcPts val="0"/>
+              </a:spcAft>
             </a:pPr>
             <a:r>
-              <a:t>그러나 신중하게. 위 연구들이 공통으로 말하는 것은 "AI를 쓰면 무조건 오른다"가 아니라 "잘 설계된 AI가 오른다"이다. 효과는 튜터 설계·수업 통합·평가 정렬에 좌우되며(Kulik &amp; Fletcher, 2016), 근거는 아직 축적 중이다. 그렇다면 무엇을 '잘 설계'해야 하는가 — 여기서 투자의 방향을 분명히 할 필요가 있다. 그것은 제주가 콘텐츠를 직접 찍어내는 일이 아니라, 좋은 수업이 일어날 '조건'을 갖추는 일이다. 그 조건은 셋이다: ⓐ 좋은 재료(고성능 AI의 공적 보장), ⓑ 좋은 주방(튜터 프롬프트·수업/평가 도구·전량 기록과 환류), ⓒ 그 도구로 좋은 수업을 설계하는 교사 역량. 콘텐츠 자체는 교사와 확장 생태계의 몫이다(바당2 개발안 §3-3 '공공은 토대·민간은 속도'·기능 8·9). 실제로 교사가 만든 수업 설계는 1반→8반·이듬해·동료 공유로 활발히 재사용되지만, 같은 설계라도 매 학생의 AI 상호작용은 새로 개별화되어 기록·환류된다 — 플랫폼이 대는 것은 '재료와 주방'이고 '요리'는 매 교실에서 새로 이뤄진다. 따라서 제주의 초개별화는 ① 콘텐츠 생산이 아니라 '재료·주방·교사 역량'에 투자하고 ② 자체 시범으로 효과를 검증하는 전제 위에서 추진해야 한다.</a:t>
+              <a:rPr sz="1900" b="1" i="0">
+                <a:solidFill>
+                  <a:srgbClr val="0F2A44"/>
+                </a:solidFill>
+                <a:latin typeface="맑은 고딕"/>
+                <a:ea typeface="맑은 고딕"/>
+                <a:cs typeface="맑은 고딕"/>
+              </a:rPr>
+              <a:t>무엇에 투자하나</a:t>
+            </a:r>
+          </a:p>
+        </p:txBody>
+      </p:sp>
+      <p:sp>
+        <p:nvSpPr>
+          <p:cNvPr id="7" name="TextBox 6"/>
+          <p:cNvSpPr txBox="1"/>
+          <p:nvPr/>
+        </p:nvSpPr>
+        <p:spPr>
+          <a:xfrm>
+            <a:off x="1097280" y="2788920"/>
+            <a:ext cx="4434840" cy="2834640"/>
+          </a:xfrm>
+          <a:prstGeom prst="rect">
+            <a:avLst/>
+          </a:prstGeom>
+          <a:noFill/>
+        </p:spPr>
+        <p:txBody>
+          <a:bodyPr wrap="square" anchor="t" lIns="0" rIns="0" tIns="0" bIns="0">
+            <a:spAutoFit/>
+          </a:bodyPr>
+          <a:lstStyle/>
+          <a:p>
+            <a:pPr algn="l">
+              <a:lnSpc>
+                <a:spcPct val="118000"/>
+              </a:lnSpc>
+              <a:spcBef>
+                <a:spcPts val="0"/>
+              </a:spcBef>
+              <a:spcAft>
+                <a:spcPts val="900"/>
+              </a:spcAft>
+            </a:pPr>
+            <a:r>
+              <a:rPr sz="1400" b="1" i="0">
+                <a:solidFill>
+                  <a:srgbClr val="1CC5B0"/>
+                </a:solidFill>
+                <a:latin typeface="맑은 고딕"/>
+                <a:ea typeface="맑은 고딕"/>
+                <a:cs typeface="맑은 고딕"/>
+              </a:rPr>
+              <a:t>· </a:t>
+            </a:r>
+            <a:r>
+              <a:rPr sz="1550" b="0" i="0">
+                <a:solidFill>
+                  <a:srgbClr val="1B2A38"/>
+                </a:solidFill>
+                <a:latin typeface="맑은 고딕"/>
+                <a:ea typeface="맑은 고딕"/>
+                <a:cs typeface="맑은 고딕"/>
+              </a:rPr>
+              <a:t>ⓐ 좋은 재료 — 고성능 AI의 공적 보장</a:t>
+            </a:r>
+          </a:p>
+          <a:p>
+            <a:pPr algn="l">
+              <a:lnSpc>
+                <a:spcPct val="118000"/>
+              </a:lnSpc>
+              <a:spcBef>
+                <a:spcPts val="0"/>
+              </a:spcBef>
+              <a:spcAft>
+                <a:spcPts val="900"/>
+              </a:spcAft>
+            </a:pPr>
+            <a:r>
+              <a:rPr sz="1400" b="1" i="0">
+                <a:solidFill>
+                  <a:srgbClr val="1CC5B0"/>
+                </a:solidFill>
+                <a:latin typeface="맑은 고딕"/>
+                <a:ea typeface="맑은 고딕"/>
+                <a:cs typeface="맑은 고딕"/>
+              </a:rPr>
+              <a:t>· </a:t>
+            </a:r>
+            <a:r>
+              <a:rPr sz="1550" b="0" i="0">
+                <a:solidFill>
+                  <a:srgbClr val="1B2A38"/>
+                </a:solidFill>
+                <a:latin typeface="맑은 고딕"/>
+                <a:ea typeface="맑은 고딕"/>
+                <a:cs typeface="맑은 고딕"/>
+              </a:rPr>
+              <a:t>ⓑ 좋은 주방 — 도구·전량 기록·환류</a:t>
+            </a:r>
+          </a:p>
+          <a:p>
+            <a:pPr algn="l">
+              <a:lnSpc>
+                <a:spcPct val="118000"/>
+              </a:lnSpc>
+              <a:spcBef>
+                <a:spcPts val="0"/>
+              </a:spcBef>
+              <a:spcAft>
+                <a:spcPts val="900"/>
+              </a:spcAft>
+            </a:pPr>
+            <a:r>
+              <a:rPr sz="1400" b="1" i="0">
+                <a:solidFill>
+                  <a:srgbClr val="1CC5B0"/>
+                </a:solidFill>
+                <a:latin typeface="맑은 고딕"/>
+                <a:ea typeface="맑은 고딕"/>
+                <a:cs typeface="맑은 고딕"/>
+              </a:rPr>
+              <a:t>· </a:t>
+            </a:r>
+            <a:r>
+              <a:rPr sz="1550" b="0" i="0">
+                <a:solidFill>
+                  <a:srgbClr val="1B2A38"/>
+                </a:solidFill>
+                <a:latin typeface="맑은 고딕"/>
+                <a:ea typeface="맑은 고딕"/>
+                <a:cs typeface="맑은 고딕"/>
+              </a:rPr>
+              <a:t>ⓒ 교사 역량 — 좋은 수업 설계</a:t>
+            </a:r>
+          </a:p>
+        </p:txBody>
+      </p:sp>
+      <p:sp>
+        <p:nvSpPr>
+          <p:cNvPr id="8" name="Rectangle 7"/>
+          <p:cNvSpPr/>
+          <p:nvPr/>
+        </p:nvSpPr>
+        <p:spPr>
+          <a:xfrm>
+            <a:off x="6446520" y="1783080"/>
+            <a:ext cx="5029200" cy="3977639"/>
+          </a:xfrm>
+          <a:prstGeom prst="rect">
+            <a:avLst/>
+          </a:prstGeom>
+          <a:solidFill>
+            <a:srgbClr val="F3F6FA"/>
+          </a:solidFill>
+          <a:ln>
+            <a:noFill/>
+          </a:ln>
+          <a:effectLst/>
+        </p:spPr>
+        <p:style>
+          <a:lnRef idx="1">
+            <a:schemeClr val="accent1"/>
+          </a:lnRef>
+          <a:fillRef idx="3">
+            <a:schemeClr val="accent1"/>
+          </a:fillRef>
+          <a:effectRef idx="2">
+            <a:schemeClr val="accent1"/>
+          </a:effectRef>
+          <a:fontRef idx="minor">
+            <a:schemeClr val="lt1"/>
+          </a:fontRef>
+        </p:style>
+        <p:txBody>
+          <a:bodyPr rtlCol="0" anchor="ctr"/>
+          <a:lstStyle/>
+          <a:p>
+            <a:pPr algn="ctr"/>
+          </a:p>
+        </p:txBody>
+      </p:sp>
+      <p:sp>
+        <p:nvSpPr>
+          <p:cNvPr id="9" name="TextBox 8"/>
+          <p:cNvSpPr txBox="1"/>
+          <p:nvPr/>
+        </p:nvSpPr>
+        <p:spPr>
+          <a:xfrm>
+            <a:off x="6766560" y="2057400"/>
+            <a:ext cx="4389120" cy="640080"/>
+          </a:xfrm>
+          <a:prstGeom prst="rect">
+            <a:avLst/>
+          </a:prstGeom>
+          <a:noFill/>
+        </p:spPr>
+        <p:txBody>
+          <a:bodyPr wrap="square" anchor="t" lIns="0" rIns="0" tIns="0" bIns="0">
+            <a:spAutoFit/>
+          </a:bodyPr>
+          <a:lstStyle/>
+          <a:p>
+            <a:pPr algn="l">
+              <a:spcBef>
+                <a:spcPts val="0"/>
+              </a:spcBef>
+              <a:spcAft>
+                <a:spcPts val="0"/>
+              </a:spcAft>
+            </a:pPr>
+            <a:r>
+              <a:rPr sz="1900" b="1" i="0">
+                <a:solidFill>
+                  <a:srgbClr val="0F2A44"/>
+                </a:solidFill>
+                <a:latin typeface="맑은 고딕"/>
+                <a:ea typeface="맑은 고딕"/>
+                <a:cs typeface="맑은 고딕"/>
+              </a:rPr>
+              <a:t>무엇이 아닌가</a:t>
+            </a:r>
+          </a:p>
+        </p:txBody>
+      </p:sp>
+      <p:sp>
+        <p:nvSpPr>
+          <p:cNvPr id="10" name="TextBox 9"/>
+          <p:cNvSpPr txBox="1"/>
+          <p:nvPr/>
+        </p:nvSpPr>
+        <p:spPr>
+          <a:xfrm>
+            <a:off x="6766560" y="2788920"/>
+            <a:ext cx="4434840" cy="2834640"/>
+          </a:xfrm>
+          <a:prstGeom prst="rect">
+            <a:avLst/>
+          </a:prstGeom>
+          <a:noFill/>
+        </p:spPr>
+        <p:txBody>
+          <a:bodyPr wrap="square" anchor="t" lIns="0" rIns="0" tIns="0" bIns="0">
+            <a:spAutoFit/>
+          </a:bodyPr>
+          <a:lstStyle/>
+          <a:p>
+            <a:pPr algn="l">
+              <a:lnSpc>
+                <a:spcPct val="118000"/>
+              </a:lnSpc>
+              <a:spcBef>
+                <a:spcPts val="0"/>
+              </a:spcBef>
+              <a:spcAft>
+                <a:spcPts val="900"/>
+              </a:spcAft>
+            </a:pPr>
+            <a:r>
+              <a:rPr sz="1400" b="1" i="0">
+                <a:solidFill>
+                  <a:srgbClr val="1CC5B0"/>
+                </a:solidFill>
+                <a:latin typeface="맑은 고딕"/>
+                <a:ea typeface="맑은 고딕"/>
+                <a:cs typeface="맑은 고딕"/>
+              </a:rPr>
+              <a:t>· </a:t>
+            </a:r>
+            <a:r>
+              <a:rPr sz="1550" b="0" i="0">
+                <a:solidFill>
+                  <a:srgbClr val="1B2A38"/>
+                </a:solidFill>
+                <a:latin typeface="맑은 고딕"/>
+                <a:ea typeface="맑은 고딕"/>
+                <a:cs typeface="맑은 고딕"/>
+              </a:rPr>
+              <a:t>제주가 콘텐츠를 직접 찍어내는 일이 아니다</a:t>
+            </a:r>
+          </a:p>
+          <a:p>
+            <a:pPr algn="l">
+              <a:lnSpc>
+                <a:spcPct val="118000"/>
+              </a:lnSpc>
+              <a:spcBef>
+                <a:spcPts val="0"/>
+              </a:spcBef>
+              <a:spcAft>
+                <a:spcPts val="900"/>
+              </a:spcAft>
+            </a:pPr>
+            <a:r>
+              <a:rPr sz="1400" b="1" i="0">
+                <a:solidFill>
+                  <a:srgbClr val="1CC5B0"/>
+                </a:solidFill>
+                <a:latin typeface="맑은 고딕"/>
+                <a:ea typeface="맑은 고딕"/>
+                <a:cs typeface="맑은 고딕"/>
+              </a:rPr>
+              <a:t>· </a:t>
+            </a:r>
+            <a:r>
+              <a:rPr sz="1550" b="0" i="0">
+                <a:solidFill>
+                  <a:srgbClr val="1B2A38"/>
+                </a:solidFill>
+                <a:latin typeface="맑은 고딕"/>
+                <a:ea typeface="맑은 고딕"/>
+                <a:cs typeface="맑은 고딕"/>
+              </a:rPr>
+              <a:t>콘텐츠는 교사·확장 생태계의 몫</a:t>
+            </a:r>
+          </a:p>
+          <a:p>
+            <a:pPr algn="l">
+              <a:lnSpc>
+                <a:spcPct val="118000"/>
+              </a:lnSpc>
+              <a:spcBef>
+                <a:spcPts val="0"/>
+              </a:spcBef>
+              <a:spcAft>
+                <a:spcPts val="900"/>
+              </a:spcAft>
+            </a:pPr>
+            <a:r>
+              <a:rPr sz="1400" b="1" i="0">
+                <a:solidFill>
+                  <a:srgbClr val="1CC5B0"/>
+                </a:solidFill>
+                <a:latin typeface="맑은 고딕"/>
+                <a:ea typeface="맑은 고딕"/>
+                <a:cs typeface="맑은 고딕"/>
+              </a:rPr>
+              <a:t>· </a:t>
+            </a:r>
+            <a:r>
+              <a:rPr sz="1550" b="0" i="0">
+                <a:solidFill>
+                  <a:srgbClr val="1B2A38"/>
+                </a:solidFill>
+                <a:latin typeface="맑은 고딕"/>
+                <a:ea typeface="맑은 고딕"/>
+                <a:cs typeface="맑은 고딕"/>
+              </a:rPr>
+              <a:t>근거는 축적 중 → 자체 시범으로 검증</a:t>
+            </a:r>
+          </a:p>
+        </p:txBody>
+      </p:sp>
+      <p:sp>
+        <p:nvSpPr>
+          <p:cNvPr id="11" name="TextBox 10"/>
+          <p:cNvSpPr txBox="1"/>
+          <p:nvPr/>
+        </p:nvSpPr>
+        <p:spPr>
+          <a:xfrm>
+            <a:off x="777240" y="6419088"/>
+            <a:ext cx="8229600" cy="320040"/>
+          </a:xfrm>
+          <a:prstGeom prst="rect">
+            <a:avLst/>
+          </a:prstGeom>
+          <a:noFill/>
+        </p:spPr>
+        <p:txBody>
+          <a:bodyPr wrap="square" anchor="t" lIns="0" rIns="0" tIns="0" bIns="0">
+            <a:spAutoFit/>
+          </a:bodyPr>
+          <a:lstStyle/>
+          <a:p>
+            <a:pPr algn="l">
+              <a:spcBef>
+                <a:spcPts val="0"/>
+              </a:spcBef>
+              <a:spcAft>
+                <a:spcPts val="0"/>
+              </a:spcAft>
+            </a:pPr>
+            <a:r>
+              <a:rPr sz="1050" b="0" i="0">
+                <a:solidFill>
+                  <a:srgbClr val="6E7B8A"/>
+                </a:solidFill>
+                <a:latin typeface="맑은 고딕"/>
+                <a:ea typeface="맑은 고딕"/>
+                <a:cs typeface="맑은 고딕"/>
+              </a:rPr>
+              <a:t>블룸 2σ · 초개별화 맞춤형 교육</a:t>
+            </a:r>
+          </a:p>
+        </p:txBody>
+      </p:sp>
+      <p:sp>
+        <p:nvSpPr>
+          <p:cNvPr id="12" name="TextBox 11"/>
+          <p:cNvSpPr txBox="1"/>
+          <p:nvPr/>
+        </p:nvSpPr>
+        <p:spPr>
+          <a:xfrm>
+            <a:off x="10607040" y="6419088"/>
+            <a:ext cx="822960" cy="320040"/>
+          </a:xfrm>
+          <a:prstGeom prst="rect">
+            <a:avLst/>
+          </a:prstGeom>
+          <a:noFill/>
+        </p:spPr>
+        <p:txBody>
+          <a:bodyPr wrap="square" anchor="t" lIns="0" rIns="0" tIns="0" bIns="0">
+            <a:spAutoFit/>
+          </a:bodyPr>
+          <a:lstStyle/>
+          <a:p>
+            <a:pPr algn="r">
+              <a:spcBef>
+                <a:spcPts val="0"/>
+              </a:spcBef>
+              <a:spcAft>
+                <a:spcPts val="0"/>
+              </a:spcAft>
+            </a:pPr>
+            <a:r>
+              <a:rPr sz="1050" b="0" i="0">
+                <a:solidFill>
+                  <a:srgbClr val="6E7B8A"/>
+                </a:solidFill>
+                <a:latin typeface="맑은 고딕"/>
+                <a:ea typeface="맑은 고딕"/>
+                <a:cs typeface="맑은 고딕"/>
+              </a:rPr>
+              <a:t>7</a:t>
             </a:r>
           </a:p>
         </p:txBody>
@@ -3424,6 +4940,14 @@
 <file path=ppt/slides/slide13.xml><?xml version="1.0" encoding="utf-8"?>
 <p:sld xmlns:a="http://schemas.openxmlformats.org/drawingml/2006/main" xmlns:p="http://schemas.openxmlformats.org/presentationml/2006/main" xmlns:r="http://schemas.openxmlformats.org/officeDocument/2006/relationships">
   <p:cSld>
+    <p:bg>
+      <p:bgPr>
+        <a:solidFill>
+          <a:srgbClr val="0F2A44"/>
+        </a:solidFill>
+        <a:effectLst/>
+      </p:bgPr>
+    </p:bg>
     <p:spTree>
       <p:nvGrpSpPr>
         <p:cNvPr id="1" name=""/>
@@ -3433,85 +4957,135 @@
       <p:grpSpPr/>
       <p:sp>
         <p:nvSpPr>
-          <p:cNvPr id="2" name="Title 1"/>
-          <p:cNvSpPr>
-            <a:spLocks noGrp="1"/>
-          </p:cNvSpPr>
-          <p:nvPr>
-            <p:ph type="title"/>
-          </p:nvPr>
-        </p:nvSpPr>
-        <p:spPr/>
-        <p:txBody>
-          <a:bodyPr/>
-          <a:lstStyle/>
-          <a:p>
-            <a:r>
-              <a:t>6. 시사점 — 제주 초개별화 맞춤형 교육과의 연결</a:t>
-            </a:r>
-          </a:p>
-        </p:txBody>
-      </p:sp>
-      <p:sp>
-        <p:nvSpPr>
-          <p:cNvPr id="3" name="Content Placeholder 2"/>
-          <p:cNvSpPr>
-            <a:spLocks noGrp="1"/>
-          </p:cNvSpPr>
-          <p:nvPr>
-            <p:ph idx="1"/>
-          </p:nvPr>
-        </p:nvSpPr>
-        <p:spPr/>
-        <p:txBody>
-          <a:bodyPr/>
-          <a:lstStyle/>
-          <a:p>
-            <a:pPr>
-              <a:defRPr sz="1600"/>
+          <p:cNvPr id="2" name="Rectangle 1"/>
+          <p:cNvSpPr/>
+          <p:nvPr/>
+        </p:nvSpPr>
+        <p:spPr>
+          <a:xfrm>
+            <a:off x="0" y="2743200"/>
+            <a:ext cx="2011680" cy="73152"/>
+          </a:xfrm>
+          <a:prstGeom prst="rect">
+            <a:avLst/>
+          </a:prstGeom>
+          <a:solidFill>
+            <a:srgbClr val="1CC5B0"/>
+          </a:solidFill>
+          <a:ln>
+            <a:noFill/>
+          </a:ln>
+          <a:effectLst/>
+        </p:spPr>
+        <p:style>
+          <a:lnRef idx="1">
+            <a:schemeClr val="accent1"/>
+          </a:lnRef>
+          <a:fillRef idx="3">
+            <a:schemeClr val="accent1"/>
+          </a:fillRef>
+          <a:effectRef idx="2">
+            <a:schemeClr val="accent1"/>
+          </a:effectRef>
+          <a:fontRef idx="minor">
+            <a:schemeClr val="lt1"/>
+          </a:fontRef>
+        </p:style>
+        <p:txBody>
+          <a:bodyPr rtlCol="0" anchor="ctr"/>
+          <a:lstStyle/>
+          <a:p>
+            <a:pPr algn="ctr"/>
+          </a:p>
+        </p:txBody>
+      </p:sp>
+      <p:sp>
+        <p:nvSpPr>
+          <p:cNvPr id="3" name="TextBox 2"/>
+          <p:cNvSpPr txBox="1"/>
+          <p:nvPr/>
+        </p:nvSpPr>
+        <p:spPr>
+          <a:xfrm>
+            <a:off x="777240" y="1371600"/>
+            <a:ext cx="10637215" cy="1371600"/>
+          </a:xfrm>
+          <a:prstGeom prst="rect">
+            <a:avLst/>
+          </a:prstGeom>
+          <a:noFill/>
+        </p:spPr>
+        <p:txBody>
+          <a:bodyPr wrap="square" anchor="t" lIns="0" rIns="0" tIns="0" bIns="0">
+            <a:spAutoFit/>
+          </a:bodyPr>
+          <a:lstStyle/>
+          <a:p>
+            <a:pPr algn="l">
+              <a:spcBef>
+                <a:spcPts val="0"/>
+              </a:spcBef>
+              <a:spcAft>
+                <a:spcPts val="0"/>
+              </a:spcAft>
             </a:pPr>
             <a:r>
-              <a:t>이 논문은 핵심공약 「한 아이도 놓치지 않는 초개별화 맞춤형 교육」의 이론적 근거가 된다.</a:t>
-            </a:r>
-          </a:p>
-          <a:p>
-            <a:pPr>
-              <a:defRPr sz="1600"/>
+              <a:rPr sz="8400" b="1" i="0">
+                <a:solidFill>
+                  <a:srgbClr val="1CC5B0"/>
+                </a:solidFill>
+                <a:latin typeface="맑은 고딕"/>
+                <a:ea typeface="맑은 고딕"/>
+                <a:cs typeface="맑은 고딕"/>
+              </a:rPr>
+              <a:t>03</a:t>
+            </a:r>
+          </a:p>
+        </p:txBody>
+      </p:sp>
+      <p:sp>
+        <p:nvSpPr>
+          <p:cNvPr id="4" name="TextBox 3"/>
+          <p:cNvSpPr txBox="1"/>
+          <p:nvPr/>
+        </p:nvSpPr>
+        <p:spPr>
+          <a:xfrm>
+            <a:off x="777240" y="2971800"/>
+            <a:ext cx="10058400" cy="1828800"/>
+          </a:xfrm>
+          <a:prstGeom prst="rect">
+            <a:avLst/>
+          </a:prstGeom>
+          <a:noFill/>
+        </p:spPr>
+        <p:txBody>
+          <a:bodyPr wrap="square" anchor="t" lIns="0" rIns="0" tIns="0" bIns="0">
+            <a:spAutoFit/>
+          </a:bodyPr>
+          <a:lstStyle/>
+          <a:p>
+            <a:pPr algn="l">
+              <a:lnSpc>
+                <a:spcPct val="110000"/>
+              </a:lnSpc>
+              <a:spcBef>
+                <a:spcPts val="0"/>
+              </a:spcBef>
+              <a:spcAft>
+                <a:spcPts val="0"/>
+              </a:spcAft>
             </a:pPr>
             <a:r>
-              <a:t>AI가 '2 시그마 문제'의 해법이 될 수 있다. 블룸이 1984년에 "비용 때문에 1:1 교습을 대규모로 못 한다"고 남긴 과제를, 이제 AI가 비용 장벽을 낮춰 모든 학생에게 개인교습에 준하는 조건을 제공함으로써 풀 수 있다 — 공약의 논리적 출발점.</a:t>
-            </a:r>
-          </a:p>
-          <a:p>
-            <a:pPr>
-              <a:defRPr sz="1600"/>
-            </a:pPr>
-            <a:r>
-              <a:t>'초개별화'의 이론적 뿌리. 성장 이력 기반 맞춤 학습·과정 중심 평가는 블룸의 완전학습(형성평가 + 교정 피드백)의 AI·디지털 구현에 해당한다(AI 교육 패러다임 §4 평가 전환과 정합).</a:t>
-            </a:r>
-          </a:p>
-          <a:p>
-            <a:pPr>
-              <a:defRPr sz="1600"/>
-            </a:pPr>
-            <a:r>
-              <a:t>형평성의 근거. "적성보다 학습 조건이 성취를 결정"한다는 발견은, AI 접근 공적 보장이 곧 출발선·성취 격차 해소로 이어진다는 주장을 뒷받침한다.</a:t>
-            </a:r>
-          </a:p>
-          <a:p>
-            <a:pPr>
-              <a:defRPr sz="1600"/>
-            </a:pPr>
-            <a:r>
-              <a:t>목표 수준의 근거. "대부분의 학생이 높은 수준에 도달할 잠재력이 있다"는 명제는 '한 아이도 놓치지 않는' 책임교육의 지향과 일치한다.</a:t>
-            </a:r>
-          </a:p>
-          <a:p>
-            <a:pPr>
-              <a:defRPr sz="1600"/>
-            </a:pPr>
-            <a:r>
-              <a:t>인용 시 요지: "블룸(1984)은 1:1 개인교습이 집단수업보다 2 표준편차 높은 성취를 낸다는 것을 실증하고, 이를 대규모로 실현할 방법을 찾는 것을 '2 시그마 문제'로 제기했다. AI 활용 맞춤형 교육은 그 비용 장벽을 낮춰 이 문제를 풀 현실적 수단이다."</a:t>
+              <a:rPr sz="4000" b="1" i="0">
+                <a:solidFill>
+                  <a:srgbClr val="FFFFFF"/>
+                </a:solidFill>
+                <a:latin typeface="맑은 고딕"/>
+                <a:ea typeface="맑은 고딕"/>
+                <a:cs typeface="맑은 고딕"/>
+              </a:rPr>
+              <a:t>제주 초개별화로</a:t>
             </a:r>
           </a:p>
         </p:txBody>
@@ -3527,6 +5101,14 @@
 <file path=ppt/slides/slide14.xml><?xml version="1.0" encoding="utf-8"?>
 <p:sld xmlns:a="http://schemas.openxmlformats.org/drawingml/2006/main" xmlns:p="http://schemas.openxmlformats.org/presentationml/2006/main" xmlns:r="http://schemas.openxmlformats.org/officeDocument/2006/relationships">
   <p:cSld>
+    <p:bg>
+      <p:bgPr>
+        <a:solidFill>
+          <a:srgbClr val="FFFFFF"/>
+        </a:solidFill>
+        <a:effectLst/>
+      </p:bgPr>
+    </p:bg>
     <p:spTree>
       <p:nvGrpSpPr>
         <p:cNvPr id="1" name=""/>
@@ -3536,85 +5118,383 @@
       <p:grpSpPr/>
       <p:sp>
         <p:nvSpPr>
-          <p:cNvPr id="2" name="Title 1"/>
-          <p:cNvSpPr>
-            <a:spLocks noGrp="1"/>
-          </p:cNvSpPr>
-          <p:nvPr>
-            <p:ph type="title"/>
-          </p:nvPr>
-        </p:nvSpPr>
-        <p:spPr/>
-        <p:txBody>
-          <a:bodyPr/>
-          <a:lstStyle/>
-          <a:p>
-            <a:r>
-              <a:t>참고문헌</a:t>
-            </a:r>
-          </a:p>
-        </p:txBody>
-      </p:sp>
-      <p:sp>
-        <p:nvSpPr>
-          <p:cNvPr id="3" name="Content Placeholder 2"/>
-          <p:cNvSpPr>
-            <a:spLocks noGrp="1"/>
-          </p:cNvSpPr>
-          <p:nvPr>
-            <p:ph idx="1"/>
-          </p:nvPr>
-        </p:nvSpPr>
-        <p:spPr/>
-        <p:txBody>
-          <a:bodyPr/>
-          <a:lstStyle/>
-          <a:p>
-            <a:pPr>
-              <a:defRPr sz="1600"/>
+          <p:cNvPr id="2" name="Rectangle 1"/>
+          <p:cNvSpPr/>
+          <p:nvPr/>
+        </p:nvSpPr>
+        <p:spPr>
+          <a:xfrm>
+            <a:off x="0" y="0"/>
+            <a:ext cx="12191695" cy="146304"/>
+          </a:xfrm>
+          <a:prstGeom prst="rect">
+            <a:avLst/>
+          </a:prstGeom>
+          <a:solidFill>
+            <a:srgbClr val="1CC5B0"/>
+          </a:solidFill>
+          <a:ln>
+            <a:noFill/>
+          </a:ln>
+          <a:effectLst/>
+        </p:spPr>
+        <p:style>
+          <a:lnRef idx="1">
+            <a:schemeClr val="accent1"/>
+          </a:lnRef>
+          <a:fillRef idx="3">
+            <a:schemeClr val="accent1"/>
+          </a:fillRef>
+          <a:effectRef idx="2">
+            <a:schemeClr val="accent1"/>
+          </a:effectRef>
+          <a:fontRef idx="minor">
+            <a:schemeClr val="lt1"/>
+          </a:fontRef>
+        </p:style>
+        <p:txBody>
+          <a:bodyPr rtlCol="0" anchor="ctr"/>
+          <a:lstStyle/>
+          <a:p>
+            <a:pPr algn="ctr"/>
+          </a:p>
+        </p:txBody>
+      </p:sp>
+      <p:sp>
+        <p:nvSpPr>
+          <p:cNvPr id="3" name="TextBox 2"/>
+          <p:cNvSpPr txBox="1"/>
+          <p:nvPr/>
+        </p:nvSpPr>
+        <p:spPr>
+          <a:xfrm>
+            <a:off x="777240" y="713232"/>
+            <a:ext cx="10637215" cy="914400"/>
+          </a:xfrm>
+          <a:prstGeom prst="rect">
+            <a:avLst/>
+          </a:prstGeom>
+          <a:noFill/>
+        </p:spPr>
+        <p:txBody>
+          <a:bodyPr wrap="square" anchor="t" lIns="0" rIns="0" tIns="0" bIns="0">
+            <a:spAutoFit/>
+          </a:bodyPr>
+          <a:lstStyle/>
+          <a:p>
+            <a:pPr algn="l">
+              <a:spcBef>
+                <a:spcPts val="0"/>
+              </a:spcBef>
+              <a:spcAft>
+                <a:spcPts val="0"/>
+              </a:spcAft>
             </a:pPr>
             <a:r>
-              <a:t>1. Bloom, B. S. (1968). Learning for Mastery. Evaluation Comment, 1(2).</a:t>
-            </a:r>
-          </a:p>
-          <a:p>
-            <a:pPr>
-              <a:defRPr sz="1600"/>
+              <a:rPr sz="2900" b="1" i="0">
+                <a:solidFill>
+                  <a:srgbClr val="0F2A44"/>
+                </a:solidFill>
+                <a:latin typeface="맑은 고딕"/>
+                <a:ea typeface="맑은 고딕"/>
+                <a:cs typeface="맑은 고딕"/>
+              </a:rPr>
+              <a:t>시사점 — 핵심공약과의 연결</a:t>
+            </a:r>
+          </a:p>
+        </p:txBody>
+      </p:sp>
+      <p:sp>
+        <p:nvSpPr>
+          <p:cNvPr id="4" name="Rectangle 3"/>
+          <p:cNvSpPr/>
+          <p:nvPr/>
+        </p:nvSpPr>
+        <p:spPr>
+          <a:xfrm>
+            <a:off x="777240" y="1481328"/>
+            <a:ext cx="1920240" cy="50292"/>
+          </a:xfrm>
+          <a:prstGeom prst="rect">
+            <a:avLst/>
+          </a:prstGeom>
+          <a:solidFill>
+            <a:srgbClr val="1CC5B0"/>
+          </a:solidFill>
+          <a:ln>
+            <a:noFill/>
+          </a:ln>
+          <a:effectLst/>
+        </p:spPr>
+        <p:style>
+          <a:lnRef idx="1">
+            <a:schemeClr val="accent1"/>
+          </a:lnRef>
+          <a:fillRef idx="3">
+            <a:schemeClr val="accent1"/>
+          </a:fillRef>
+          <a:effectRef idx="2">
+            <a:schemeClr val="accent1"/>
+          </a:effectRef>
+          <a:fontRef idx="minor">
+            <a:schemeClr val="lt1"/>
+          </a:fontRef>
+        </p:style>
+        <p:txBody>
+          <a:bodyPr rtlCol="0" anchor="ctr"/>
+          <a:lstStyle/>
+          <a:p>
+            <a:pPr algn="ctr"/>
+          </a:p>
+        </p:txBody>
+      </p:sp>
+      <p:sp>
+        <p:nvSpPr>
+          <p:cNvPr id="5" name="TextBox 4"/>
+          <p:cNvSpPr txBox="1"/>
+          <p:nvPr/>
+        </p:nvSpPr>
+        <p:spPr>
+          <a:xfrm>
+            <a:off x="777240" y="1828800"/>
+            <a:ext cx="10637215" cy="4297680"/>
+          </a:xfrm>
+          <a:prstGeom prst="rect">
+            <a:avLst/>
+          </a:prstGeom>
+          <a:noFill/>
+        </p:spPr>
+        <p:txBody>
+          <a:bodyPr wrap="square" anchor="t" lIns="0" rIns="0" tIns="0" bIns="0">
+            <a:spAutoFit/>
+          </a:bodyPr>
+          <a:lstStyle/>
+          <a:p>
+            <a:pPr algn="l">
+              <a:lnSpc>
+                <a:spcPct val="116000"/>
+              </a:lnSpc>
+              <a:spcBef>
+                <a:spcPts val="0"/>
+              </a:spcBef>
+              <a:spcAft>
+                <a:spcPts val="1100"/>
+              </a:spcAft>
             </a:pPr>
             <a:r>
-              <a:t>2. Bloom, B. S. (1984). The 2 Sigma Problem: The Search for Methods of Group Instruction as Effective as One-to-One Tutoring. Educational Researcher, 13(6), 4–16.</a:t>
-            </a:r>
-          </a:p>
-          <a:p>
-            <a:pPr>
-              <a:defRPr sz="1600"/>
+              <a:rPr sz="1300" b="1" i="0">
+                <a:solidFill>
+                  <a:srgbClr val="1CC5B0"/>
+                </a:solidFill>
+                <a:latin typeface="맑은 고딕"/>
+                <a:ea typeface="맑은 고딕"/>
+                <a:cs typeface="맑은 고딕"/>
+              </a:rPr>
+              <a:t>●  </a:t>
+            </a:r>
+            <a:r>
+              <a:rPr sz="1850" b="0" i="0">
+                <a:solidFill>
+                  <a:srgbClr val="1B2A38"/>
+                </a:solidFill>
+                <a:latin typeface="맑은 고딕"/>
+                <a:ea typeface="맑은 고딕"/>
+                <a:cs typeface="맑은 고딕"/>
+              </a:rPr>
+              <a:t>AI가 ‘2 시그마 문제’의 현실적 해법 — 공약의 논리적 출발점</a:t>
+            </a:r>
+          </a:p>
+          <a:p>
+            <a:pPr algn="l">
+              <a:lnSpc>
+                <a:spcPct val="116000"/>
+              </a:lnSpc>
+              <a:spcBef>
+                <a:spcPts val="0"/>
+              </a:spcBef>
+              <a:spcAft>
+                <a:spcPts val="1100"/>
+              </a:spcAft>
             </a:pPr>
             <a:r>
-              <a:t>3. VanLehn, K. (2011). The Relative Effectiveness of Human Tutoring, Intelligent Tutoring Systems, and Other Tutoring Systems. Educational Psychologist, 46(4), 197–221.</a:t>
-            </a:r>
-          </a:p>
-          <a:p>
-            <a:pPr>
-              <a:defRPr sz="1600"/>
+              <a:rPr sz="1300" b="1" i="0">
+                <a:solidFill>
+                  <a:srgbClr val="1CC5B0"/>
+                </a:solidFill>
+                <a:latin typeface="맑은 고딕"/>
+                <a:ea typeface="맑은 고딕"/>
+                <a:cs typeface="맑은 고딕"/>
+              </a:rPr>
+              <a:t>●  </a:t>
+            </a:r>
+            <a:r>
+              <a:rPr sz="1850" b="0" i="0">
+                <a:solidFill>
+                  <a:srgbClr val="1B2A38"/>
+                </a:solidFill>
+                <a:latin typeface="맑은 고딕"/>
+                <a:ea typeface="맑은 고딕"/>
+                <a:cs typeface="맑은 고딕"/>
+              </a:rPr>
+              <a:t>초개별화의 이론적 뿌리 = 블룸 완전학습(형성평가+교정)의 AI·디지털 구현</a:t>
+            </a:r>
+          </a:p>
+          <a:p>
+            <a:pPr algn="l">
+              <a:lnSpc>
+                <a:spcPct val="116000"/>
+              </a:lnSpc>
+              <a:spcBef>
+                <a:spcPts val="0"/>
+              </a:spcBef>
+              <a:spcAft>
+                <a:spcPts val="1100"/>
+              </a:spcAft>
             </a:pPr>
             <a:r>
-              <a:t>4. Kulik, J. A., &amp; Fletcher, J. D. (2016). Effectiveness of Intelligent Tutoring Systems: A Meta-Analytic Review. Review of Educational Research, 86(1), 42–78.</a:t>
-            </a:r>
-          </a:p>
-          <a:p>
-            <a:pPr>
-              <a:defRPr sz="1600"/>
+              <a:rPr sz="1300" b="1" i="0">
+                <a:solidFill>
+                  <a:srgbClr val="1CC5B0"/>
+                </a:solidFill>
+                <a:latin typeface="맑은 고딕"/>
+                <a:ea typeface="맑은 고딕"/>
+                <a:cs typeface="맑은 고딕"/>
+              </a:rPr>
+              <a:t>●  </a:t>
+            </a:r>
+            <a:r>
+              <a:rPr sz="1850" b="0" i="0">
+                <a:solidFill>
+                  <a:srgbClr val="1B2A38"/>
+                </a:solidFill>
+                <a:latin typeface="맑은 고딕"/>
+                <a:ea typeface="맑은 고딕"/>
+                <a:cs typeface="맑은 고딕"/>
+              </a:rPr>
+              <a:t>형평성: “적성보다 학습 조건” → AI 접근 공적 보장이 출발선·격차 해소</a:t>
+            </a:r>
+          </a:p>
+          <a:p>
+            <a:pPr algn="l">
+              <a:lnSpc>
+                <a:spcPct val="116000"/>
+              </a:lnSpc>
+              <a:spcBef>
+                <a:spcPts val="0"/>
+              </a:spcBef>
+              <a:spcAft>
+                <a:spcPts val="1100"/>
+              </a:spcAft>
             </a:pPr>
             <a:r>
-              <a:t>5. Kestin, G., Miller, K., Klales, A., Milbourne, T., &amp; Ponti, G. (2025). AI tutoring outperforms in-class active learning: an RCT introducing a novel research-based design in an authentic educational setting. Scientific Reports, 15, 17458.</a:t>
-            </a:r>
-          </a:p>
-          <a:p>
-            <a:pPr>
-              <a:defRPr sz="1600"/>
+              <a:rPr sz="1300" b="1" i="0">
+                <a:solidFill>
+                  <a:srgbClr val="1CC5B0"/>
+                </a:solidFill>
+                <a:latin typeface="맑은 고딕"/>
+                <a:ea typeface="맑은 고딕"/>
+                <a:cs typeface="맑은 고딕"/>
+              </a:rPr>
+              <a:t>●  </a:t>
+            </a:r>
+            <a:r>
+              <a:rPr sz="1850" b="0" i="0">
+                <a:solidFill>
+                  <a:srgbClr val="1B2A38"/>
+                </a:solidFill>
+                <a:latin typeface="맑은 고딕"/>
+                <a:ea typeface="맑은 고딕"/>
+                <a:cs typeface="맑은 고딕"/>
+              </a:rPr>
+              <a:t>목표: “대부분의 학생이 높은 수준 도달 가능” = ‘한 아이도 놓치지 않는’ 책임교육</a:t>
+            </a:r>
+          </a:p>
+        </p:txBody>
+      </p:sp>
+      <p:sp>
+        <p:nvSpPr>
+          <p:cNvPr id="6" name="TextBox 5"/>
+          <p:cNvSpPr txBox="1"/>
+          <p:nvPr/>
+        </p:nvSpPr>
+        <p:spPr>
+          <a:xfrm>
+            <a:off x="777240" y="6419088"/>
+            <a:ext cx="8229600" cy="320040"/>
+          </a:xfrm>
+          <a:prstGeom prst="rect">
+            <a:avLst/>
+          </a:prstGeom>
+          <a:noFill/>
+        </p:spPr>
+        <p:txBody>
+          <a:bodyPr wrap="square" anchor="t" lIns="0" rIns="0" tIns="0" bIns="0">
+            <a:spAutoFit/>
+          </a:bodyPr>
+          <a:lstStyle/>
+          <a:p>
+            <a:pPr algn="l">
+              <a:spcBef>
+                <a:spcPts val="0"/>
+              </a:spcBef>
+              <a:spcAft>
+                <a:spcPts val="0"/>
+              </a:spcAft>
             </a:pPr>
             <a:r>
-              <a:t>6. Brookings (2024). What the research shows about generative AI in tutoring.</a:t>
+              <a:rPr sz="1050" b="0" i="0">
+                <a:solidFill>
+                  <a:srgbClr val="6E7B8A"/>
+                </a:solidFill>
+                <a:latin typeface="맑은 고딕"/>
+                <a:ea typeface="맑은 고딕"/>
+                <a:cs typeface="맑은 고딕"/>
+              </a:rPr>
+              <a:t>블룸 2σ · 초개별화 맞춤형 교육</a:t>
+            </a:r>
+          </a:p>
+        </p:txBody>
+      </p:sp>
+      <p:sp>
+        <p:nvSpPr>
+          <p:cNvPr id="7" name="TextBox 6"/>
+          <p:cNvSpPr txBox="1"/>
+          <p:nvPr/>
+        </p:nvSpPr>
+        <p:spPr>
+          <a:xfrm>
+            <a:off x="10607040" y="6419088"/>
+            <a:ext cx="822960" cy="320040"/>
+          </a:xfrm>
+          <a:prstGeom prst="rect">
+            <a:avLst/>
+          </a:prstGeom>
+          <a:noFill/>
+        </p:spPr>
+        <p:txBody>
+          <a:bodyPr wrap="square" anchor="t" lIns="0" rIns="0" tIns="0" bIns="0">
+            <a:spAutoFit/>
+          </a:bodyPr>
+          <a:lstStyle/>
+          <a:p>
+            <a:pPr algn="r">
+              <a:spcBef>
+                <a:spcPts val="0"/>
+              </a:spcBef>
+              <a:spcAft>
+                <a:spcPts val="0"/>
+              </a:spcAft>
+            </a:pPr>
+            <a:r>
+              <a:rPr sz="1050" b="0" i="0">
+                <a:solidFill>
+                  <a:srgbClr val="6E7B8A"/>
+                </a:solidFill>
+                <a:latin typeface="맑은 고딕"/>
+                <a:ea typeface="맑은 고딕"/>
+                <a:cs typeface="맑은 고딕"/>
+              </a:rPr>
+              <a:t>8</a:t>
             </a:r>
           </a:p>
         </p:txBody>
@@ -3630,6 +5510,14 @@
 <file path=ppt/slides/slide15.xml><?xml version="1.0" encoding="utf-8"?>
 <p:sld xmlns:a="http://schemas.openxmlformats.org/drawingml/2006/main" xmlns:p="http://schemas.openxmlformats.org/presentationml/2006/main" xmlns:r="http://schemas.openxmlformats.org/officeDocument/2006/relationships">
   <p:cSld>
+    <p:bg>
+      <p:bgPr>
+        <a:solidFill>
+          <a:srgbClr val="0F2A44"/>
+        </a:solidFill>
+        <a:effectLst/>
+      </p:bgPr>
+    </p:bg>
     <p:spTree>
       <p:nvGrpSpPr>
         <p:cNvPr id="1" name=""/>
@@ -3639,307 +5527,227 @@
       <p:grpSpPr/>
       <p:sp>
         <p:nvSpPr>
-          <p:cNvPr id="2" name="Title 1"/>
-          <p:cNvSpPr>
-            <a:spLocks noGrp="1"/>
-          </p:cNvSpPr>
-          <p:nvPr>
-            <p:ph type="title"/>
-          </p:nvPr>
-        </p:nvSpPr>
-        <p:spPr/>
-        <p:txBody>
-          <a:bodyPr/>
-          <a:lstStyle/>
-          <a:p>
-            <a:r>
-              <a:t>용어 정리</a:t>
-            </a:r>
-          </a:p>
-        </p:txBody>
-      </p:sp>
-      <p:graphicFrame>
-        <p:nvGraphicFramePr>
-          <p:cNvPr id="3" name="Table 2"/>
-          <p:cNvGraphicFramePr>
-            <a:graphicFrameLocks noGrp="1"/>
-          </p:cNvGraphicFramePr>
+          <p:cNvPr id="2" name="Rectangle 1"/>
+          <p:cNvSpPr/>
           <p:nvPr/>
-        </p:nvGraphicFramePr>
-        <p:xfrm>
-          <a:off x="365760" y="1188720"/>
-          <a:ext cx="8412480" cy="2926080"/>
-        </p:xfrm>
-        <a:graphic>
-          <a:graphicData uri="http://schemas.openxmlformats.org/drawingml/2006/table">
-            <a:tbl>
-              <a:tblPr firstRow="1" bandRow="1">
-                <a:tableStyleId>{5C22544A-7EE6-4342-B048-85BDC9FD1C3A}</a:tableStyleId>
-              </a:tblPr>
-              <a:tblGrid>
-                <a:gridCol w="4206240"/>
-                <a:gridCol w="4206240"/>
-              </a:tblGrid>
-              <a:tr h="365760">
-                <a:tc>
-                  <a:txBody>
-                    <a:bodyPr/>
-                    <a:lstStyle/>
-                    <a:p>
-                      <a:pPr>
-                        <a:defRPr sz="1100" b="1"/>
-                      </a:pPr>
-                      <a:r>
-                        <a:t>용어</a:t>
-                      </a:r>
-                    </a:p>
-                  </a:txBody>
-                  <a:tcPr/>
-                </a:tc>
-                <a:tc>
-                  <a:txBody>
-                    <a:bodyPr/>
-                    <a:lstStyle/>
-                    <a:p>
-                      <a:pPr>
-                        <a:defRPr sz="1100" b="1"/>
-                      </a:pPr>
-                      <a:r>
-                        <a:t>뜻</a:t>
-                      </a:r>
-                    </a:p>
-                  </a:txBody>
-                  <a:tcPr/>
-                </a:tc>
-              </a:tr>
-              <a:tr h="365760">
-                <a:tc>
-                  <a:txBody>
-                    <a:bodyPr/>
-                    <a:lstStyle/>
-                    <a:p>
-                      <a:pPr>
-                        <a:defRPr sz="1100"/>
-                      </a:pPr>
-                      <a:r>
-                        <a:t>표준편차(σ, 시그마)</a:t>
-                      </a:r>
-                    </a:p>
-                  </a:txBody>
-                  <a:tcPr/>
-                </a:tc>
-                <a:tc>
-                  <a:txBody>
-                    <a:bodyPr/>
-                    <a:lstStyle/>
-                    <a:p>
-                      <a:pPr>
-                        <a:defRPr sz="1100"/>
-                      </a:pPr>
-                      <a:r>
-                        <a:t>점수 분포의 흩어진 정도. 정규분포에서 +1σ ≈ 상위 84%, +2σ ≈ 상위 98% 위치</a:t>
-                      </a:r>
-                    </a:p>
-                  </a:txBody>
-                  <a:tcPr/>
-                </a:tc>
-              </a:tr>
-              <a:tr h="365760">
-                <a:tc>
-                  <a:txBody>
-                    <a:bodyPr/>
-                    <a:lstStyle/>
-                    <a:p>
-                      <a:pPr>
-                        <a:defRPr sz="1100"/>
-                      </a:pPr>
-                      <a:r>
-                        <a:t>완전학습(Mastery Learning)</a:t>
-                      </a:r>
-                    </a:p>
-                  </a:txBody>
-                  <a:tcPr/>
-                </a:tc>
-                <a:tc>
-                  <a:txBody>
-                    <a:bodyPr/>
-                    <a:lstStyle/>
-                    <a:p>
-                      <a:pPr>
-                        <a:defRPr sz="1100"/>
-                      </a:pPr>
-                      <a:r>
-                        <a:t>형성평가로 미도달 부분을 확인하고 교정 피드백·재학습을 거쳐 목표 수준에 도달시키는 교수법</a:t>
-                      </a:r>
-                    </a:p>
-                  </a:txBody>
-                  <a:tcPr/>
-                </a:tc>
-              </a:tr>
-              <a:tr h="365760">
-                <a:tc>
-                  <a:txBody>
-                    <a:bodyPr/>
-                    <a:lstStyle/>
-                    <a:p>
-                      <a:pPr>
-                        <a:defRPr sz="1100"/>
-                      </a:pPr>
-                      <a:r>
-                        <a:t>형성평가(Formative Test)</a:t>
-                      </a:r>
-                    </a:p>
-                  </a:txBody>
-                  <a:tcPr/>
-                </a:tc>
-                <a:tc>
-                  <a:txBody>
-                    <a:bodyPr/>
-                    <a:lstStyle/>
-                    <a:p>
-                      <a:pPr>
-                        <a:defRPr sz="1100"/>
-                      </a:pPr>
-                      <a:r>
-                        <a:t>학습 도중 이해 정도를 점검해 피드백·교정에 쓰는 평가(성적 산출용 총괄평가와 구별)</a:t>
-                      </a:r>
-                    </a:p>
-                  </a:txBody>
-                  <a:tcPr/>
-                </a:tc>
-              </a:tr>
-              <a:tr h="365760">
-                <a:tc>
-                  <a:txBody>
-                    <a:bodyPr/>
-                    <a:lstStyle/>
-                    <a:p>
-                      <a:pPr>
-                        <a:defRPr sz="1100"/>
-                      </a:pPr>
-                      <a:r>
-                        <a:t>교정지도(Corrective)</a:t>
-                      </a:r>
-                    </a:p>
-                  </a:txBody>
-                  <a:tcPr/>
-                </a:tc>
-                <a:tc>
-                  <a:txBody>
-                    <a:bodyPr/>
-                    <a:lstStyle/>
-                    <a:p>
-                      <a:pPr>
-                        <a:defRPr sz="1100"/>
-                      </a:pPr>
-                      <a:r>
-                        <a:t>형성평가에서 드러난 미흡 부분을 보충하는 추가 지도</a:t>
-                      </a:r>
-                    </a:p>
-                  </a:txBody>
-                  <a:tcPr/>
-                </a:tc>
-              </a:tr>
-              <a:tr h="365760">
-                <a:tc>
-                  <a:txBody>
-                    <a:bodyPr/>
-                    <a:lstStyle/>
-                    <a:p>
-                      <a:pPr>
-                        <a:defRPr sz="1100"/>
-                      </a:pPr>
-                      <a:r>
-                        <a:t>학습 몰입 시간(Time on Task)</a:t>
-                      </a:r>
-                    </a:p>
-                  </a:txBody>
-                  <a:tcPr/>
-                </a:tc>
-                <a:tc>
-                  <a:txBody>
-                    <a:bodyPr/>
-                    <a:lstStyle/>
-                    <a:p>
-                      <a:pPr>
-                        <a:defRPr sz="1100"/>
-                      </a:pPr>
-                      <a:r>
-                        <a:t>실제로 학습 과제에 집중한 시간의 비율</a:t>
-                      </a:r>
-                    </a:p>
-                  </a:txBody>
-                  <a:tcPr/>
-                </a:tc>
-              </a:tr>
-              <a:tr h="365760">
-                <a:tc>
-                  <a:txBody>
-                    <a:bodyPr/>
-                    <a:lstStyle/>
-                    <a:p>
-                      <a:pPr>
-                        <a:defRPr sz="1100"/>
-                      </a:pPr>
-                      <a:r>
-                        <a:t>지능형 튜터링 시스템(ITS)</a:t>
-                      </a:r>
-                    </a:p>
-                  </a:txBody>
-                  <a:tcPr/>
-                </a:tc>
-                <a:tc>
-                  <a:txBody>
-                    <a:bodyPr/>
-                    <a:lstStyle/>
-                    <a:p>
-                      <a:pPr>
-                        <a:defRPr sz="1100"/>
-                      </a:pPr>
-                      <a:r>
-                        <a:t>Intelligent Tutoring System — 학생의 단계별 풀이를 진단해 맞춤 피드백을 주는 컴퓨터 교습 시스템</a:t>
-                      </a:r>
-                    </a:p>
-                  </a:txBody>
-                  <a:tcPr/>
-                </a:tc>
-              </a:tr>
-              <a:tr h="365760">
-                <a:tc>
-                  <a:txBody>
-                    <a:bodyPr/>
-                    <a:lstStyle/>
-                    <a:p>
-                      <a:pPr>
-                        <a:defRPr sz="1100"/>
-                      </a:pPr>
-                      <a:r>
-                        <a:t>무작위통제연구(RCT)</a:t>
-                      </a:r>
-                    </a:p>
-                  </a:txBody>
-                  <a:tcPr/>
-                </a:tc>
-                <a:tc>
-                  <a:txBody>
-                    <a:bodyPr/>
-                    <a:lstStyle/>
-                    <a:p>
-                      <a:pPr>
-                        <a:defRPr sz="1100"/>
-                      </a:pPr>
-                      <a:r>
-                        <a:t>Randomized Controlled Trial — 대상을 무작위로 배정해 처치의 효과를 인과적으로 검증하는 연구 설계</a:t>
-                      </a:r>
-                    </a:p>
-                  </a:txBody>
-                  <a:tcPr/>
-                </a:tc>
-              </a:tr>
-            </a:tbl>
-          </a:graphicData>
-        </a:graphic>
-      </p:graphicFrame>
+        </p:nvSpPr>
+        <p:spPr>
+          <a:xfrm>
+            <a:off x="0" y="0"/>
+            <a:ext cx="12191695" cy="201168"/>
+          </a:xfrm>
+          <a:prstGeom prst="rect">
+            <a:avLst/>
+          </a:prstGeom>
+          <a:solidFill>
+            <a:srgbClr val="1CC5B0"/>
+          </a:solidFill>
+          <a:ln>
+            <a:noFill/>
+          </a:ln>
+          <a:effectLst/>
+        </p:spPr>
+        <p:style>
+          <a:lnRef idx="1">
+            <a:schemeClr val="accent1"/>
+          </a:lnRef>
+          <a:fillRef idx="3">
+            <a:schemeClr val="accent1"/>
+          </a:fillRef>
+          <a:effectRef idx="2">
+            <a:schemeClr val="accent1"/>
+          </a:effectRef>
+          <a:fontRef idx="minor">
+            <a:schemeClr val="lt1"/>
+          </a:fontRef>
+        </p:style>
+        <p:txBody>
+          <a:bodyPr rtlCol="0" anchor="ctr"/>
+          <a:lstStyle/>
+          <a:p>
+            <a:pPr algn="ctr"/>
+          </a:p>
+        </p:txBody>
+      </p:sp>
+      <p:sp>
+        <p:nvSpPr>
+          <p:cNvPr id="3" name="TextBox 2"/>
+          <p:cNvSpPr txBox="1"/>
+          <p:nvPr/>
+        </p:nvSpPr>
+        <p:spPr>
+          <a:xfrm>
+            <a:off x="777240" y="1828800"/>
+            <a:ext cx="10637215" cy="457200"/>
+          </a:xfrm>
+          <a:prstGeom prst="rect">
+            <a:avLst/>
+          </a:prstGeom>
+          <a:noFill/>
+        </p:spPr>
+        <p:txBody>
+          <a:bodyPr wrap="square" anchor="t" lIns="0" rIns="0" tIns="0" bIns="0">
+            <a:spAutoFit/>
+          </a:bodyPr>
+          <a:lstStyle/>
+          <a:p>
+            <a:pPr algn="l">
+              <a:spcBef>
+                <a:spcPts val="0"/>
+              </a:spcBef>
+              <a:spcAft>
+                <a:spcPts val="0"/>
+              </a:spcAft>
+            </a:pPr>
+            <a:r>
+              <a:rPr sz="1600" b="1" i="0">
+                <a:solidFill>
+                  <a:srgbClr val="1CC5B0"/>
+                </a:solidFill>
+                <a:latin typeface="맑은 고딕"/>
+                <a:ea typeface="맑은 고딕"/>
+                <a:cs typeface="맑은 고딕"/>
+              </a:rPr>
+              <a:t>한 줄로</a:t>
+            </a:r>
+          </a:p>
+        </p:txBody>
+      </p:sp>
+      <p:sp>
+        <p:nvSpPr>
+          <p:cNvPr id="4" name="TextBox 3"/>
+          <p:cNvSpPr txBox="1"/>
+          <p:nvPr/>
+        </p:nvSpPr>
+        <p:spPr>
+          <a:xfrm>
+            <a:off x="777240" y="2377440"/>
+            <a:ext cx="10424160" cy="2926080"/>
+          </a:xfrm>
+          <a:prstGeom prst="rect">
+            <a:avLst/>
+          </a:prstGeom>
+          <a:noFill/>
+        </p:spPr>
+        <p:txBody>
+          <a:bodyPr wrap="square" anchor="t" lIns="0" rIns="0" tIns="0" bIns="0">
+            <a:spAutoFit/>
+          </a:bodyPr>
+          <a:lstStyle/>
+          <a:p>
+            <a:pPr algn="l">
+              <a:lnSpc>
+                <a:spcPct val="132000"/>
+              </a:lnSpc>
+              <a:spcBef>
+                <a:spcPts val="0"/>
+              </a:spcBef>
+              <a:spcAft>
+                <a:spcPts val="0"/>
+              </a:spcAft>
+            </a:pPr>
+            <a:r>
+              <a:rPr sz="2700" b="1" i="0">
+                <a:solidFill>
+                  <a:srgbClr val="FFFFFF"/>
+                </a:solidFill>
+                <a:latin typeface="맑은 고딕"/>
+                <a:ea typeface="맑은 고딕"/>
+                <a:cs typeface="맑은 고딕"/>
+              </a:rPr>
+              <a:t>블룸(1984)이 비용 때문에 미룬 ‘1:1 교습의 대규모 실현’을, AI가 실시간 개별화와 환류로 푼다 — 학생 한 명 한 명에게 개인교습에 준하는 조건을, 대규모로.</a:t>
+            </a:r>
+          </a:p>
+        </p:txBody>
+      </p:sp>
+      <p:sp>
+        <p:nvSpPr>
+          <p:cNvPr id="5" name="Rectangle 4"/>
+          <p:cNvSpPr/>
+          <p:nvPr/>
+        </p:nvSpPr>
+        <p:spPr>
+          <a:xfrm>
+            <a:off x="777240" y="5806440"/>
+            <a:ext cx="2011680" cy="45720"/>
+          </a:xfrm>
+          <a:prstGeom prst="rect">
+            <a:avLst/>
+          </a:prstGeom>
+          <a:solidFill>
+            <a:srgbClr val="1CC5B0"/>
+          </a:solidFill>
+          <a:ln>
+            <a:noFill/>
+          </a:ln>
+          <a:effectLst/>
+        </p:spPr>
+        <p:style>
+          <a:lnRef idx="1">
+            <a:schemeClr val="accent1"/>
+          </a:lnRef>
+          <a:fillRef idx="3">
+            <a:schemeClr val="accent1"/>
+          </a:fillRef>
+          <a:effectRef idx="2">
+            <a:schemeClr val="accent1"/>
+          </a:effectRef>
+          <a:fontRef idx="minor">
+            <a:schemeClr val="lt1"/>
+          </a:fontRef>
+        </p:style>
+        <p:txBody>
+          <a:bodyPr rtlCol="0" anchor="ctr"/>
+          <a:lstStyle/>
+          <a:p>
+            <a:pPr algn="ctr"/>
+          </a:p>
+        </p:txBody>
+      </p:sp>
+      <p:sp>
+        <p:nvSpPr>
+          <p:cNvPr id="6" name="TextBox 5"/>
+          <p:cNvSpPr txBox="1"/>
+          <p:nvPr/>
+        </p:nvSpPr>
+        <p:spPr>
+          <a:xfrm>
+            <a:off x="777240" y="5989320"/>
+            <a:ext cx="10637215" cy="457200"/>
+          </a:xfrm>
+          <a:prstGeom prst="rect">
+            <a:avLst/>
+          </a:prstGeom>
+          <a:noFill/>
+        </p:spPr>
+        <p:txBody>
+          <a:bodyPr wrap="square" anchor="t" lIns="0" rIns="0" tIns="0" bIns="0">
+            <a:spAutoFit/>
+          </a:bodyPr>
+          <a:lstStyle/>
+          <a:p>
+            <a:pPr algn="l">
+              <a:spcBef>
+                <a:spcPts val="0"/>
+              </a:spcBef>
+              <a:spcAft>
+                <a:spcPts val="0"/>
+              </a:spcAft>
+            </a:pPr>
+            <a:r>
+              <a:rPr sz="1400" b="0" i="0">
+                <a:solidFill>
+                  <a:srgbClr val="C7D5E2"/>
+                </a:solidFill>
+                <a:latin typeface="맑은 고딕"/>
+                <a:ea typeface="맑은 고딕"/>
+                <a:cs typeface="맑은 고딕"/>
+              </a:rPr>
+              <a:t>제주도교육인수위원회 · 미래학력분과</a:t>
+            </a:r>
+          </a:p>
+        </p:txBody>
+      </p:sp>
     </p:spTree>
   </p:cSld>
   <p:clrMapOvr>
@@ -3951,6 +5759,14 @@
 <file path=ppt/slides/slide2.xml><?xml version="1.0" encoding="utf-8"?>
 <p:sld xmlns:a="http://schemas.openxmlformats.org/drawingml/2006/main" xmlns:p="http://schemas.openxmlformats.org/presentationml/2006/main" xmlns:r="http://schemas.openxmlformats.org/officeDocument/2006/relationships">
   <p:cSld>
+    <p:bg>
+      <p:bgPr>
+        <a:solidFill>
+          <a:srgbClr val="0F2A44"/>
+        </a:solidFill>
+        <a:effectLst/>
+      </p:bgPr>
+    </p:bg>
     <p:spTree>
       <p:nvGrpSpPr>
         <p:cNvPr id="1" name=""/>
@@ -3960,45 +5776,135 @@
       <p:grpSpPr/>
       <p:sp>
         <p:nvSpPr>
-          <p:cNvPr id="2" name="Title 1"/>
-          <p:cNvSpPr>
-            <a:spLocks noGrp="1"/>
-          </p:cNvSpPr>
-          <p:nvPr>
-            <p:ph type="title"/>
-          </p:nvPr>
-        </p:nvSpPr>
-        <p:spPr/>
-        <p:txBody>
-          <a:bodyPr/>
-          <a:lstStyle/>
-          <a:p>
-            <a:r>
-              <a:t>한 줄 요약</a:t>
-            </a:r>
-          </a:p>
-        </p:txBody>
-      </p:sp>
-      <p:sp>
-        <p:nvSpPr>
-          <p:cNvPr id="3" name="Content Placeholder 2"/>
-          <p:cNvSpPr>
-            <a:spLocks noGrp="1"/>
-          </p:cNvSpPr>
-          <p:nvPr>
-            <p:ph idx="1"/>
-          </p:nvPr>
-        </p:nvSpPr>
-        <p:spPr/>
-        <p:txBody>
-          <a:bodyPr/>
-          <a:lstStyle/>
-          <a:p>
-            <a:pPr>
-              <a:defRPr sz="1600"/>
+          <p:cNvPr id="2" name="Rectangle 1"/>
+          <p:cNvSpPr/>
+          <p:nvPr/>
+        </p:nvSpPr>
+        <p:spPr>
+          <a:xfrm>
+            <a:off x="0" y="2743200"/>
+            <a:ext cx="2011680" cy="73152"/>
+          </a:xfrm>
+          <a:prstGeom prst="rect">
+            <a:avLst/>
+          </a:prstGeom>
+          <a:solidFill>
+            <a:srgbClr val="1CC5B0"/>
+          </a:solidFill>
+          <a:ln>
+            <a:noFill/>
+          </a:ln>
+          <a:effectLst/>
+        </p:spPr>
+        <p:style>
+          <a:lnRef idx="1">
+            <a:schemeClr val="accent1"/>
+          </a:lnRef>
+          <a:fillRef idx="3">
+            <a:schemeClr val="accent1"/>
+          </a:fillRef>
+          <a:effectRef idx="2">
+            <a:schemeClr val="accent1"/>
+          </a:effectRef>
+          <a:fontRef idx="minor">
+            <a:schemeClr val="lt1"/>
+          </a:fontRef>
+        </p:style>
+        <p:txBody>
+          <a:bodyPr rtlCol="0" anchor="ctr"/>
+          <a:lstStyle/>
+          <a:p>
+            <a:pPr algn="ctr"/>
+          </a:p>
+        </p:txBody>
+      </p:sp>
+      <p:sp>
+        <p:nvSpPr>
+          <p:cNvPr id="3" name="TextBox 2"/>
+          <p:cNvSpPr txBox="1"/>
+          <p:nvPr/>
+        </p:nvSpPr>
+        <p:spPr>
+          <a:xfrm>
+            <a:off x="777240" y="1371600"/>
+            <a:ext cx="10637215" cy="1371600"/>
+          </a:xfrm>
+          <a:prstGeom prst="rect">
+            <a:avLst/>
+          </a:prstGeom>
+          <a:noFill/>
+        </p:spPr>
+        <p:txBody>
+          <a:bodyPr wrap="square" anchor="t" lIns="0" rIns="0" tIns="0" bIns="0">
+            <a:spAutoFit/>
+          </a:bodyPr>
+          <a:lstStyle/>
+          <a:p>
+            <a:pPr algn="l">
+              <a:spcBef>
+                <a:spcPts val="0"/>
+              </a:spcBef>
+              <a:spcAft>
+                <a:spcPts val="0"/>
+              </a:spcAft>
             </a:pPr>
             <a:r>
-              <a:t>일대일 개인교습을 받은 학생은 전통적 집단수업 학생보다 약 2 표준편차(2σ) 높은 성취를 보인다. 그러나 개인교습을 모든 학생에게 제공하기엔 비용이 너무 크다 — 이 격차를 대규모로 실현 가능한 방법으로 좁히는 것이 교육 연구의 핵심 과제다(= '2 시그마 문제').</a:t>
+              <a:rPr sz="8400" b="1" i="0">
+                <a:solidFill>
+                  <a:srgbClr val="1CC5B0"/>
+                </a:solidFill>
+                <a:latin typeface="맑은 고딕"/>
+                <a:ea typeface="맑은 고딕"/>
+                <a:cs typeface="맑은 고딕"/>
+              </a:rPr>
+              <a:t>01</a:t>
+            </a:r>
+          </a:p>
+        </p:txBody>
+      </p:sp>
+      <p:sp>
+        <p:nvSpPr>
+          <p:cNvPr id="4" name="TextBox 3"/>
+          <p:cNvSpPr txBox="1"/>
+          <p:nvPr/>
+        </p:nvSpPr>
+        <p:spPr>
+          <a:xfrm>
+            <a:off x="777240" y="2971800"/>
+            <a:ext cx="10058400" cy="1828800"/>
+          </a:xfrm>
+          <a:prstGeom prst="rect">
+            <a:avLst/>
+          </a:prstGeom>
+          <a:noFill/>
+        </p:spPr>
+        <p:txBody>
+          <a:bodyPr wrap="square" anchor="t" lIns="0" rIns="0" tIns="0" bIns="0">
+            <a:spAutoFit/>
+          </a:bodyPr>
+          <a:lstStyle/>
+          <a:p>
+            <a:pPr algn="l">
+              <a:lnSpc>
+                <a:spcPct val="110000"/>
+              </a:lnSpc>
+              <a:spcBef>
+                <a:spcPts val="0"/>
+              </a:spcBef>
+              <a:spcAft>
+                <a:spcPts val="0"/>
+              </a:spcAft>
+            </a:pPr>
+            <a:r>
+              <a:rPr sz="4000" b="1" i="0">
+                <a:solidFill>
+                  <a:srgbClr val="FFFFFF"/>
+                </a:solidFill>
+                <a:latin typeface="맑은 고딕"/>
+                <a:ea typeface="맑은 고딕"/>
+                <a:cs typeface="맑은 고딕"/>
+              </a:rPr>
+              <a:t>문제 — ‘2 시그마’</a:t>
             </a:r>
           </a:p>
         </p:txBody>
@@ -4014,6 +5920,14 @@
 <file path=ppt/slides/slide3.xml><?xml version="1.0" encoding="utf-8"?>
 <p:sld xmlns:a="http://schemas.openxmlformats.org/drawingml/2006/main" xmlns:p="http://schemas.openxmlformats.org/presentationml/2006/main" xmlns:r="http://schemas.openxmlformats.org/officeDocument/2006/relationships">
   <p:cSld>
+    <p:bg>
+      <p:bgPr>
+        <a:solidFill>
+          <a:srgbClr val="0F2A44"/>
+        </a:solidFill>
+        <a:effectLst/>
+      </p:bgPr>
+    </p:bg>
     <p:spTree>
       <p:nvGrpSpPr>
         <p:cNvPr id="1" name=""/>
@@ -4023,45 +5937,159 @@
       <p:grpSpPr/>
       <p:sp>
         <p:nvSpPr>
-          <p:cNvPr id="2" name="Title 1"/>
-          <p:cNvSpPr>
-            <a:spLocks noGrp="1"/>
-          </p:cNvSpPr>
-          <p:nvPr>
-            <p:ph type="title"/>
-          </p:nvPr>
-        </p:nvSpPr>
-        <p:spPr/>
-        <p:txBody>
-          <a:bodyPr/>
-          <a:lstStyle/>
-          <a:p>
-            <a:r>
-              <a:t>1. 실험 설계 — 세 가지 학습 조건 비교</a:t>
-            </a:r>
-          </a:p>
-        </p:txBody>
-      </p:sp>
-      <p:sp>
-        <p:nvSpPr>
-          <p:cNvPr id="3" name="Content Placeholder 2"/>
-          <p:cNvSpPr>
-            <a:spLocks noGrp="1"/>
-          </p:cNvSpPr>
-          <p:nvPr>
-            <p:ph idx="1"/>
-          </p:nvPr>
-        </p:nvSpPr>
-        <p:spPr/>
-        <p:txBody>
-          <a:bodyPr/>
-          <a:lstStyle/>
-          <a:p>
-            <a:pPr>
-              <a:defRPr sz="1600"/>
+          <p:cNvPr id="2" name="TextBox 1"/>
+          <p:cNvSpPr txBox="1"/>
+          <p:nvPr/>
+        </p:nvSpPr>
+        <p:spPr>
+          <a:xfrm>
+            <a:off x="777240" y="1188720"/>
+            <a:ext cx="4937760" cy="3931920"/>
+          </a:xfrm>
+          <a:prstGeom prst="rect">
+            <a:avLst/>
+          </a:prstGeom>
+          <a:noFill/>
+        </p:spPr>
+        <p:txBody>
+          <a:bodyPr wrap="square" anchor="ctr" lIns="0" rIns="0" tIns="0" bIns="0">
+            <a:spAutoFit/>
+          </a:bodyPr>
+          <a:lstStyle/>
+          <a:p>
+            <a:pPr algn="ctr">
+              <a:spcBef>
+                <a:spcPts val="0"/>
+              </a:spcBef>
+              <a:spcAft>
+                <a:spcPts val="0"/>
+              </a:spcAft>
             </a:pPr>
             <a:r>
-              <a:t>시카고대학교 박사과정생 아나니아(Anania, 1982·1983)와 버크(Burke, 1984)가 학생을 세 조건에 무작위 배정해 비교했다. 4·5·8학년, 확률·지도학(Cartography) 등 다양한 표본에서 3주·11차시로 반복 검증했다.</a:t>
+              <a:rPr sz="15000" b="1" i="0">
+                <a:solidFill>
+                  <a:srgbClr val="1CC5B0"/>
+                </a:solidFill>
+                <a:latin typeface="맑은 고딕"/>
+                <a:ea typeface="맑은 고딕"/>
+                <a:cs typeface="맑은 고딕"/>
+              </a:rPr>
+              <a:t>2σ</a:t>
+            </a:r>
+          </a:p>
+        </p:txBody>
+      </p:sp>
+      <p:sp>
+        <p:nvSpPr>
+          <p:cNvPr id="3" name="Rectangle 2"/>
+          <p:cNvSpPr/>
+          <p:nvPr/>
+        </p:nvSpPr>
+        <p:spPr>
+          <a:xfrm>
+            <a:off x="5806440" y="2148840"/>
+            <a:ext cx="54864" cy="2651760"/>
+          </a:xfrm>
+          <a:prstGeom prst="rect">
+            <a:avLst/>
+          </a:prstGeom>
+          <a:solidFill>
+            <a:srgbClr val="1CC5B0"/>
+          </a:solidFill>
+          <a:ln>
+            <a:noFill/>
+          </a:ln>
+          <a:effectLst/>
+        </p:spPr>
+        <p:style>
+          <a:lnRef idx="1">
+            <a:schemeClr val="accent1"/>
+          </a:lnRef>
+          <a:fillRef idx="3">
+            <a:schemeClr val="accent1"/>
+          </a:fillRef>
+          <a:effectRef idx="2">
+            <a:schemeClr val="accent1"/>
+          </a:effectRef>
+          <a:fontRef idx="minor">
+            <a:schemeClr val="lt1"/>
+          </a:fontRef>
+        </p:style>
+        <p:txBody>
+          <a:bodyPr rtlCol="0" anchor="ctr"/>
+          <a:lstStyle/>
+          <a:p>
+            <a:pPr algn="ctr"/>
+          </a:p>
+        </p:txBody>
+      </p:sp>
+      <p:sp>
+        <p:nvSpPr>
+          <p:cNvPr id="4" name="TextBox 3"/>
+          <p:cNvSpPr txBox="1"/>
+          <p:nvPr/>
+        </p:nvSpPr>
+        <p:spPr>
+          <a:xfrm>
+            <a:off x="6172200" y="1965960"/>
+            <a:ext cx="5212080" cy="3108960"/>
+          </a:xfrm>
+          <a:prstGeom prst="rect">
+            <a:avLst/>
+          </a:prstGeom>
+          <a:noFill/>
+        </p:spPr>
+        <p:txBody>
+          <a:bodyPr wrap="square" anchor="t" lIns="0" rIns="0" tIns="0" bIns="0">
+            <a:spAutoFit/>
+          </a:bodyPr>
+          <a:lstStyle/>
+          <a:p>
+            <a:pPr algn="l">
+              <a:lnSpc>
+                <a:spcPct val="115000"/>
+              </a:lnSpc>
+              <a:spcBef>
+                <a:spcPts val="0"/>
+              </a:spcBef>
+              <a:spcAft>
+                <a:spcPts val="1000"/>
+              </a:spcAft>
+            </a:pPr>
+            <a:r>
+              <a:rPr sz="2500" b="1" i="0">
+                <a:solidFill>
+                  <a:srgbClr val="FFFFFF"/>
+                </a:solidFill>
+                <a:latin typeface="맑은 고딕"/>
+                <a:ea typeface="맑은 고딕"/>
+                <a:cs typeface="맑은 고딕"/>
+              </a:rPr>
+              <a:t>1:1 개인교습을 받은 학생은 집단수업보다 약 2 표준편차 높은 성취를 낸다</a:t>
+            </a:r>
+          </a:p>
+          <a:p>
+            <a:pPr algn="l">
+              <a:lnSpc>
+                <a:spcPct val="130000"/>
+              </a:lnSpc>
+              <a:spcBef>
+                <a:spcPts val="0"/>
+              </a:spcBef>
+              <a:spcAft>
+                <a:spcPts val="0"/>
+              </a:spcAft>
+            </a:pPr>
+            <a:r>
+              <a:rPr sz="1600" b="0" i="0">
+                <a:solidFill>
+                  <a:srgbClr val="C7D5E2"/>
+                </a:solidFill>
+                <a:latin typeface="맑은 고딕"/>
+                <a:ea typeface="맑은 고딕"/>
+                <a:cs typeface="맑은 고딕"/>
+              </a:rPr>
+              <a:t>그러나 개인교습을 모든 학생에게 제공하기엔 비용이 너무 크다 — 블룸(1984)이 던진 ‘2 시그마 문제’.</a:t>
             </a:r>
           </a:p>
         </p:txBody>
@@ -4077,6 +6105,14 @@
 <file path=ppt/slides/slide4.xml><?xml version="1.0" encoding="utf-8"?>
 <p:sld xmlns:a="http://schemas.openxmlformats.org/drawingml/2006/main" xmlns:p="http://schemas.openxmlformats.org/presentationml/2006/main" xmlns:r="http://schemas.openxmlformats.org/officeDocument/2006/relationships">
   <p:cSld>
+    <p:bg>
+      <p:bgPr>
+        <a:solidFill>
+          <a:srgbClr val="FFFFFF"/>
+        </a:solidFill>
+        <a:effectLst/>
+      </p:bgPr>
+    </p:bg>
     <p:spTree>
       <p:nvGrpSpPr>
         <p:cNvPr id="1" name=""/>
@@ -4086,179 +6122,656 @@
       <p:grpSpPr/>
       <p:sp>
         <p:nvSpPr>
-          <p:cNvPr id="2" name="Title 1"/>
-          <p:cNvSpPr>
-            <a:spLocks noGrp="1"/>
-          </p:cNvSpPr>
-          <p:nvPr>
-            <p:ph type="title"/>
-          </p:nvPr>
-        </p:nvSpPr>
-        <p:spPr/>
-        <p:txBody>
-          <a:bodyPr/>
-          <a:lstStyle/>
-          <a:p>
-            <a:r>
-              <a:t>1. 실험 설계 — 세 가지 학습 조건 비교</a:t>
-            </a:r>
-          </a:p>
-        </p:txBody>
-      </p:sp>
-      <p:graphicFrame>
-        <p:nvGraphicFramePr>
-          <p:cNvPr id="3" name="Table 2"/>
-          <p:cNvGraphicFramePr>
-            <a:graphicFrameLocks noGrp="1"/>
-          </p:cNvGraphicFramePr>
+          <p:cNvPr id="2" name="Rectangle 1"/>
+          <p:cNvSpPr/>
           <p:nvPr/>
-        </p:nvGraphicFramePr>
-        <p:xfrm>
-          <a:off x="365760" y="1188720"/>
-          <a:ext cx="8412480" cy="1463040"/>
-        </p:xfrm>
-        <a:graphic>
-          <a:graphicData uri="http://schemas.openxmlformats.org/drawingml/2006/table">
-            <a:tbl>
-              <a:tblPr firstRow="1" bandRow="1">
-                <a:tableStyleId>{5C22544A-7EE6-4342-B048-85BDC9FD1C3A}</a:tableStyleId>
-              </a:tblPr>
-              <a:tblGrid>
-                <a:gridCol w="4206240"/>
-                <a:gridCol w="4206240"/>
-              </a:tblGrid>
-              <a:tr h="365760">
-                <a:tc>
-                  <a:txBody>
-                    <a:bodyPr/>
-                    <a:lstStyle/>
-                    <a:p>
-                      <a:pPr>
-                        <a:defRPr sz="1100" b="1"/>
-                      </a:pPr>
-                      <a:r>
-                        <a:t>조건</a:t>
-                      </a:r>
-                    </a:p>
-                  </a:txBody>
-                  <a:tcPr/>
-                </a:tc>
-                <a:tc>
-                  <a:txBody>
-                    <a:bodyPr/>
-                    <a:lstStyle/>
-                    <a:p>
-                      <a:pPr>
-                        <a:defRPr sz="1100" b="1"/>
-                      </a:pPr>
-                      <a:r>
-                        <a:t>방식</a:t>
-                      </a:r>
-                    </a:p>
-                  </a:txBody>
-                  <a:tcPr/>
-                </a:tc>
-              </a:tr>
-              <a:tr h="365760">
-                <a:tc>
-                  <a:txBody>
-                    <a:bodyPr/>
-                    <a:lstStyle/>
-                    <a:p>
-                      <a:pPr>
-                        <a:defRPr sz="1100"/>
-                      </a:pPr>
-                      <a:r>
-                        <a:t>① 전통적 수업(Conventional)</a:t>
-                      </a:r>
-                    </a:p>
-                  </a:txBody>
-                  <a:tcPr/>
-                </a:tc>
-                <a:tc>
-                  <a:txBody>
-                    <a:bodyPr/>
-                    <a:lstStyle/>
-                    <a:p>
-                      <a:pPr>
-                        <a:defRPr sz="1100"/>
-                      </a:pPr>
-                      <a:r>
-                        <a:t>교사 1명당 학생 약 30명. 주기적 시험만 실시</a:t>
-                      </a:r>
-                    </a:p>
-                  </a:txBody>
-                  <a:tcPr/>
-                </a:tc>
-              </a:tr>
-              <a:tr h="365760">
-                <a:tc>
-                  <a:txBody>
-                    <a:bodyPr/>
-                    <a:lstStyle/>
-                    <a:p>
-                      <a:pPr>
-                        <a:defRPr sz="1100"/>
-                      </a:pPr>
-                      <a:r>
-                        <a:t>② 완전학습(Mastery Learning)</a:t>
-                      </a:r>
-                    </a:p>
-                  </a:txBody>
-                  <a:tcPr/>
-                </a:tc>
-                <a:tc>
-                  <a:txBody>
-                    <a:bodyPr/>
-                    <a:lstStyle/>
-                    <a:p>
-                      <a:pPr>
-                        <a:defRPr sz="1100"/>
-                      </a:pPr>
-                      <a:r>
-                        <a:t>30명 학급 + 형성평가·피드백·교정지도(corrective)·재평가 추가</a:t>
-                      </a:r>
-                    </a:p>
-                  </a:txBody>
-                  <a:tcPr/>
-                </a:tc>
-              </a:tr>
-              <a:tr h="365760">
-                <a:tc>
-                  <a:txBody>
-                    <a:bodyPr/>
-                    <a:lstStyle/>
-                    <a:p>
-                      <a:pPr>
-                        <a:defRPr sz="1100"/>
-                      </a:pPr>
-                      <a:r>
-                        <a:t>③ 개인교습(Tutoring)</a:t>
-                      </a:r>
-                    </a:p>
-                  </a:txBody>
-                  <a:tcPr/>
-                </a:tc>
-                <a:tc>
-                  <a:txBody>
-                    <a:bodyPr/>
-                    <a:lstStyle/>
-                    <a:p>
-                      <a:pPr>
-                        <a:defRPr sz="1100"/>
-                      </a:pPr>
-                      <a:r>
-                        <a:t>학생 1명(또는 2~3명)당 전담 교사 1명 + 형성평가·교정 절차</a:t>
-                      </a:r>
-                    </a:p>
-                  </a:txBody>
-                  <a:tcPr/>
-                </a:tc>
-              </a:tr>
-            </a:tbl>
-          </a:graphicData>
-        </a:graphic>
-      </p:graphicFrame>
+        </p:nvSpPr>
+        <p:spPr>
+          <a:xfrm>
+            <a:off x="0" y="0"/>
+            <a:ext cx="12191695" cy="146304"/>
+          </a:xfrm>
+          <a:prstGeom prst="rect">
+            <a:avLst/>
+          </a:prstGeom>
+          <a:solidFill>
+            <a:srgbClr val="1CC5B0"/>
+          </a:solidFill>
+          <a:ln>
+            <a:noFill/>
+          </a:ln>
+          <a:effectLst/>
+        </p:spPr>
+        <p:style>
+          <a:lnRef idx="1">
+            <a:schemeClr val="accent1"/>
+          </a:lnRef>
+          <a:fillRef idx="3">
+            <a:schemeClr val="accent1"/>
+          </a:fillRef>
+          <a:effectRef idx="2">
+            <a:schemeClr val="accent1"/>
+          </a:effectRef>
+          <a:fontRef idx="minor">
+            <a:schemeClr val="lt1"/>
+          </a:fontRef>
+        </p:style>
+        <p:txBody>
+          <a:bodyPr rtlCol="0" anchor="ctr"/>
+          <a:lstStyle/>
+          <a:p>
+            <a:pPr algn="ctr"/>
+          </a:p>
+        </p:txBody>
+      </p:sp>
+      <p:sp>
+        <p:nvSpPr>
+          <p:cNvPr id="3" name="TextBox 2"/>
+          <p:cNvSpPr txBox="1"/>
+          <p:nvPr/>
+        </p:nvSpPr>
+        <p:spPr>
+          <a:xfrm>
+            <a:off x="777240" y="548640"/>
+            <a:ext cx="10637215" cy="914400"/>
+          </a:xfrm>
+          <a:prstGeom prst="rect">
+            <a:avLst/>
+          </a:prstGeom>
+          <a:noFill/>
+        </p:spPr>
+        <p:txBody>
+          <a:bodyPr wrap="square" anchor="t" lIns="0" rIns="0" tIns="0" bIns="0">
+            <a:spAutoFit/>
+          </a:bodyPr>
+          <a:lstStyle/>
+          <a:p>
+            <a:pPr algn="l">
+              <a:spcBef>
+                <a:spcPts val="0"/>
+              </a:spcBef>
+              <a:spcAft>
+                <a:spcPts val="0"/>
+              </a:spcAft>
+            </a:pPr>
+            <a:r>
+              <a:rPr sz="2900" b="1" i="0">
+                <a:solidFill>
+                  <a:srgbClr val="0F2A44"/>
+                </a:solidFill>
+                <a:latin typeface="맑은 고딕"/>
+                <a:ea typeface="맑은 고딕"/>
+                <a:cs typeface="맑은 고딕"/>
+              </a:rPr>
+              <a:t>실험 설계 — 세 조건 무작위 비교</a:t>
+            </a:r>
+          </a:p>
+        </p:txBody>
+      </p:sp>
+      <p:sp>
+        <p:nvSpPr>
+          <p:cNvPr id="4" name="Rectangle 3"/>
+          <p:cNvSpPr/>
+          <p:nvPr/>
+        </p:nvSpPr>
+        <p:spPr>
+          <a:xfrm>
+            <a:off x="777240" y="1316736"/>
+            <a:ext cx="1920240" cy="50292"/>
+          </a:xfrm>
+          <a:prstGeom prst="rect">
+            <a:avLst/>
+          </a:prstGeom>
+          <a:solidFill>
+            <a:srgbClr val="1CC5B0"/>
+          </a:solidFill>
+          <a:ln>
+            <a:noFill/>
+          </a:ln>
+          <a:effectLst/>
+        </p:spPr>
+        <p:style>
+          <a:lnRef idx="1">
+            <a:schemeClr val="accent1"/>
+          </a:lnRef>
+          <a:fillRef idx="3">
+            <a:schemeClr val="accent1"/>
+          </a:fillRef>
+          <a:effectRef idx="2">
+            <a:schemeClr val="accent1"/>
+          </a:effectRef>
+          <a:fontRef idx="minor">
+            <a:schemeClr val="lt1"/>
+          </a:fontRef>
+        </p:style>
+        <p:txBody>
+          <a:bodyPr rtlCol="0" anchor="ctr"/>
+          <a:lstStyle/>
+          <a:p>
+            <a:pPr algn="ctr"/>
+          </a:p>
+        </p:txBody>
+      </p:sp>
+      <p:sp>
+        <p:nvSpPr>
+          <p:cNvPr id="5" name="Rectangle 4"/>
+          <p:cNvSpPr/>
+          <p:nvPr/>
+        </p:nvSpPr>
+        <p:spPr>
+          <a:xfrm>
+            <a:off x="777240" y="1783080"/>
+            <a:ext cx="5029200" cy="3977639"/>
+          </a:xfrm>
+          <a:prstGeom prst="rect">
+            <a:avLst/>
+          </a:prstGeom>
+          <a:solidFill>
+            <a:srgbClr val="F3F6FA"/>
+          </a:solidFill>
+          <a:ln>
+            <a:noFill/>
+          </a:ln>
+          <a:effectLst/>
+        </p:spPr>
+        <p:style>
+          <a:lnRef idx="1">
+            <a:schemeClr val="accent1"/>
+          </a:lnRef>
+          <a:fillRef idx="3">
+            <a:schemeClr val="accent1"/>
+          </a:fillRef>
+          <a:effectRef idx="2">
+            <a:schemeClr val="accent1"/>
+          </a:effectRef>
+          <a:fontRef idx="minor">
+            <a:schemeClr val="lt1"/>
+          </a:fontRef>
+        </p:style>
+        <p:txBody>
+          <a:bodyPr rtlCol="0" anchor="ctr"/>
+          <a:lstStyle/>
+          <a:p>
+            <a:pPr algn="ctr"/>
+          </a:p>
+        </p:txBody>
+      </p:sp>
+      <p:sp>
+        <p:nvSpPr>
+          <p:cNvPr id="6" name="TextBox 5"/>
+          <p:cNvSpPr txBox="1"/>
+          <p:nvPr/>
+        </p:nvSpPr>
+        <p:spPr>
+          <a:xfrm>
+            <a:off x="1097280" y="2057400"/>
+            <a:ext cx="4389120" cy="640080"/>
+          </a:xfrm>
+          <a:prstGeom prst="rect">
+            <a:avLst/>
+          </a:prstGeom>
+          <a:noFill/>
+        </p:spPr>
+        <p:txBody>
+          <a:bodyPr wrap="square" anchor="t" lIns="0" rIns="0" tIns="0" bIns="0">
+            <a:spAutoFit/>
+          </a:bodyPr>
+          <a:lstStyle/>
+          <a:p>
+            <a:pPr algn="l">
+              <a:spcBef>
+                <a:spcPts val="0"/>
+              </a:spcBef>
+              <a:spcAft>
+                <a:spcPts val="0"/>
+              </a:spcAft>
+            </a:pPr>
+            <a:r>
+              <a:rPr sz="1900" b="1" i="0">
+                <a:solidFill>
+                  <a:srgbClr val="0F2A44"/>
+                </a:solidFill>
+                <a:latin typeface="맑은 고딕"/>
+                <a:ea typeface="맑은 고딕"/>
+                <a:cs typeface="맑은 고딕"/>
+              </a:rPr>
+              <a:t>설계</a:t>
+            </a:r>
+          </a:p>
+        </p:txBody>
+      </p:sp>
+      <p:sp>
+        <p:nvSpPr>
+          <p:cNvPr id="7" name="TextBox 6"/>
+          <p:cNvSpPr txBox="1"/>
+          <p:nvPr/>
+        </p:nvSpPr>
+        <p:spPr>
+          <a:xfrm>
+            <a:off x="1097280" y="2788920"/>
+            <a:ext cx="4434840" cy="2834640"/>
+          </a:xfrm>
+          <a:prstGeom prst="rect">
+            <a:avLst/>
+          </a:prstGeom>
+          <a:noFill/>
+        </p:spPr>
+        <p:txBody>
+          <a:bodyPr wrap="square" anchor="t" lIns="0" rIns="0" tIns="0" bIns="0">
+            <a:spAutoFit/>
+          </a:bodyPr>
+          <a:lstStyle/>
+          <a:p>
+            <a:pPr algn="l">
+              <a:lnSpc>
+                <a:spcPct val="118000"/>
+              </a:lnSpc>
+              <a:spcBef>
+                <a:spcPts val="0"/>
+              </a:spcBef>
+              <a:spcAft>
+                <a:spcPts val="900"/>
+              </a:spcAft>
+            </a:pPr>
+            <a:r>
+              <a:rPr sz="1400" b="1" i="0">
+                <a:solidFill>
+                  <a:srgbClr val="1CC5B0"/>
+                </a:solidFill>
+                <a:latin typeface="맑은 고딕"/>
+                <a:ea typeface="맑은 고딕"/>
+                <a:cs typeface="맑은 고딕"/>
+              </a:rPr>
+              <a:t>· </a:t>
+            </a:r>
+            <a:r>
+              <a:rPr sz="1550" b="0" i="0">
+                <a:solidFill>
+                  <a:srgbClr val="1B2A38"/>
+                </a:solidFill>
+                <a:latin typeface="맑은 고딕"/>
+                <a:ea typeface="맑은 고딕"/>
+                <a:cs typeface="맑은 고딕"/>
+              </a:rPr>
+              <a:t>시카고대 아나니아·버크(1982~84)</a:t>
+            </a:r>
+          </a:p>
+          <a:p>
+            <a:pPr algn="l">
+              <a:lnSpc>
+                <a:spcPct val="118000"/>
+              </a:lnSpc>
+              <a:spcBef>
+                <a:spcPts val="0"/>
+              </a:spcBef>
+              <a:spcAft>
+                <a:spcPts val="900"/>
+              </a:spcAft>
+            </a:pPr>
+            <a:r>
+              <a:rPr sz="1400" b="1" i="0">
+                <a:solidFill>
+                  <a:srgbClr val="1CC5B0"/>
+                </a:solidFill>
+                <a:latin typeface="맑은 고딕"/>
+                <a:ea typeface="맑은 고딕"/>
+                <a:cs typeface="맑은 고딕"/>
+              </a:rPr>
+              <a:t>· </a:t>
+            </a:r>
+            <a:r>
+              <a:rPr sz="1550" b="0" i="0">
+                <a:solidFill>
+                  <a:srgbClr val="1B2A38"/>
+                </a:solidFill>
+                <a:latin typeface="맑은 고딕"/>
+                <a:ea typeface="맑은 고딕"/>
+                <a:cs typeface="맑은 고딕"/>
+              </a:rPr>
+              <a:t>4·5·8학년, 3주·11차시 반복 검증</a:t>
+            </a:r>
+          </a:p>
+          <a:p>
+            <a:pPr algn="l">
+              <a:lnSpc>
+                <a:spcPct val="118000"/>
+              </a:lnSpc>
+              <a:spcBef>
+                <a:spcPts val="0"/>
+              </a:spcBef>
+              <a:spcAft>
+                <a:spcPts val="900"/>
+              </a:spcAft>
+            </a:pPr>
+            <a:r>
+              <a:rPr sz="1400" b="1" i="0">
+                <a:solidFill>
+                  <a:srgbClr val="1CC5B0"/>
+                </a:solidFill>
+                <a:latin typeface="맑은 고딕"/>
+                <a:ea typeface="맑은 고딕"/>
+                <a:cs typeface="맑은 고딕"/>
+              </a:rPr>
+              <a:t>· </a:t>
+            </a:r>
+            <a:r>
+              <a:rPr sz="1550" b="0" i="0">
+                <a:solidFill>
+                  <a:srgbClr val="1B2A38"/>
+                </a:solidFill>
+                <a:latin typeface="맑은 고딕"/>
+                <a:ea typeface="맑은 고딕"/>
+                <a:cs typeface="맑은 고딕"/>
+              </a:rPr>
+              <a:t>초기 적성·수업시간 동일하게 통제</a:t>
+            </a:r>
+          </a:p>
+        </p:txBody>
+      </p:sp>
+      <p:sp>
+        <p:nvSpPr>
+          <p:cNvPr id="8" name="Rectangle 7"/>
+          <p:cNvSpPr/>
+          <p:nvPr/>
+        </p:nvSpPr>
+        <p:spPr>
+          <a:xfrm>
+            <a:off x="6446520" y="1783080"/>
+            <a:ext cx="5029200" cy="3977639"/>
+          </a:xfrm>
+          <a:prstGeom prst="rect">
+            <a:avLst/>
+          </a:prstGeom>
+          <a:solidFill>
+            <a:srgbClr val="F3F6FA"/>
+          </a:solidFill>
+          <a:ln>
+            <a:noFill/>
+          </a:ln>
+          <a:effectLst/>
+        </p:spPr>
+        <p:style>
+          <a:lnRef idx="1">
+            <a:schemeClr val="accent1"/>
+          </a:lnRef>
+          <a:fillRef idx="3">
+            <a:schemeClr val="accent1"/>
+          </a:fillRef>
+          <a:effectRef idx="2">
+            <a:schemeClr val="accent1"/>
+          </a:effectRef>
+          <a:fontRef idx="minor">
+            <a:schemeClr val="lt1"/>
+          </a:fontRef>
+        </p:style>
+        <p:txBody>
+          <a:bodyPr rtlCol="0" anchor="ctr"/>
+          <a:lstStyle/>
+          <a:p>
+            <a:pPr algn="ctr"/>
+          </a:p>
+        </p:txBody>
+      </p:sp>
+      <p:sp>
+        <p:nvSpPr>
+          <p:cNvPr id="9" name="TextBox 8"/>
+          <p:cNvSpPr txBox="1"/>
+          <p:nvPr/>
+        </p:nvSpPr>
+        <p:spPr>
+          <a:xfrm>
+            <a:off x="6766560" y="2057400"/>
+            <a:ext cx="4389120" cy="640080"/>
+          </a:xfrm>
+          <a:prstGeom prst="rect">
+            <a:avLst/>
+          </a:prstGeom>
+          <a:noFill/>
+        </p:spPr>
+        <p:txBody>
+          <a:bodyPr wrap="square" anchor="t" lIns="0" rIns="0" tIns="0" bIns="0">
+            <a:spAutoFit/>
+          </a:bodyPr>
+          <a:lstStyle/>
+          <a:p>
+            <a:pPr algn="l">
+              <a:spcBef>
+                <a:spcPts val="0"/>
+              </a:spcBef>
+              <a:spcAft>
+                <a:spcPts val="0"/>
+              </a:spcAft>
+            </a:pPr>
+            <a:r>
+              <a:rPr sz="1900" b="1" i="0">
+                <a:solidFill>
+                  <a:srgbClr val="0F2A44"/>
+                </a:solidFill>
+                <a:latin typeface="맑은 고딕"/>
+                <a:ea typeface="맑은 고딕"/>
+                <a:cs typeface="맑은 고딕"/>
+              </a:rPr>
+              <a:t>세 가지 학습 조건</a:t>
+            </a:r>
+          </a:p>
+        </p:txBody>
+      </p:sp>
+      <p:sp>
+        <p:nvSpPr>
+          <p:cNvPr id="10" name="TextBox 9"/>
+          <p:cNvSpPr txBox="1"/>
+          <p:nvPr/>
+        </p:nvSpPr>
+        <p:spPr>
+          <a:xfrm>
+            <a:off x="6766560" y="2788920"/>
+            <a:ext cx="4434840" cy="2834640"/>
+          </a:xfrm>
+          <a:prstGeom prst="rect">
+            <a:avLst/>
+          </a:prstGeom>
+          <a:noFill/>
+        </p:spPr>
+        <p:txBody>
+          <a:bodyPr wrap="square" anchor="t" lIns="0" rIns="0" tIns="0" bIns="0">
+            <a:spAutoFit/>
+          </a:bodyPr>
+          <a:lstStyle/>
+          <a:p>
+            <a:pPr algn="l">
+              <a:lnSpc>
+                <a:spcPct val="118000"/>
+              </a:lnSpc>
+              <a:spcBef>
+                <a:spcPts val="0"/>
+              </a:spcBef>
+              <a:spcAft>
+                <a:spcPts val="900"/>
+              </a:spcAft>
+            </a:pPr>
+            <a:r>
+              <a:rPr sz="1400" b="1" i="0">
+                <a:solidFill>
+                  <a:srgbClr val="1CC5B0"/>
+                </a:solidFill>
+                <a:latin typeface="맑은 고딕"/>
+                <a:ea typeface="맑은 고딕"/>
+                <a:cs typeface="맑은 고딕"/>
+              </a:rPr>
+              <a:t>· </a:t>
+            </a:r>
+            <a:r>
+              <a:rPr sz="1550" b="0" i="0">
+                <a:solidFill>
+                  <a:srgbClr val="1B2A38"/>
+                </a:solidFill>
+                <a:latin typeface="맑은 고딕"/>
+                <a:ea typeface="맑은 고딕"/>
+                <a:cs typeface="맑은 고딕"/>
+              </a:rPr>
+              <a:t>① 전통 집단수업 (교사 1 : 다수)</a:t>
+            </a:r>
+          </a:p>
+          <a:p>
+            <a:pPr algn="l">
+              <a:lnSpc>
+                <a:spcPct val="118000"/>
+              </a:lnSpc>
+              <a:spcBef>
+                <a:spcPts val="0"/>
+              </a:spcBef>
+              <a:spcAft>
+                <a:spcPts val="900"/>
+              </a:spcAft>
+            </a:pPr>
+            <a:r>
+              <a:rPr sz="1400" b="1" i="0">
+                <a:solidFill>
+                  <a:srgbClr val="1CC5B0"/>
+                </a:solidFill>
+                <a:latin typeface="맑은 고딕"/>
+                <a:ea typeface="맑은 고딕"/>
+                <a:cs typeface="맑은 고딕"/>
+              </a:rPr>
+              <a:t>· </a:t>
+            </a:r>
+            <a:r>
+              <a:rPr sz="1550" b="0" i="0">
+                <a:solidFill>
+                  <a:srgbClr val="1B2A38"/>
+                </a:solidFill>
+                <a:latin typeface="맑은 고딕"/>
+                <a:ea typeface="맑은 고딕"/>
+                <a:cs typeface="맑은 고딕"/>
+              </a:rPr>
+              <a:t>② 완전학습 (형성평가 + 교정)</a:t>
+            </a:r>
+          </a:p>
+          <a:p>
+            <a:pPr algn="l">
+              <a:lnSpc>
+                <a:spcPct val="118000"/>
+              </a:lnSpc>
+              <a:spcBef>
+                <a:spcPts val="0"/>
+              </a:spcBef>
+              <a:spcAft>
+                <a:spcPts val="900"/>
+              </a:spcAft>
+            </a:pPr>
+            <a:r>
+              <a:rPr sz="1400" b="1" i="0">
+                <a:solidFill>
+                  <a:srgbClr val="1CC5B0"/>
+                </a:solidFill>
+                <a:latin typeface="맑은 고딕"/>
+                <a:ea typeface="맑은 고딕"/>
+                <a:cs typeface="맑은 고딕"/>
+              </a:rPr>
+              <a:t>· </a:t>
+            </a:r>
+            <a:r>
+              <a:rPr sz="1550" b="0" i="0">
+                <a:solidFill>
+                  <a:srgbClr val="1B2A38"/>
+                </a:solidFill>
+                <a:latin typeface="맑은 고딕"/>
+                <a:ea typeface="맑은 고딕"/>
+                <a:cs typeface="맑은 고딕"/>
+              </a:rPr>
+              <a:t>③ 1:1·소집단 개인교습</a:t>
+            </a:r>
+          </a:p>
+        </p:txBody>
+      </p:sp>
+      <p:sp>
+        <p:nvSpPr>
+          <p:cNvPr id="11" name="TextBox 10"/>
+          <p:cNvSpPr txBox="1"/>
+          <p:nvPr/>
+        </p:nvSpPr>
+        <p:spPr>
+          <a:xfrm>
+            <a:off x="777240" y="6419088"/>
+            <a:ext cx="8229600" cy="320040"/>
+          </a:xfrm>
+          <a:prstGeom prst="rect">
+            <a:avLst/>
+          </a:prstGeom>
+          <a:noFill/>
+        </p:spPr>
+        <p:txBody>
+          <a:bodyPr wrap="square" anchor="t" lIns="0" rIns="0" tIns="0" bIns="0">
+            <a:spAutoFit/>
+          </a:bodyPr>
+          <a:lstStyle/>
+          <a:p>
+            <a:pPr algn="l">
+              <a:spcBef>
+                <a:spcPts val="0"/>
+              </a:spcBef>
+              <a:spcAft>
+                <a:spcPts val="0"/>
+              </a:spcAft>
+            </a:pPr>
+            <a:r>
+              <a:rPr sz="1050" b="0" i="0">
+                <a:solidFill>
+                  <a:srgbClr val="6E7B8A"/>
+                </a:solidFill>
+                <a:latin typeface="맑은 고딕"/>
+                <a:ea typeface="맑은 고딕"/>
+                <a:cs typeface="맑은 고딕"/>
+              </a:rPr>
+              <a:t>블룸 2σ · 초개별화 맞춤형 교육</a:t>
+            </a:r>
+          </a:p>
+        </p:txBody>
+      </p:sp>
+      <p:sp>
+        <p:nvSpPr>
+          <p:cNvPr id="12" name="TextBox 11"/>
+          <p:cNvSpPr txBox="1"/>
+          <p:nvPr/>
+        </p:nvSpPr>
+        <p:spPr>
+          <a:xfrm>
+            <a:off x="10607040" y="6419088"/>
+            <a:ext cx="822960" cy="320040"/>
+          </a:xfrm>
+          <a:prstGeom prst="rect">
+            <a:avLst/>
+          </a:prstGeom>
+          <a:noFill/>
+        </p:spPr>
+        <p:txBody>
+          <a:bodyPr wrap="square" anchor="t" lIns="0" rIns="0" tIns="0" bIns="0">
+            <a:spAutoFit/>
+          </a:bodyPr>
+          <a:lstStyle/>
+          <a:p>
+            <a:pPr algn="r">
+              <a:spcBef>
+                <a:spcPts val="0"/>
+              </a:spcBef>
+              <a:spcAft>
+                <a:spcPts val="0"/>
+              </a:spcAft>
+            </a:pPr>
+            <a:r>
+              <a:rPr sz="1050" b="0" i="0">
+                <a:solidFill>
+                  <a:srgbClr val="6E7B8A"/>
+                </a:solidFill>
+                <a:latin typeface="맑은 고딕"/>
+                <a:ea typeface="맑은 고딕"/>
+                <a:cs typeface="맑은 고딕"/>
+              </a:rPr>
+              <a:t>1</a:t>
+            </a:r>
+          </a:p>
+        </p:txBody>
+      </p:sp>
     </p:spTree>
   </p:cSld>
   <p:clrMapOvr>
@@ -4270,6 +6783,14 @@
 <file path=ppt/slides/slide5.xml><?xml version="1.0" encoding="utf-8"?>
 <p:sld xmlns:a="http://schemas.openxmlformats.org/drawingml/2006/main" xmlns:p="http://schemas.openxmlformats.org/presentationml/2006/main" xmlns:r="http://schemas.openxmlformats.org/officeDocument/2006/relationships">
   <p:cSld>
+    <p:bg>
+      <p:bgPr>
+        <a:solidFill>
+          <a:srgbClr val="FFFFFF"/>
+        </a:solidFill>
+        <a:effectLst/>
+      </p:bgPr>
+    </p:bg>
     <p:spTree>
       <p:nvGrpSpPr>
         <p:cNvPr id="1" name=""/>
@@ -4279,53 +6800,555 @@
       <p:grpSpPr/>
       <p:sp>
         <p:nvSpPr>
-          <p:cNvPr id="2" name="Title 1"/>
-          <p:cNvSpPr>
-            <a:spLocks noGrp="1"/>
-          </p:cNvSpPr>
-          <p:nvPr>
-            <p:ph type="title"/>
-          </p:nvPr>
-        </p:nvSpPr>
-        <p:spPr/>
-        <p:txBody>
-          <a:bodyPr/>
-          <a:lstStyle/>
-          <a:p>
-            <a:r>
-              <a:t>1. 실험 설계 — 세 가지 학습 조건 비교</a:t>
-            </a:r>
-          </a:p>
-        </p:txBody>
-      </p:sp>
-      <p:sp>
-        <p:nvSpPr>
-          <p:cNvPr id="3" name="Content Placeholder 2"/>
-          <p:cNvSpPr>
-            <a:spLocks noGrp="1"/>
-          </p:cNvSpPr>
-          <p:nvPr>
-            <p:ph idx="1"/>
-          </p:nvPr>
-        </p:nvSpPr>
-        <p:spPr/>
-        <p:txBody>
-          <a:bodyPr/>
-          <a:lstStyle/>
-          <a:p>
-            <a:pPr>
-              <a:defRPr sz="1600"/>
+          <p:cNvPr id="2" name="Rectangle 1"/>
+          <p:cNvSpPr/>
+          <p:nvPr/>
+        </p:nvSpPr>
+        <p:spPr>
+          <a:xfrm>
+            <a:off x="0" y="0"/>
+            <a:ext cx="12191695" cy="146304"/>
+          </a:xfrm>
+          <a:prstGeom prst="rect">
+            <a:avLst/>
+          </a:prstGeom>
+          <a:solidFill>
+            <a:srgbClr val="1CC5B0"/>
+          </a:solidFill>
+          <a:ln>
+            <a:noFill/>
+          </a:ln>
+          <a:effectLst/>
+        </p:spPr>
+        <p:style>
+          <a:lnRef idx="1">
+            <a:schemeClr val="accent1"/>
+          </a:lnRef>
+          <a:fillRef idx="3">
+            <a:schemeClr val="accent1"/>
+          </a:fillRef>
+          <a:effectRef idx="2">
+            <a:schemeClr val="accent1"/>
+          </a:effectRef>
+          <a:fontRef idx="minor">
+            <a:schemeClr val="lt1"/>
+          </a:fontRef>
+        </p:style>
+        <p:txBody>
+          <a:bodyPr rtlCol="0" anchor="ctr"/>
+          <a:lstStyle/>
+          <a:p>
+            <a:pPr algn="ctr"/>
+          </a:p>
+        </p:txBody>
+      </p:sp>
+      <p:sp>
+        <p:nvSpPr>
+          <p:cNvPr id="3" name="TextBox 2"/>
+          <p:cNvSpPr txBox="1"/>
+          <p:nvPr/>
+        </p:nvSpPr>
+        <p:spPr>
+          <a:xfrm>
+            <a:off x="777240" y="548640"/>
+            <a:ext cx="10637215" cy="914400"/>
+          </a:xfrm>
+          <a:prstGeom prst="rect">
+            <a:avLst/>
+          </a:prstGeom>
+          <a:noFill/>
+        </p:spPr>
+        <p:txBody>
+          <a:bodyPr wrap="square" anchor="t" lIns="0" rIns="0" tIns="0" bIns="0">
+            <a:spAutoFit/>
+          </a:bodyPr>
+          <a:lstStyle/>
+          <a:p>
+            <a:pPr algn="l">
+              <a:spcBef>
+                <a:spcPts val="0"/>
+              </a:spcBef>
+              <a:spcAft>
+                <a:spcPts val="0"/>
+              </a:spcAft>
             </a:pPr>
             <a:r>
-              <a:t>세 조건의 초기 적성·성취·태도·흥미는 동일하게 맞췄다.</a:t>
-            </a:r>
-          </a:p>
-          <a:p>
-            <a:pPr>
-              <a:defRPr sz="1600"/>
+              <a:rPr sz="2900" b="1" i="0">
+                <a:solidFill>
+                  <a:srgbClr val="0F2A44"/>
+                </a:solidFill>
+                <a:latin typeface="맑은 고딕"/>
+                <a:ea typeface="맑은 고딕"/>
+                <a:cs typeface="맑은 고딕"/>
+              </a:rPr>
+              <a:t>결과 — ‘2 시그마’ 효과</a:t>
+            </a:r>
+          </a:p>
+        </p:txBody>
+      </p:sp>
+      <p:sp>
+        <p:nvSpPr>
+          <p:cNvPr id="4" name="Rectangle 3"/>
+          <p:cNvSpPr/>
+          <p:nvPr/>
+        </p:nvSpPr>
+        <p:spPr>
+          <a:xfrm>
+            <a:off x="777240" y="1316736"/>
+            <a:ext cx="1920240" cy="50292"/>
+          </a:xfrm>
+          <a:prstGeom prst="rect">
+            <a:avLst/>
+          </a:prstGeom>
+          <a:solidFill>
+            <a:srgbClr val="1CC5B0"/>
+          </a:solidFill>
+          <a:ln>
+            <a:noFill/>
+          </a:ln>
+          <a:effectLst/>
+        </p:spPr>
+        <p:style>
+          <a:lnRef idx="1">
+            <a:schemeClr val="accent1"/>
+          </a:lnRef>
+          <a:fillRef idx="3">
+            <a:schemeClr val="accent1"/>
+          </a:fillRef>
+          <a:effectRef idx="2">
+            <a:schemeClr val="accent1"/>
+          </a:effectRef>
+          <a:fontRef idx="minor">
+            <a:schemeClr val="lt1"/>
+          </a:fontRef>
+        </p:style>
+        <p:txBody>
+          <a:bodyPr rtlCol="0" anchor="ctr"/>
+          <a:lstStyle/>
+          <a:p>
+            <a:pPr algn="ctr"/>
+          </a:p>
+        </p:txBody>
+      </p:sp>
+      <p:graphicFrame>
+        <p:nvGraphicFramePr>
+          <p:cNvPr id="5" name="Table 4"/>
+          <p:cNvGraphicFramePr>
+            <a:graphicFrameLocks noGrp="1"/>
+          </p:cNvGraphicFramePr>
+          <p:nvPr/>
+        </p:nvGraphicFramePr>
+        <p:xfrm>
+          <a:off x="777240" y="1783080"/>
+          <a:ext cx="10637215" cy="2075688"/>
+        </p:xfrm>
+        <a:graphic>
+          <a:graphicData uri="http://schemas.openxmlformats.org/drawingml/2006/table">
+            <a:tbl>
+              <a:tblPr>
+                <a:tableStyleId>{5C22544A-7EE6-4342-B048-85BDC9FD1C3A}</a:tableStyleId>
+              </a:tblPr>
+              <a:tblGrid>
+                <a:gridCol w="3545738"/>
+                <a:gridCol w="3545738"/>
+                <a:gridCol w="3545739"/>
+              </a:tblGrid>
+              <a:tr h="566928">
+                <a:tc>
+                  <a:txBody>
+                    <a:bodyPr/>
+                    <a:lstStyle/>
+                    <a:p>
+                      <a:pPr algn="l"/>
+                      <a:r>
+                        <a:rPr sz="1300" b="1">
+                          <a:solidFill>
+                            <a:srgbClr val="FFFFFF"/>
+                          </a:solidFill>
+                          <a:latin typeface="맑은 고딕"/>
+                          <a:ea typeface="맑은 고딕"/>
+                          <a:cs typeface="맑은 고딕"/>
+                        </a:rPr>
+                        <a:t>학습 조건</a:t>
+                      </a:r>
+                    </a:p>
+                  </a:txBody>
+                  <a:tcPr marL="137160" marR="109728" marT="27432" marB="27432" anchor="ctr">
+                    <a:solidFill>
+                      <a:srgbClr val="0F2A44"/>
+                    </a:solidFill>
+                  </a:tcPr>
+                </a:tc>
+                <a:tc>
+                  <a:txBody>
+                    <a:bodyPr/>
+                    <a:lstStyle/>
+                    <a:p>
+                      <a:pPr algn="l"/>
+                      <a:r>
+                        <a:rPr sz="1300" b="1">
+                          <a:solidFill>
+                            <a:srgbClr val="FFFFFF"/>
+                          </a:solidFill>
+                          <a:latin typeface="맑은 고딕"/>
+                          <a:ea typeface="맑은 고딕"/>
+                          <a:cs typeface="맑은 고딕"/>
+                        </a:rPr>
+                        <a:t>성취(전통 대비)</a:t>
+                      </a:r>
+                    </a:p>
+                  </a:txBody>
+                  <a:tcPr marL="137160" marR="109728" marT="27432" marB="27432" anchor="ctr">
+                    <a:solidFill>
+                      <a:srgbClr val="0F2A44"/>
+                    </a:solidFill>
+                  </a:tcPr>
+                </a:tc>
+                <a:tc>
+                  <a:txBody>
+                    <a:bodyPr/>
+                    <a:lstStyle/>
+                    <a:p>
+                      <a:pPr algn="l"/>
+                      <a:r>
+                        <a:rPr sz="1300" b="1">
+                          <a:solidFill>
+                            <a:srgbClr val="FFFFFF"/>
+                          </a:solidFill>
+                          <a:latin typeface="맑은 고딕"/>
+                          <a:ea typeface="맑은 고딕"/>
+                          <a:cs typeface="맑은 고딕"/>
+                        </a:rPr>
+                        <a:t>목표 도달률</a:t>
+                      </a:r>
+                    </a:p>
+                  </a:txBody>
+                  <a:tcPr marL="137160" marR="109728" marT="27432" marB="27432" anchor="ctr">
+                    <a:solidFill>
+                      <a:srgbClr val="0F2A44"/>
+                    </a:solidFill>
+                  </a:tcPr>
+                </a:tc>
+              </a:tr>
+              <a:tr h="502920">
+                <a:tc>
+                  <a:txBody>
+                    <a:bodyPr/>
+                    <a:lstStyle/>
+                    <a:p>
+                      <a:pPr algn="l"/>
+                      <a:r>
+                        <a:rPr sz="1250" b="0">
+                          <a:solidFill>
+                            <a:srgbClr val="1B2A38"/>
+                          </a:solidFill>
+                          <a:latin typeface="맑은 고딕"/>
+                          <a:ea typeface="맑은 고딕"/>
+                          <a:cs typeface="맑은 고딕"/>
+                        </a:rPr>
+                        <a:t>전통 집단수업</a:t>
+                      </a:r>
+                    </a:p>
+                  </a:txBody>
+                  <a:tcPr marL="137160" marR="109728" marT="27432" marB="27432" anchor="ctr">
+                    <a:solidFill>
+                      <a:srgbClr val="FFFFFF"/>
+                    </a:solidFill>
+                  </a:tcPr>
+                </a:tc>
+                <a:tc>
+                  <a:txBody>
+                    <a:bodyPr/>
+                    <a:lstStyle/>
+                    <a:p>
+                      <a:pPr algn="l"/>
+                      <a:r>
+                        <a:rPr sz="1250" b="0">
+                          <a:solidFill>
+                            <a:srgbClr val="1B2A38"/>
+                          </a:solidFill>
+                          <a:latin typeface="맑은 고딕"/>
+                          <a:ea typeface="맑은 고딕"/>
+                          <a:cs typeface="맑은 고딕"/>
+                        </a:rPr>
+                        <a:t>기준</a:t>
+                      </a:r>
+                    </a:p>
+                  </a:txBody>
+                  <a:tcPr marL="137160" marR="109728" marT="27432" marB="27432" anchor="ctr">
+                    <a:solidFill>
+                      <a:srgbClr val="FFFFFF"/>
+                    </a:solidFill>
+                  </a:tcPr>
+                </a:tc>
+                <a:tc>
+                  <a:txBody>
+                    <a:bodyPr/>
+                    <a:lstStyle/>
+                    <a:p>
+                      <a:pPr algn="l"/>
+                      <a:r>
+                        <a:rPr sz="1250" b="0">
+                          <a:solidFill>
+                            <a:srgbClr val="1B2A38"/>
+                          </a:solidFill>
+                          <a:latin typeface="맑은 고딕"/>
+                          <a:ea typeface="맑은 고딕"/>
+                          <a:cs typeface="맑은 고딕"/>
+                        </a:rPr>
+                        <a:t>상위 20%</a:t>
+                      </a:r>
+                    </a:p>
+                  </a:txBody>
+                  <a:tcPr marL="137160" marR="109728" marT="27432" marB="27432" anchor="ctr">
+                    <a:solidFill>
+                      <a:srgbClr val="FFFFFF"/>
+                    </a:solidFill>
+                  </a:tcPr>
+                </a:tc>
+              </a:tr>
+              <a:tr h="502920">
+                <a:tc>
+                  <a:txBody>
+                    <a:bodyPr/>
+                    <a:lstStyle/>
+                    <a:p>
+                      <a:pPr algn="l"/>
+                      <a:r>
+                        <a:rPr sz="1250" b="0">
+                          <a:solidFill>
+                            <a:srgbClr val="1B2A38"/>
+                          </a:solidFill>
+                          <a:latin typeface="맑은 고딕"/>
+                          <a:ea typeface="맑은 고딕"/>
+                          <a:cs typeface="맑은 고딕"/>
+                        </a:rPr>
+                        <a:t>완전학습</a:t>
+                      </a:r>
+                    </a:p>
+                  </a:txBody>
+                  <a:tcPr marL="137160" marR="109728" marT="27432" marB="27432" anchor="ctr">
+                    <a:solidFill>
+                      <a:srgbClr val="F3F6FA"/>
+                    </a:solidFill>
+                  </a:tcPr>
+                </a:tc>
+                <a:tc>
+                  <a:txBody>
+                    <a:bodyPr/>
+                    <a:lstStyle/>
+                    <a:p>
+                      <a:pPr algn="l"/>
+                      <a:r>
+                        <a:rPr sz="1250" b="0">
+                          <a:solidFill>
+                            <a:srgbClr val="1B2A38"/>
+                          </a:solidFill>
+                          <a:latin typeface="맑은 고딕"/>
+                          <a:ea typeface="맑은 고딕"/>
+                          <a:cs typeface="맑은 고딕"/>
+                        </a:rPr>
+                        <a:t>+1σ</a:t>
+                      </a:r>
+                    </a:p>
+                  </a:txBody>
+                  <a:tcPr marL="137160" marR="109728" marT="27432" marB="27432" anchor="ctr">
+                    <a:solidFill>
+                      <a:srgbClr val="F3F6FA"/>
+                    </a:solidFill>
+                  </a:tcPr>
+                </a:tc>
+                <a:tc>
+                  <a:txBody>
+                    <a:bodyPr/>
+                    <a:lstStyle/>
+                    <a:p>
+                      <a:pPr algn="l"/>
+                      <a:r>
+                        <a:rPr sz="1250" b="0">
+                          <a:solidFill>
+                            <a:srgbClr val="1B2A38"/>
+                          </a:solidFill>
+                          <a:latin typeface="맑은 고딕"/>
+                          <a:ea typeface="맑은 고딕"/>
+                          <a:cs typeface="맑은 고딕"/>
+                        </a:rPr>
+                        <a:t>70%</a:t>
+                      </a:r>
+                    </a:p>
+                  </a:txBody>
+                  <a:tcPr marL="137160" marR="109728" marT="27432" marB="27432" anchor="ctr">
+                    <a:solidFill>
+                      <a:srgbClr val="F3F6FA"/>
+                    </a:solidFill>
+                  </a:tcPr>
+                </a:tc>
+              </a:tr>
+              <a:tr h="502920">
+                <a:tc>
+                  <a:txBody>
+                    <a:bodyPr/>
+                    <a:lstStyle/>
+                    <a:p>
+                      <a:pPr algn="l"/>
+                      <a:r>
+                        <a:rPr sz="1250" b="0">
+                          <a:solidFill>
+                            <a:srgbClr val="1B2A38"/>
+                          </a:solidFill>
+                          <a:latin typeface="맑은 고딕"/>
+                          <a:ea typeface="맑은 고딕"/>
+                          <a:cs typeface="맑은 고딕"/>
+                        </a:rPr>
+                        <a:t>1:1 개인교습</a:t>
+                      </a:r>
+                    </a:p>
+                  </a:txBody>
+                  <a:tcPr marL="137160" marR="109728" marT="27432" marB="27432" anchor="ctr">
+                    <a:solidFill>
+                      <a:srgbClr val="FFFFFF"/>
+                    </a:solidFill>
+                  </a:tcPr>
+                </a:tc>
+                <a:tc>
+                  <a:txBody>
+                    <a:bodyPr/>
+                    <a:lstStyle/>
+                    <a:p>
+                      <a:pPr algn="l"/>
+                      <a:r>
+                        <a:rPr sz="1250" b="0">
+                          <a:solidFill>
+                            <a:srgbClr val="1B2A38"/>
+                          </a:solidFill>
+                          <a:latin typeface="맑은 고딕"/>
+                          <a:ea typeface="맑은 고딕"/>
+                          <a:cs typeface="맑은 고딕"/>
+                        </a:rPr>
+                        <a:t>+2σ</a:t>
+                      </a:r>
+                    </a:p>
+                  </a:txBody>
+                  <a:tcPr marL="137160" marR="109728" marT="27432" marB="27432" anchor="ctr">
+                    <a:solidFill>
+                      <a:srgbClr val="FFFFFF"/>
+                    </a:solidFill>
+                  </a:tcPr>
+                </a:tc>
+                <a:tc>
+                  <a:txBody>
+                    <a:bodyPr/>
+                    <a:lstStyle/>
+                    <a:p>
+                      <a:pPr algn="l"/>
+                      <a:r>
+                        <a:rPr sz="1250" b="0">
+                          <a:solidFill>
+                            <a:srgbClr val="1B2A38"/>
+                          </a:solidFill>
+                          <a:latin typeface="맑은 고딕"/>
+                          <a:ea typeface="맑은 고딕"/>
+                          <a:cs typeface="맑은 고딕"/>
+                        </a:rPr>
+                        <a:t>90%</a:t>
+                      </a:r>
+                    </a:p>
+                  </a:txBody>
+                  <a:tcPr marL="137160" marR="109728" marT="27432" marB="27432" anchor="ctr">
+                    <a:solidFill>
+                      <a:srgbClr val="FFFFFF"/>
+                    </a:solidFill>
+                  </a:tcPr>
+                </a:tc>
+              </a:tr>
+            </a:tbl>
+          </a:graphicData>
+        </a:graphic>
+      </p:graphicFrame>
+      <p:sp>
+        <p:nvSpPr>
+          <p:cNvPr id="6" name="TextBox 5"/>
+          <p:cNvSpPr txBox="1"/>
+          <p:nvPr/>
+        </p:nvSpPr>
+        <p:spPr>
+          <a:xfrm>
+            <a:off x="777240" y="6419088"/>
+            <a:ext cx="8229600" cy="320040"/>
+          </a:xfrm>
+          <a:prstGeom prst="rect">
+            <a:avLst/>
+          </a:prstGeom>
+          <a:noFill/>
+        </p:spPr>
+        <p:txBody>
+          <a:bodyPr wrap="square" anchor="t" lIns="0" rIns="0" tIns="0" bIns="0">
+            <a:spAutoFit/>
+          </a:bodyPr>
+          <a:lstStyle/>
+          <a:p>
+            <a:pPr algn="l">
+              <a:spcBef>
+                <a:spcPts val="0"/>
+              </a:spcBef>
+              <a:spcAft>
+                <a:spcPts val="0"/>
+              </a:spcAft>
             </a:pPr>
             <a:r>
-              <a:t>수업 시간도 동일했고, 완전학습·개인교습 조건의 교정 작업 시간만 추가됐다.</a:t>
+              <a:rPr sz="1050" b="0" i="0">
+                <a:solidFill>
+                  <a:srgbClr val="6E7B8A"/>
+                </a:solidFill>
+                <a:latin typeface="맑은 고딕"/>
+                <a:ea typeface="맑은 고딕"/>
+                <a:cs typeface="맑은 고딕"/>
+              </a:rPr>
+              <a:t>블룸 2σ · 초개별화 맞춤형 교육</a:t>
+            </a:r>
+          </a:p>
+        </p:txBody>
+      </p:sp>
+      <p:sp>
+        <p:nvSpPr>
+          <p:cNvPr id="7" name="TextBox 6"/>
+          <p:cNvSpPr txBox="1"/>
+          <p:nvPr/>
+        </p:nvSpPr>
+        <p:spPr>
+          <a:xfrm>
+            <a:off x="10607040" y="6419088"/>
+            <a:ext cx="822960" cy="320040"/>
+          </a:xfrm>
+          <a:prstGeom prst="rect">
+            <a:avLst/>
+          </a:prstGeom>
+          <a:noFill/>
+        </p:spPr>
+        <p:txBody>
+          <a:bodyPr wrap="square" anchor="t" lIns="0" rIns="0" tIns="0" bIns="0">
+            <a:spAutoFit/>
+          </a:bodyPr>
+          <a:lstStyle/>
+          <a:p>
+            <a:pPr algn="r">
+              <a:spcBef>
+                <a:spcPts val="0"/>
+              </a:spcBef>
+              <a:spcAft>
+                <a:spcPts val="0"/>
+              </a:spcAft>
+            </a:pPr>
+            <a:r>
+              <a:rPr sz="1050" b="0" i="0">
+                <a:solidFill>
+                  <a:srgbClr val="6E7B8A"/>
+                </a:solidFill>
+                <a:latin typeface="맑은 고딕"/>
+                <a:ea typeface="맑은 고딕"/>
+                <a:cs typeface="맑은 고딕"/>
+              </a:rPr>
+              <a:t>2</a:t>
             </a:r>
           </a:p>
         </p:txBody>
@@ -4341,6 +7364,14 @@
 <file path=ppt/slides/slide6.xml><?xml version="1.0" encoding="utf-8"?>
 <p:sld xmlns:a="http://schemas.openxmlformats.org/drawingml/2006/main" xmlns:p="http://schemas.openxmlformats.org/presentationml/2006/main" xmlns:r="http://schemas.openxmlformats.org/officeDocument/2006/relationships">
   <p:cSld>
+    <p:bg>
+      <p:bgPr>
+        <a:solidFill>
+          <a:srgbClr val="FFFFFF"/>
+        </a:solidFill>
+        <a:effectLst/>
+      </p:bgPr>
+    </p:bg>
     <p:spTree>
       <p:nvGrpSpPr>
         <p:cNvPr id="1" name=""/>
@@ -4350,45 +7381,392 @@
       <p:grpSpPr/>
       <p:sp>
         <p:nvSpPr>
-          <p:cNvPr id="2" name="Title 1"/>
-          <p:cNvSpPr>
-            <a:spLocks noGrp="1"/>
-          </p:cNvSpPr>
-          <p:nvPr>
-            <p:ph type="title"/>
-          </p:nvPr>
-        </p:nvSpPr>
-        <p:spPr/>
-        <p:txBody>
-          <a:bodyPr/>
-          <a:lstStyle/>
-          <a:p>
-            <a:r>
-              <a:t>2. 결과 — '2 시그마' 효과</a:t>
-            </a:r>
-          </a:p>
-        </p:txBody>
-      </p:sp>
-      <p:sp>
-        <p:nvSpPr>
-          <p:cNvPr id="3" name="Content Placeholder 2"/>
-          <p:cNvSpPr>
-            <a:spLocks noGrp="1"/>
-          </p:cNvSpPr>
-          <p:nvPr>
-            <p:ph idx="1"/>
-          </p:nvPr>
-        </p:nvSpPr>
-        <p:spPr/>
-        <p:txBody>
-          <a:bodyPr/>
-          <a:lstStyle/>
-          <a:p>
-            <a:pPr>
-              <a:defRPr sz="1600"/>
+          <p:cNvPr id="2" name="Rectangle 1"/>
+          <p:cNvSpPr/>
+          <p:nvPr/>
+        </p:nvSpPr>
+        <p:spPr>
+          <a:xfrm>
+            <a:off x="0" y="0"/>
+            <a:ext cx="12191695" cy="146304"/>
+          </a:xfrm>
+          <a:prstGeom prst="rect">
+            <a:avLst/>
+          </a:prstGeom>
+          <a:solidFill>
+            <a:srgbClr val="1CC5B0"/>
+          </a:solidFill>
+          <a:ln>
+            <a:noFill/>
+          </a:ln>
+          <a:effectLst/>
+        </p:spPr>
+        <p:style>
+          <a:lnRef idx="1">
+            <a:schemeClr val="accent1"/>
+          </a:lnRef>
+          <a:fillRef idx="3">
+            <a:schemeClr val="accent1"/>
+          </a:fillRef>
+          <a:effectRef idx="2">
+            <a:schemeClr val="accent1"/>
+          </a:effectRef>
+          <a:fontRef idx="minor">
+            <a:schemeClr val="lt1"/>
+          </a:fontRef>
+        </p:style>
+        <p:txBody>
+          <a:bodyPr rtlCol="0" anchor="ctr"/>
+          <a:lstStyle/>
+          <a:p>
+            <a:pPr algn="ctr"/>
+          </a:p>
+        </p:txBody>
+      </p:sp>
+      <p:sp>
+        <p:nvSpPr>
+          <p:cNvPr id="3" name="TextBox 2"/>
+          <p:cNvSpPr txBox="1"/>
+          <p:nvPr/>
+        </p:nvSpPr>
+        <p:spPr>
+          <a:xfrm>
+            <a:off x="777240" y="384048"/>
+            <a:ext cx="10637215" cy="365760"/>
+          </a:xfrm>
+          <a:prstGeom prst="rect">
+            <a:avLst/>
+          </a:prstGeom>
+          <a:noFill/>
+        </p:spPr>
+        <p:txBody>
+          <a:bodyPr wrap="square" anchor="t" lIns="0" rIns="0" tIns="0" bIns="0">
+            <a:spAutoFit/>
+          </a:bodyPr>
+          <a:lstStyle/>
+          <a:p>
+            <a:pPr algn="l">
+              <a:spcBef>
+                <a:spcPts val="0"/>
+              </a:spcBef>
+              <a:spcAft>
+                <a:spcPts val="0"/>
+              </a:spcAft>
             </a:pPr>
             <a:r>
-              <a:t>표준편차(σ, 시그마)를 기준으로 전통 수업 학급과 비교한 결과:</a:t>
+              <a:rPr sz="1300" b="1" i="0">
+                <a:solidFill>
+                  <a:srgbClr val="1CC5B0"/>
+                </a:solidFill>
+                <a:latin typeface="맑은 고딕"/>
+                <a:ea typeface="맑은 고딕"/>
+                <a:cs typeface="맑은 고딕"/>
+              </a:rPr>
+              <a:t>핵심 메시지</a:t>
+            </a:r>
+          </a:p>
+        </p:txBody>
+      </p:sp>
+      <p:sp>
+        <p:nvSpPr>
+          <p:cNvPr id="4" name="TextBox 3"/>
+          <p:cNvSpPr txBox="1"/>
+          <p:nvPr/>
+        </p:nvSpPr>
+        <p:spPr>
+          <a:xfrm>
+            <a:off x="777240" y="713232"/>
+            <a:ext cx="10637215" cy="914400"/>
+          </a:xfrm>
+          <a:prstGeom prst="rect">
+            <a:avLst/>
+          </a:prstGeom>
+          <a:noFill/>
+        </p:spPr>
+        <p:txBody>
+          <a:bodyPr wrap="square" anchor="t" lIns="0" rIns="0" tIns="0" bIns="0">
+            <a:spAutoFit/>
+          </a:bodyPr>
+          <a:lstStyle/>
+          <a:p>
+            <a:pPr algn="l">
+              <a:spcBef>
+                <a:spcPts val="0"/>
+              </a:spcBef>
+              <a:spcAft>
+                <a:spcPts val="0"/>
+              </a:spcAft>
+            </a:pPr>
+            <a:r>
+              <a:rPr sz="2900" b="1" i="0">
+                <a:solidFill>
+                  <a:srgbClr val="0F2A44"/>
+                </a:solidFill>
+                <a:latin typeface="맑은 고딕"/>
+                <a:ea typeface="맑은 고딕"/>
+                <a:cs typeface="맑은 고딕"/>
+              </a:rPr>
+              <a:t>무엇을 뜻하는가</a:t>
+            </a:r>
+          </a:p>
+        </p:txBody>
+      </p:sp>
+      <p:sp>
+        <p:nvSpPr>
+          <p:cNvPr id="5" name="Rectangle 4"/>
+          <p:cNvSpPr/>
+          <p:nvPr/>
+        </p:nvSpPr>
+        <p:spPr>
+          <a:xfrm>
+            <a:off x="777240" y="1481328"/>
+            <a:ext cx="1920240" cy="50292"/>
+          </a:xfrm>
+          <a:prstGeom prst="rect">
+            <a:avLst/>
+          </a:prstGeom>
+          <a:solidFill>
+            <a:srgbClr val="1CC5B0"/>
+          </a:solidFill>
+          <a:ln>
+            <a:noFill/>
+          </a:ln>
+          <a:effectLst/>
+        </p:spPr>
+        <p:style>
+          <a:lnRef idx="1">
+            <a:schemeClr val="accent1"/>
+          </a:lnRef>
+          <a:fillRef idx="3">
+            <a:schemeClr val="accent1"/>
+          </a:fillRef>
+          <a:effectRef idx="2">
+            <a:schemeClr val="accent1"/>
+          </a:effectRef>
+          <a:fontRef idx="minor">
+            <a:schemeClr val="lt1"/>
+          </a:fontRef>
+        </p:style>
+        <p:txBody>
+          <a:bodyPr rtlCol="0" anchor="ctr"/>
+          <a:lstStyle/>
+          <a:p>
+            <a:pPr algn="ctr"/>
+          </a:p>
+        </p:txBody>
+      </p:sp>
+      <p:sp>
+        <p:nvSpPr>
+          <p:cNvPr id="6" name="TextBox 5"/>
+          <p:cNvSpPr txBox="1"/>
+          <p:nvPr/>
+        </p:nvSpPr>
+        <p:spPr>
+          <a:xfrm>
+            <a:off x="777240" y="1828800"/>
+            <a:ext cx="10637215" cy="4297680"/>
+          </a:xfrm>
+          <a:prstGeom prst="rect">
+            <a:avLst/>
+          </a:prstGeom>
+          <a:noFill/>
+        </p:spPr>
+        <p:txBody>
+          <a:bodyPr wrap="square" anchor="t" lIns="0" rIns="0" tIns="0" bIns="0">
+            <a:spAutoFit/>
+          </a:bodyPr>
+          <a:lstStyle/>
+          <a:p>
+            <a:pPr algn="l">
+              <a:lnSpc>
+                <a:spcPct val="116000"/>
+              </a:lnSpc>
+              <a:spcBef>
+                <a:spcPts val="0"/>
+              </a:spcBef>
+              <a:spcAft>
+                <a:spcPts val="1100"/>
+              </a:spcAft>
+            </a:pPr>
+            <a:r>
+              <a:rPr sz="1300" b="1" i="0">
+                <a:solidFill>
+                  <a:srgbClr val="1CC5B0"/>
+                </a:solidFill>
+                <a:latin typeface="맑은 고딕"/>
+                <a:ea typeface="맑은 고딕"/>
+                <a:cs typeface="맑은 고딕"/>
+              </a:rPr>
+              <a:t>●  </a:t>
+            </a:r>
+            <a:r>
+              <a:rPr sz="1850" b="0" i="0">
+                <a:solidFill>
+                  <a:srgbClr val="1B2A38"/>
+                </a:solidFill>
+                <a:latin typeface="맑은 고딕"/>
+                <a:ea typeface="맑은 고딕"/>
+                <a:cs typeface="맑은 고딕"/>
+              </a:rPr>
+              <a:t>타고난 적성보다 ‘학습 조건’이 성취를 결정한다 (적성–성취 상관 +.60 → +.25)</a:t>
+            </a:r>
+          </a:p>
+          <a:p>
+            <a:pPr algn="l">
+              <a:lnSpc>
+                <a:spcPct val="116000"/>
+              </a:lnSpc>
+              <a:spcBef>
+                <a:spcPts val="0"/>
+              </a:spcBef>
+              <a:spcAft>
+                <a:spcPts val="1100"/>
+              </a:spcAft>
+            </a:pPr>
+            <a:r>
+              <a:rPr sz="1300" b="1" i="0">
+                <a:solidFill>
+                  <a:srgbClr val="1CC5B0"/>
+                </a:solidFill>
+                <a:latin typeface="맑은 고딕"/>
+                <a:ea typeface="맑은 고딕"/>
+                <a:cs typeface="맑은 고딕"/>
+              </a:rPr>
+              <a:t>●  </a:t>
+            </a:r>
+            <a:r>
+              <a:rPr sz="1850" b="0" i="0">
+                <a:solidFill>
+                  <a:srgbClr val="1B2A38"/>
+                </a:solidFill>
+                <a:latin typeface="맑은 고딕"/>
+                <a:ea typeface="맑은 고딕"/>
+                <a:cs typeface="맑은 고딕"/>
+              </a:rPr>
+              <a:t>대부분의 학생이 높은 수준에 도달할 잠재력을 가지고 있다 — 블룸</a:t>
+            </a:r>
+          </a:p>
+          <a:p>
+            <a:pPr algn="l">
+              <a:lnSpc>
+                <a:spcPct val="116000"/>
+              </a:lnSpc>
+              <a:spcBef>
+                <a:spcPts val="0"/>
+              </a:spcBef>
+              <a:spcAft>
+                <a:spcPts val="1100"/>
+              </a:spcAft>
+            </a:pPr>
+            <a:r>
+              <a:rPr sz="1300" b="1" i="0">
+                <a:solidFill>
+                  <a:srgbClr val="1CC5B0"/>
+                </a:solidFill>
+                <a:latin typeface="맑은 고딕"/>
+                <a:ea typeface="맑은 고딕"/>
+                <a:cs typeface="맑은 고딕"/>
+              </a:rPr>
+              <a:t>●  </a:t>
+            </a:r>
+            <a:r>
+              <a:rPr sz="1850" b="0" i="0">
+                <a:solidFill>
+                  <a:srgbClr val="1B2A38"/>
+                </a:solidFill>
+                <a:latin typeface="맑은 고딕"/>
+                <a:ea typeface="맑은 고딕"/>
+                <a:cs typeface="맑은 고딕"/>
+              </a:rPr>
+              <a:t>핵심 과제: 1:1 교습에 근접하면서도 대규모로 가능한 방법을 찾는 것</a:t>
+            </a:r>
+          </a:p>
+        </p:txBody>
+      </p:sp>
+      <p:sp>
+        <p:nvSpPr>
+          <p:cNvPr id="7" name="TextBox 6"/>
+          <p:cNvSpPr txBox="1"/>
+          <p:nvPr/>
+        </p:nvSpPr>
+        <p:spPr>
+          <a:xfrm>
+            <a:off x="777240" y="6419088"/>
+            <a:ext cx="8229600" cy="320040"/>
+          </a:xfrm>
+          <a:prstGeom prst="rect">
+            <a:avLst/>
+          </a:prstGeom>
+          <a:noFill/>
+        </p:spPr>
+        <p:txBody>
+          <a:bodyPr wrap="square" anchor="t" lIns="0" rIns="0" tIns="0" bIns="0">
+            <a:spAutoFit/>
+          </a:bodyPr>
+          <a:lstStyle/>
+          <a:p>
+            <a:pPr algn="l">
+              <a:spcBef>
+                <a:spcPts val="0"/>
+              </a:spcBef>
+              <a:spcAft>
+                <a:spcPts val="0"/>
+              </a:spcAft>
+            </a:pPr>
+            <a:r>
+              <a:rPr sz="1050" b="0" i="0">
+                <a:solidFill>
+                  <a:srgbClr val="6E7B8A"/>
+                </a:solidFill>
+                <a:latin typeface="맑은 고딕"/>
+                <a:ea typeface="맑은 고딕"/>
+                <a:cs typeface="맑은 고딕"/>
+              </a:rPr>
+              <a:t>블룸 2σ · 초개별화 맞춤형 교육</a:t>
+            </a:r>
+          </a:p>
+        </p:txBody>
+      </p:sp>
+      <p:sp>
+        <p:nvSpPr>
+          <p:cNvPr id="8" name="TextBox 7"/>
+          <p:cNvSpPr txBox="1"/>
+          <p:nvPr/>
+        </p:nvSpPr>
+        <p:spPr>
+          <a:xfrm>
+            <a:off x="10607040" y="6419088"/>
+            <a:ext cx="822960" cy="320040"/>
+          </a:xfrm>
+          <a:prstGeom prst="rect">
+            <a:avLst/>
+          </a:prstGeom>
+          <a:noFill/>
+        </p:spPr>
+        <p:txBody>
+          <a:bodyPr wrap="square" anchor="t" lIns="0" rIns="0" tIns="0" bIns="0">
+            <a:spAutoFit/>
+          </a:bodyPr>
+          <a:lstStyle/>
+          <a:p>
+            <a:pPr algn="r">
+              <a:spcBef>
+                <a:spcPts val="0"/>
+              </a:spcBef>
+              <a:spcAft>
+                <a:spcPts val="0"/>
+              </a:spcAft>
+            </a:pPr>
+            <a:r>
+              <a:rPr sz="1050" b="0" i="0">
+                <a:solidFill>
+                  <a:srgbClr val="6E7B8A"/>
+                </a:solidFill>
+                <a:latin typeface="맑은 고딕"/>
+                <a:ea typeface="맑은 고딕"/>
+                <a:cs typeface="맑은 고딕"/>
+              </a:rPr>
+              <a:t>3</a:t>
             </a:r>
           </a:p>
         </p:txBody>
@@ -4404,6 +7782,14 @@
 <file path=ppt/slides/slide7.xml><?xml version="1.0" encoding="utf-8"?>
 <p:sld xmlns:a="http://schemas.openxmlformats.org/drawingml/2006/main" xmlns:p="http://schemas.openxmlformats.org/presentationml/2006/main" xmlns:r="http://schemas.openxmlformats.org/officeDocument/2006/relationships">
   <p:cSld>
+    <p:bg>
+      <p:bgPr>
+        <a:solidFill>
+          <a:srgbClr val="F3F6FA"/>
+        </a:solidFill>
+        <a:effectLst/>
+      </p:bgPr>
+    </p:bg>
     <p:spTree>
       <p:nvGrpSpPr>
         <p:cNvPr id="1" name=""/>
@@ -4413,193 +7799,183 @@
       <p:grpSpPr/>
       <p:sp>
         <p:nvSpPr>
-          <p:cNvPr id="2" name="Title 1"/>
-          <p:cNvSpPr>
-            <a:spLocks noGrp="1"/>
-          </p:cNvSpPr>
-          <p:nvPr>
-            <p:ph type="title"/>
-          </p:nvPr>
-        </p:nvSpPr>
-        <p:spPr/>
-        <p:txBody>
-          <a:bodyPr/>
-          <a:lstStyle/>
-          <a:p>
-            <a:r>
-              <a:t>2. 결과 — '2 시그마' 효과</a:t>
-            </a:r>
-          </a:p>
-        </p:txBody>
-      </p:sp>
-      <p:graphicFrame>
-        <p:nvGraphicFramePr>
-          <p:cNvPr id="3" name="Table 2"/>
-          <p:cNvGraphicFramePr>
-            <a:graphicFrameLocks noGrp="1"/>
-          </p:cNvGraphicFramePr>
+          <p:cNvPr id="2" name="Rectangle 1"/>
+          <p:cNvSpPr/>
           <p:nvPr/>
-        </p:nvGraphicFramePr>
-        <p:xfrm>
-          <a:off x="365760" y="1188720"/>
-          <a:ext cx="8412480" cy="1097280"/>
-        </p:xfrm>
-        <a:graphic>
-          <a:graphicData uri="http://schemas.openxmlformats.org/drawingml/2006/table">
-            <a:tbl>
-              <a:tblPr firstRow="1" bandRow="1">
-                <a:tableStyleId>{5C22544A-7EE6-4342-B048-85BDC9FD1C3A}</a:tableStyleId>
-              </a:tblPr>
-              <a:tblGrid>
-                <a:gridCol w="2804160"/>
-                <a:gridCol w="2804160"/>
-                <a:gridCol w="2804160"/>
-              </a:tblGrid>
-              <a:tr h="365760">
-                <a:tc>
-                  <a:txBody>
-                    <a:bodyPr/>
-                    <a:lstStyle/>
-                    <a:p>
-                      <a:pPr>
-                        <a:defRPr sz="1100" b="1"/>
-                      </a:pPr>
-                      <a:r>
-                        <a:t>조건</a:t>
-                      </a:r>
-                    </a:p>
-                  </a:txBody>
-                  <a:tcPr/>
-                </a:tc>
-                <a:tc>
-                  <a:txBody>
-                    <a:bodyPr/>
-                    <a:lstStyle/>
-                    <a:p>
-                      <a:pPr>
-                        <a:defRPr sz="1100" b="1"/>
-                      </a:pPr>
-                      <a:r>
-                        <a:t>향상 정도</a:t>
-                      </a:r>
-                    </a:p>
-                  </a:txBody>
-                  <a:tcPr/>
-                </a:tc>
-                <a:tc>
-                  <a:txBody>
-                    <a:bodyPr/>
-                    <a:lstStyle/>
-                    <a:p>
-                      <a:pPr>
-                        <a:defRPr sz="1100" b="1"/>
-                      </a:pPr>
-                      <a:r>
-                        <a:t>전통 수업 대비 위치</a:t>
-                      </a:r>
-                    </a:p>
-                  </a:txBody>
-                  <a:tcPr/>
-                </a:tc>
-              </a:tr>
-              <a:tr h="365760">
-                <a:tc>
-                  <a:txBody>
-                    <a:bodyPr/>
-                    <a:lstStyle/>
-                    <a:p>
-                      <a:pPr>
-                        <a:defRPr sz="1100"/>
-                      </a:pPr>
-                      <a:r>
-                        <a:t>개인교습(③)</a:t>
-                      </a:r>
-                    </a:p>
-                  </a:txBody>
-                  <a:tcPr/>
-                </a:tc>
-                <a:tc>
-                  <a:txBody>
-                    <a:bodyPr/>
-                    <a:lstStyle/>
-                    <a:p>
-                      <a:pPr>
-                        <a:defRPr sz="1100"/>
-                      </a:pPr>
-                      <a:r>
-                        <a:t>약 +2σ</a:t>
-                      </a:r>
-                    </a:p>
-                  </a:txBody>
-                  <a:tcPr/>
-                </a:tc>
-                <a:tc>
-                  <a:txBody>
-                    <a:bodyPr/>
-                    <a:lstStyle/>
-                    <a:p>
-                      <a:pPr>
-                        <a:defRPr sz="1100"/>
-                      </a:pPr>
-                      <a:r>
-                        <a:t>평균 학생이 전통 수업 학생의 상위 98% 수준</a:t>
-                      </a:r>
-                    </a:p>
-                  </a:txBody>
-                  <a:tcPr/>
-                </a:tc>
-              </a:tr>
-              <a:tr h="365760">
-                <a:tc>
-                  <a:txBody>
-                    <a:bodyPr/>
-                    <a:lstStyle/>
-                    <a:p>
-                      <a:pPr>
-                        <a:defRPr sz="1100"/>
-                      </a:pPr>
-                      <a:r>
-                        <a:t>완전학습(②)</a:t>
-                      </a:r>
-                    </a:p>
-                  </a:txBody>
-                  <a:tcPr/>
-                </a:tc>
-                <a:tc>
-                  <a:txBody>
-                    <a:bodyPr/>
-                    <a:lstStyle/>
-                    <a:p>
-                      <a:pPr>
-                        <a:defRPr sz="1100"/>
-                      </a:pPr>
-                      <a:r>
-                        <a:t>약 +1σ</a:t>
-                      </a:r>
-                    </a:p>
-                  </a:txBody>
-                  <a:tcPr/>
-                </a:tc>
-                <a:tc>
-                  <a:txBody>
-                    <a:bodyPr/>
-                    <a:lstStyle/>
-                    <a:p>
-                      <a:pPr>
-                        <a:defRPr sz="1100"/>
-                      </a:pPr>
-                      <a:r>
-                        <a:t>평균 학생이 전통 수업 학생의 상위 84% 수준</a:t>
-                      </a:r>
-                    </a:p>
-                  </a:txBody>
-                  <a:tcPr/>
-                </a:tc>
-              </a:tr>
-            </a:tbl>
-          </a:graphicData>
-        </a:graphic>
-      </p:graphicFrame>
+        </p:nvSpPr>
+        <p:spPr>
+          <a:xfrm>
+            <a:off x="0" y="0"/>
+            <a:ext cx="201168" cy="6858000"/>
+          </a:xfrm>
+          <a:prstGeom prst="rect">
+            <a:avLst/>
+          </a:prstGeom>
+          <a:solidFill>
+            <a:srgbClr val="1CC5B0"/>
+          </a:solidFill>
+          <a:ln>
+            <a:noFill/>
+          </a:ln>
+          <a:effectLst/>
+        </p:spPr>
+        <p:style>
+          <a:lnRef idx="1">
+            <a:schemeClr val="accent1"/>
+          </a:lnRef>
+          <a:fillRef idx="3">
+            <a:schemeClr val="accent1"/>
+          </a:fillRef>
+          <a:effectRef idx="2">
+            <a:schemeClr val="accent1"/>
+          </a:effectRef>
+          <a:fontRef idx="minor">
+            <a:schemeClr val="lt1"/>
+          </a:fontRef>
+        </p:style>
+        <p:txBody>
+          <a:bodyPr rtlCol="0" anchor="ctr"/>
+          <a:lstStyle/>
+          <a:p>
+            <a:pPr algn="ctr"/>
+          </a:p>
+        </p:txBody>
+      </p:sp>
+      <p:sp>
+        <p:nvSpPr>
+          <p:cNvPr id="3" name="TextBox 2"/>
+          <p:cNvSpPr txBox="1"/>
+          <p:nvPr/>
+        </p:nvSpPr>
+        <p:spPr>
+          <a:xfrm>
+            <a:off x="777240" y="640080"/>
+            <a:ext cx="2743200" cy="1463040"/>
+          </a:xfrm>
+          <a:prstGeom prst="rect">
+            <a:avLst/>
+          </a:prstGeom>
+          <a:noFill/>
+        </p:spPr>
+        <p:txBody>
+          <a:bodyPr wrap="square" anchor="t" lIns="0" rIns="0" tIns="0" bIns="0">
+            <a:spAutoFit/>
+          </a:bodyPr>
+          <a:lstStyle/>
+          <a:p>
+            <a:pPr algn="l">
+              <a:spcBef>
+                <a:spcPts val="0"/>
+              </a:spcBef>
+              <a:spcAft>
+                <a:spcPts val="0"/>
+              </a:spcAft>
+            </a:pPr>
+            <a:r>
+              <a:rPr sz="13000" b="1" i="0">
+                <a:solidFill>
+                  <a:srgbClr val="1CC5B0"/>
+                </a:solidFill>
+                <a:latin typeface="맑은 고딕"/>
+                <a:ea typeface="맑은 고딕"/>
+                <a:cs typeface="맑은 고딕"/>
+              </a:rPr>
+              <a:t>“</a:t>
+            </a:r>
+          </a:p>
+        </p:txBody>
+      </p:sp>
+      <p:sp>
+        <p:nvSpPr>
+          <p:cNvPr id="4" name="TextBox 3"/>
+          <p:cNvSpPr txBox="1"/>
+          <p:nvPr/>
+        </p:nvSpPr>
+        <p:spPr>
+          <a:xfrm>
+            <a:off x="1280160" y="1920240"/>
+            <a:ext cx="9692640" cy="3108960"/>
+          </a:xfrm>
+          <a:prstGeom prst="rect">
+            <a:avLst/>
+          </a:prstGeom>
+          <a:noFill/>
+        </p:spPr>
+        <p:txBody>
+          <a:bodyPr wrap="square" anchor="t" lIns="0" rIns="0" tIns="0" bIns="0">
+            <a:spAutoFit/>
+          </a:bodyPr>
+          <a:lstStyle/>
+          <a:p>
+            <a:pPr algn="l">
+              <a:lnSpc>
+                <a:spcPct val="135000"/>
+              </a:lnSpc>
+              <a:spcBef>
+                <a:spcPts val="0"/>
+              </a:spcBef>
+              <a:spcAft>
+                <a:spcPts val="0"/>
+              </a:spcAft>
+            </a:pPr>
+            <a:r>
+              <a:rPr sz="2700" b="1" i="0">
+                <a:solidFill>
+                  <a:srgbClr val="1B2A38"/>
+                </a:solidFill>
+                <a:latin typeface="맑은 고딕"/>
+                <a:ea typeface="맑은 고딕"/>
+                <a:cs typeface="맑은 고딕"/>
+              </a:rPr>
+              <a:t>일대일 개인교습에 근접한 효과를 내면서도, 대규모로 실현 가능한 집단 교수·학습 조건을 찾을 수 있는가?</a:t>
+            </a:r>
+          </a:p>
+        </p:txBody>
+      </p:sp>
+      <p:sp>
+        <p:nvSpPr>
+          <p:cNvPr id="5" name="TextBox 4"/>
+          <p:cNvSpPr txBox="1"/>
+          <p:nvPr/>
+        </p:nvSpPr>
+        <p:spPr>
+          <a:xfrm>
+            <a:off x="1280160" y="5120640"/>
+            <a:ext cx="9692640" cy="731520"/>
+          </a:xfrm>
+          <a:prstGeom prst="rect">
+            <a:avLst/>
+          </a:prstGeom>
+          <a:noFill/>
+        </p:spPr>
+        <p:txBody>
+          <a:bodyPr wrap="square" anchor="t" lIns="0" rIns="0" tIns="0" bIns="0">
+            <a:spAutoFit/>
+          </a:bodyPr>
+          <a:lstStyle/>
+          <a:p>
+            <a:pPr algn="l">
+              <a:spcBef>
+                <a:spcPts val="0"/>
+              </a:spcBef>
+              <a:spcAft>
+                <a:spcPts val="0"/>
+              </a:spcAft>
+            </a:pPr>
+            <a:r>
+              <a:rPr sz="1700" b="0" i="0">
+                <a:solidFill>
+                  <a:srgbClr val="6E7B8A"/>
+                </a:solidFill>
+                <a:latin typeface="맑은 고딕"/>
+                <a:ea typeface="맑은 고딕"/>
+                <a:cs typeface="맑은 고딕"/>
+              </a:rPr>
+              <a:t>— Benjamin Bloom, ‘The 2 Sigma Problem’ (1984)</a:t>
+            </a:r>
+          </a:p>
+        </p:txBody>
+      </p:sp>
     </p:spTree>
   </p:cSld>
   <p:clrMapOvr>
@@ -4611,6 +7987,14 @@
 <file path=ppt/slides/slide8.xml><?xml version="1.0" encoding="utf-8"?>
 <p:sld xmlns:a="http://schemas.openxmlformats.org/drawingml/2006/main" xmlns:p="http://schemas.openxmlformats.org/presentationml/2006/main" xmlns:r="http://schemas.openxmlformats.org/officeDocument/2006/relationships">
   <p:cSld>
+    <p:bg>
+      <p:bgPr>
+        <a:solidFill>
+          <a:srgbClr val="0F2A44"/>
+        </a:solidFill>
+        <a:effectLst/>
+      </p:bgPr>
+    </p:bg>
     <p:spTree>
       <p:nvGrpSpPr>
         <p:cNvPr id="1" name=""/>
@@ -4620,45 +8004,135 @@
       <p:grpSpPr/>
       <p:sp>
         <p:nvSpPr>
-          <p:cNvPr id="2" name="Title 1"/>
-          <p:cNvSpPr>
-            <a:spLocks noGrp="1"/>
-          </p:cNvSpPr>
-          <p:nvPr>
-            <p:ph type="title"/>
-          </p:nvPr>
-        </p:nvSpPr>
-        <p:spPr/>
-        <p:txBody>
-          <a:bodyPr/>
-          <a:lstStyle/>
-          <a:p>
-            <a:r>
-              <a:t>2. 결과 — '2 시그마' 효과</a:t>
-            </a:r>
-          </a:p>
-        </p:txBody>
-      </p:sp>
-      <p:sp>
-        <p:nvSpPr>
-          <p:cNvPr id="3" name="Content Placeholder 2"/>
-          <p:cNvSpPr>
-            <a:spLocks noGrp="1"/>
-          </p:cNvSpPr>
-          <p:nvPr>
-            <p:ph idx="1"/>
-          </p:nvPr>
-        </p:nvSpPr>
-        <p:spPr/>
-        <p:txBody>
-          <a:bodyPr/>
-          <a:lstStyle/>
-          <a:p>
-            <a:pPr>
-              <a:defRPr sz="1600"/>
+          <p:cNvPr id="2" name="Rectangle 1"/>
+          <p:cNvSpPr/>
+          <p:nvPr/>
+        </p:nvSpPr>
+        <p:spPr>
+          <a:xfrm>
+            <a:off x="0" y="2743200"/>
+            <a:ext cx="2011680" cy="73152"/>
+          </a:xfrm>
+          <a:prstGeom prst="rect">
+            <a:avLst/>
+          </a:prstGeom>
+          <a:solidFill>
+            <a:srgbClr val="1CC5B0"/>
+          </a:solidFill>
+          <a:ln>
+            <a:noFill/>
+          </a:ln>
+          <a:effectLst/>
+        </p:spPr>
+        <p:style>
+          <a:lnRef idx="1">
+            <a:schemeClr val="accent1"/>
+          </a:lnRef>
+          <a:fillRef idx="3">
+            <a:schemeClr val="accent1"/>
+          </a:fillRef>
+          <a:effectRef idx="2">
+            <a:schemeClr val="accent1"/>
+          </a:effectRef>
+          <a:fontRef idx="minor">
+            <a:schemeClr val="lt1"/>
+          </a:fontRef>
+        </p:style>
+        <p:txBody>
+          <a:bodyPr rtlCol="0" anchor="ctr"/>
+          <a:lstStyle/>
+          <a:p>
+            <a:pPr algn="ctr"/>
+          </a:p>
+        </p:txBody>
+      </p:sp>
+      <p:sp>
+        <p:nvSpPr>
+          <p:cNvPr id="3" name="TextBox 2"/>
+          <p:cNvSpPr txBox="1"/>
+          <p:nvPr/>
+        </p:nvSpPr>
+        <p:spPr>
+          <a:xfrm>
+            <a:off x="777240" y="1371600"/>
+            <a:ext cx="10637215" cy="1371600"/>
+          </a:xfrm>
+          <a:prstGeom prst="rect">
+            <a:avLst/>
+          </a:prstGeom>
+          <a:noFill/>
+        </p:spPr>
+        <p:txBody>
+          <a:bodyPr wrap="square" anchor="t" lIns="0" rIns="0" tIns="0" bIns="0">
+            <a:spAutoFit/>
+          </a:bodyPr>
+          <a:lstStyle/>
+          <a:p>
+            <a:pPr algn="l">
+              <a:spcBef>
+                <a:spcPts val="0"/>
+              </a:spcBef>
+              <a:spcAft>
+                <a:spcPts val="0"/>
+              </a:spcAft>
             </a:pPr>
             <a:r>
-              <a:t>도달률 전환: 전통 수업에서 상위 20%만 도달하던 성취 수준을, 개인교습에서는 90%, 완전학습에서는 70%의 학생이 도달했다.</a:t>
+              <a:rPr sz="8400" b="1" i="0">
+                <a:solidFill>
+                  <a:srgbClr val="1CC5B0"/>
+                </a:solidFill>
+                <a:latin typeface="맑은 고딕"/>
+                <a:ea typeface="맑은 고딕"/>
+                <a:cs typeface="맑은 고딕"/>
+              </a:rPr>
+              <a:t>02</a:t>
+            </a:r>
+          </a:p>
+        </p:txBody>
+      </p:sp>
+      <p:sp>
+        <p:nvSpPr>
+          <p:cNvPr id="4" name="TextBox 3"/>
+          <p:cNvSpPr txBox="1"/>
+          <p:nvPr/>
+        </p:nvSpPr>
+        <p:spPr>
+          <a:xfrm>
+            <a:off x="777240" y="2971800"/>
+            <a:ext cx="10058400" cy="1828800"/>
+          </a:xfrm>
+          <a:prstGeom prst="rect">
+            <a:avLst/>
+          </a:prstGeom>
+          <a:noFill/>
+        </p:spPr>
+        <p:txBody>
+          <a:bodyPr wrap="square" anchor="t" lIns="0" rIns="0" tIns="0" bIns="0">
+            <a:spAutoFit/>
+          </a:bodyPr>
+          <a:lstStyle/>
+          <a:p>
+            <a:pPr algn="l">
+              <a:lnSpc>
+                <a:spcPct val="110000"/>
+              </a:lnSpc>
+              <a:spcBef>
+                <a:spcPts val="0"/>
+              </a:spcBef>
+              <a:spcAft>
+                <a:spcPts val="0"/>
+              </a:spcAft>
+            </a:pPr>
+            <a:r>
+              <a:rPr sz="4000" b="1" i="0">
+                <a:solidFill>
+                  <a:srgbClr val="FFFFFF"/>
+                </a:solidFill>
+                <a:latin typeface="맑은 고딕"/>
+                <a:ea typeface="맑은 고딕"/>
+                <a:cs typeface="맑은 고딕"/>
+              </a:rPr>
+              <a:t>해법 — AI, 고전에서 실증으로</a:t>
             </a:r>
           </a:p>
         </p:txBody>
@@ -4674,6 +8148,14 @@
 <file path=ppt/slides/slide9.xml><?xml version="1.0" encoding="utf-8"?>
 <p:sld xmlns:a="http://schemas.openxmlformats.org/drawingml/2006/main" xmlns:p="http://schemas.openxmlformats.org/presentationml/2006/main" xmlns:r="http://schemas.openxmlformats.org/officeDocument/2006/relationships">
   <p:cSld>
+    <p:bg>
+      <p:bgPr>
+        <a:solidFill>
+          <a:srgbClr val="FFFFFF"/>
+        </a:solidFill>
+        <a:effectLst/>
+      </p:bgPr>
+    </p:bg>
     <p:spTree>
       <p:nvGrpSpPr>
         <p:cNvPr id="1" name=""/>
@@ -4683,61 +8165,392 @@
       <p:grpSpPr/>
       <p:sp>
         <p:nvSpPr>
-          <p:cNvPr id="2" name="Title 1"/>
-          <p:cNvSpPr>
-            <a:spLocks noGrp="1"/>
-          </p:cNvSpPr>
-          <p:nvPr>
-            <p:ph type="title"/>
-          </p:nvPr>
-        </p:nvSpPr>
-        <p:spPr/>
-        <p:txBody>
-          <a:bodyPr/>
-          <a:lstStyle/>
-          <a:p>
-            <a:r>
-              <a:t>3. 부수 효과</a:t>
-            </a:r>
-          </a:p>
-        </p:txBody>
-      </p:sp>
-      <p:sp>
-        <p:nvSpPr>
-          <p:cNvPr id="3" name="Content Placeholder 2"/>
-          <p:cNvSpPr>
-            <a:spLocks noGrp="1"/>
-          </p:cNvSpPr>
-          <p:nvPr>
-            <p:ph idx="1"/>
-          </p:nvPr>
-        </p:nvSpPr>
-        <p:spPr/>
-        <p:txBody>
-          <a:bodyPr/>
-          <a:lstStyle/>
-          <a:p>
-            <a:pPr>
-              <a:defRPr sz="1600"/>
+          <p:cNvPr id="2" name="Rectangle 1"/>
+          <p:cNvSpPr/>
+          <p:nvPr/>
+        </p:nvSpPr>
+        <p:spPr>
+          <a:xfrm>
+            <a:off x="0" y="0"/>
+            <a:ext cx="12191695" cy="146304"/>
+          </a:xfrm>
+          <a:prstGeom prst="rect">
+            <a:avLst/>
+          </a:prstGeom>
+          <a:solidFill>
+            <a:srgbClr val="1CC5B0"/>
+          </a:solidFill>
+          <a:ln>
+            <a:noFill/>
+          </a:ln>
+          <a:effectLst/>
+        </p:spPr>
+        <p:style>
+          <a:lnRef idx="1">
+            <a:schemeClr val="accent1"/>
+          </a:lnRef>
+          <a:fillRef idx="3">
+            <a:schemeClr val="accent1"/>
+          </a:fillRef>
+          <a:effectRef idx="2">
+            <a:schemeClr val="accent1"/>
+          </a:effectRef>
+          <a:fontRef idx="minor">
+            <a:schemeClr val="lt1"/>
+          </a:fontRef>
+        </p:style>
+        <p:txBody>
+          <a:bodyPr rtlCol="0" anchor="ctr"/>
+          <a:lstStyle/>
+          <a:p>
+            <a:pPr algn="ctr"/>
+          </a:p>
+        </p:txBody>
+      </p:sp>
+      <p:sp>
+        <p:nvSpPr>
+          <p:cNvPr id="3" name="TextBox 2"/>
+          <p:cNvSpPr txBox="1"/>
+          <p:nvPr/>
+        </p:nvSpPr>
+        <p:spPr>
+          <a:xfrm>
+            <a:off x="777240" y="384048"/>
+            <a:ext cx="10637215" cy="365760"/>
+          </a:xfrm>
+          <a:prstGeom prst="rect">
+            <a:avLst/>
+          </a:prstGeom>
+          <a:noFill/>
+        </p:spPr>
+        <p:txBody>
+          <a:bodyPr wrap="square" anchor="t" lIns="0" rIns="0" tIns="0" bIns="0">
+            <a:spAutoFit/>
+          </a:bodyPr>
+          <a:lstStyle/>
+          <a:p>
+            <a:pPr algn="l">
+              <a:spcBef>
+                <a:spcPts val="0"/>
+              </a:spcBef>
+              <a:spcAft>
+                <a:spcPts val="0"/>
+              </a:spcAft>
             </a:pPr>
             <a:r>
-              <a:t>학습 몰입 시간(time on task): 전통 65% → 완전학습 75% → 개인교습 90% 이상.</a:t>
-            </a:r>
-          </a:p>
-          <a:p>
-            <a:pPr>
-              <a:defRPr sz="1600"/>
+              <a:rPr sz="1300" b="1" i="0">
+                <a:solidFill>
+                  <a:srgbClr val="1CC5B0"/>
+                </a:solidFill>
+                <a:latin typeface="맑은 고딕"/>
+                <a:ea typeface="맑은 고딕"/>
+                <a:cs typeface="맑은 고딕"/>
+              </a:rPr>
+              <a:t>현대적 실증</a:t>
+            </a:r>
+          </a:p>
+        </p:txBody>
+      </p:sp>
+      <p:sp>
+        <p:nvSpPr>
+          <p:cNvPr id="4" name="TextBox 3"/>
+          <p:cNvSpPr txBox="1"/>
+          <p:nvPr/>
+        </p:nvSpPr>
+        <p:spPr>
+          <a:xfrm>
+            <a:off x="777240" y="713232"/>
+            <a:ext cx="10637215" cy="914400"/>
+          </a:xfrm>
+          <a:prstGeom prst="rect">
+            <a:avLst/>
+          </a:prstGeom>
+          <a:noFill/>
+        </p:spPr>
+        <p:txBody>
+          <a:bodyPr wrap="square" anchor="t" lIns="0" rIns="0" tIns="0" bIns="0">
+            <a:spAutoFit/>
+          </a:bodyPr>
+          <a:lstStyle/>
+          <a:p>
+            <a:pPr algn="l">
+              <a:spcBef>
+                <a:spcPts val="0"/>
+              </a:spcBef>
+              <a:spcAft>
+                <a:spcPts val="0"/>
+              </a:spcAft>
             </a:pPr>
             <a:r>
-              <a:t>태도·흥미: 개인교습에서 가장 긍정적, 전통 수업에서 가장 낮음.</a:t>
-            </a:r>
-          </a:p>
-          <a:p>
-            <a:pPr>
-              <a:defRPr sz="1600"/>
+              <a:rPr sz="2900" b="1" i="0">
+                <a:solidFill>
+                  <a:srgbClr val="0F2A44"/>
+                </a:solidFill>
+                <a:latin typeface="맑은 고딕"/>
+                <a:ea typeface="맑은 고딕"/>
+                <a:cs typeface="맑은 고딕"/>
+              </a:rPr>
+              <a:t>① 생성형 AI 이전 — 지능형 튜터링(ITS)</a:t>
+            </a:r>
+          </a:p>
+        </p:txBody>
+      </p:sp>
+      <p:sp>
+        <p:nvSpPr>
+          <p:cNvPr id="5" name="Rectangle 4"/>
+          <p:cNvSpPr/>
+          <p:nvPr/>
+        </p:nvSpPr>
+        <p:spPr>
+          <a:xfrm>
+            <a:off x="777240" y="1481328"/>
+            <a:ext cx="1920240" cy="50292"/>
+          </a:xfrm>
+          <a:prstGeom prst="rect">
+            <a:avLst/>
+          </a:prstGeom>
+          <a:solidFill>
+            <a:srgbClr val="1CC5B0"/>
+          </a:solidFill>
+          <a:ln>
+            <a:noFill/>
+          </a:ln>
+          <a:effectLst/>
+        </p:spPr>
+        <p:style>
+          <a:lnRef idx="1">
+            <a:schemeClr val="accent1"/>
+          </a:lnRef>
+          <a:fillRef idx="3">
+            <a:schemeClr val="accent1"/>
+          </a:fillRef>
+          <a:effectRef idx="2">
+            <a:schemeClr val="accent1"/>
+          </a:effectRef>
+          <a:fontRef idx="minor">
+            <a:schemeClr val="lt1"/>
+          </a:fontRef>
+        </p:style>
+        <p:txBody>
+          <a:bodyPr rtlCol="0" anchor="ctr"/>
+          <a:lstStyle/>
+          <a:p>
+            <a:pPr algn="ctr"/>
+          </a:p>
+        </p:txBody>
+      </p:sp>
+      <p:sp>
+        <p:nvSpPr>
+          <p:cNvPr id="6" name="TextBox 5"/>
+          <p:cNvSpPr txBox="1"/>
+          <p:nvPr/>
+        </p:nvSpPr>
+        <p:spPr>
+          <a:xfrm>
+            <a:off x="777240" y="1828800"/>
+            <a:ext cx="10637215" cy="4297680"/>
+          </a:xfrm>
+          <a:prstGeom prst="rect">
+            <a:avLst/>
+          </a:prstGeom>
+          <a:noFill/>
+        </p:spPr>
+        <p:txBody>
+          <a:bodyPr wrap="square" anchor="t" lIns="0" rIns="0" tIns="0" bIns="0">
+            <a:spAutoFit/>
+          </a:bodyPr>
+          <a:lstStyle/>
+          <a:p>
+            <a:pPr algn="l">
+              <a:lnSpc>
+                <a:spcPct val="116000"/>
+              </a:lnSpc>
+              <a:spcBef>
+                <a:spcPts val="0"/>
+              </a:spcBef>
+              <a:spcAft>
+                <a:spcPts val="1100"/>
+              </a:spcAft>
             </a:pPr>
             <a:r>
-              <a:t>적성–성취 상관 약화: 사전 적성이 결과를 좌우하는 정도가 개인교습에서 크게 줄었다(상관계수 +.60 → 완전학습 +.35 → 개인교습 +.25). 즉 타고난 적성보다 '좋은 학습 조건'이 성취를 결정한다.</a:t>
+              <a:rPr sz="1300" b="1" i="0">
+                <a:solidFill>
+                  <a:srgbClr val="1CC5B0"/>
+                </a:solidFill>
+                <a:latin typeface="맑은 고딕"/>
+                <a:ea typeface="맑은 고딕"/>
+                <a:cs typeface="맑은 고딕"/>
+              </a:rPr>
+              <a:t>●  </a:t>
+            </a:r>
+            <a:r>
+              <a:rPr sz="1850" b="0" i="0">
+                <a:solidFill>
+                  <a:srgbClr val="1B2A38"/>
+                </a:solidFill>
+                <a:latin typeface="맑은 고딕"/>
+                <a:ea typeface="맑은 고딕"/>
+                <a:cs typeface="맑은 고딕"/>
+              </a:rPr>
+              <a:t>VanLehn(2011): 단계형 ITS는 인간 교사에 근접한 효과</a:t>
+            </a:r>
+          </a:p>
+          <a:p>
+            <a:pPr algn="l">
+              <a:lnSpc>
+                <a:spcPct val="116000"/>
+              </a:lnSpc>
+              <a:spcBef>
+                <a:spcPts val="0"/>
+              </a:spcBef>
+              <a:spcAft>
+                <a:spcPts val="1100"/>
+              </a:spcAft>
+            </a:pPr>
+            <a:r>
+              <a:rPr sz="1300" b="1" i="0">
+                <a:solidFill>
+                  <a:srgbClr val="1CC5B0"/>
+                </a:solidFill>
+                <a:latin typeface="맑은 고딕"/>
+                <a:ea typeface="맑은 고딕"/>
+                <a:cs typeface="맑은 고딕"/>
+              </a:rPr>
+              <a:t>●  </a:t>
+            </a:r>
+            <a:r>
+              <a:rPr sz="1850" b="0" i="0">
+                <a:solidFill>
+                  <a:srgbClr val="1B2A38"/>
+                </a:solidFill>
+                <a:latin typeface="맑은 고딕"/>
+                <a:ea typeface="맑은 고딕"/>
+                <a:cs typeface="맑은 고딕"/>
+              </a:rPr>
+              <a:t>Kulik &amp; Fletcher(2016): ITS 중앙값 +0.66σ, 92% 연구에서 전통수업 능가</a:t>
+            </a:r>
+          </a:p>
+          <a:p>
+            <a:pPr algn="l" lvl="1">
+              <a:lnSpc>
+                <a:spcPct val="116000"/>
+              </a:lnSpc>
+              <a:spcBef>
+                <a:spcPts val="0"/>
+              </a:spcBef>
+              <a:spcAft>
+                <a:spcPts val="600"/>
+              </a:spcAft>
+            </a:pPr>
+            <a:r>
+              <a:rPr sz="1300" b="1" i="0">
+                <a:solidFill>
+                  <a:srgbClr val="6E7B8A"/>
+                </a:solidFill>
+                <a:latin typeface="맑은 고딕"/>
+                <a:ea typeface="맑은 고딕"/>
+                <a:cs typeface="맑은 고딕"/>
+              </a:rPr>
+              <a:t>–  </a:t>
+            </a:r>
+            <a:r>
+              <a:rPr sz="1550" b="0" i="0">
+                <a:solidFill>
+                  <a:srgbClr val="6E7B8A"/>
+                </a:solidFill>
+                <a:latin typeface="맑은 고딕"/>
+                <a:ea typeface="맑은 고딕"/>
+                <a:cs typeface="맑은 고딕"/>
+              </a:rPr>
+              <a:t>‘2σ’는 인간만의 값이 아니라, 잘 설계된 기술로 좁힐 수 있는 격차</a:t>
+            </a:r>
+          </a:p>
+        </p:txBody>
+      </p:sp>
+      <p:sp>
+        <p:nvSpPr>
+          <p:cNvPr id="7" name="TextBox 6"/>
+          <p:cNvSpPr txBox="1"/>
+          <p:nvPr/>
+        </p:nvSpPr>
+        <p:spPr>
+          <a:xfrm>
+            <a:off x="777240" y="6419088"/>
+            <a:ext cx="8229600" cy="320040"/>
+          </a:xfrm>
+          <a:prstGeom prst="rect">
+            <a:avLst/>
+          </a:prstGeom>
+          <a:noFill/>
+        </p:spPr>
+        <p:txBody>
+          <a:bodyPr wrap="square" anchor="t" lIns="0" rIns="0" tIns="0" bIns="0">
+            <a:spAutoFit/>
+          </a:bodyPr>
+          <a:lstStyle/>
+          <a:p>
+            <a:pPr algn="l">
+              <a:spcBef>
+                <a:spcPts val="0"/>
+              </a:spcBef>
+              <a:spcAft>
+                <a:spcPts val="0"/>
+              </a:spcAft>
+            </a:pPr>
+            <a:r>
+              <a:rPr sz="1050" b="0" i="0">
+                <a:solidFill>
+                  <a:srgbClr val="6E7B8A"/>
+                </a:solidFill>
+                <a:latin typeface="맑은 고딕"/>
+                <a:ea typeface="맑은 고딕"/>
+                <a:cs typeface="맑은 고딕"/>
+              </a:rPr>
+              <a:t>블룸 2σ · 초개별화 맞춤형 교육</a:t>
+            </a:r>
+          </a:p>
+        </p:txBody>
+      </p:sp>
+      <p:sp>
+        <p:nvSpPr>
+          <p:cNvPr id="8" name="TextBox 7"/>
+          <p:cNvSpPr txBox="1"/>
+          <p:nvPr/>
+        </p:nvSpPr>
+        <p:spPr>
+          <a:xfrm>
+            <a:off x="10607040" y="6419088"/>
+            <a:ext cx="822960" cy="320040"/>
+          </a:xfrm>
+          <a:prstGeom prst="rect">
+            <a:avLst/>
+          </a:prstGeom>
+          <a:noFill/>
+        </p:spPr>
+        <p:txBody>
+          <a:bodyPr wrap="square" anchor="t" lIns="0" rIns="0" tIns="0" bIns="0">
+            <a:spAutoFit/>
+          </a:bodyPr>
+          <a:lstStyle/>
+          <a:p>
+            <a:pPr algn="r">
+              <a:spcBef>
+                <a:spcPts val="0"/>
+              </a:spcBef>
+              <a:spcAft>
+                <a:spcPts val="0"/>
+              </a:spcAft>
+            </a:pPr>
+            <a:r>
+              <a:rPr sz="1050" b="0" i="0">
+                <a:solidFill>
+                  <a:srgbClr val="6E7B8A"/>
+                </a:solidFill>
+                <a:latin typeface="맑은 고딕"/>
+                <a:ea typeface="맑은 고딕"/>
+                <a:cs typeface="맑은 고딕"/>
+              </a:rPr>
+              <a:t>4</a:t>
             </a:r>
           </a:p>
         </p:txBody>
